--- a/taqdimot.pptx
+++ b/taqdimot.pptx
@@ -192,7 +192,7 @@
                 <a:cs typeface="Times New Roman"/>
                 <a:ea typeface="Times New Roman"/>
               </a:rPr>
-              <a:t>Computer Processor</a:t>
+              <a:t>Rasm: Protsessor</a:t>
             </a:r>
           </a:p>
         </p:txBody>
@@ -494,7 +494,7 @@
                 <a:cs typeface="Times New Roman"/>
                 <a:ea typeface="Times New Roman"/>
               </a:rPr>
-              <a:t>Abstract IT</a:t>
+              <a:t>Rasm: Axborot texnologiyalari</a:t>
             </a:r>
           </a:p>
         </p:txBody>
@@ -737,7 +737,7 @@
                 <a:cs typeface="Times New Roman"/>
                 <a:ea typeface="Times New Roman"/>
               </a:rPr>
-              <a:t>PC Internals</a:t>
+              <a:t>Rasm: Kompyuter ichki tuzilishi</a:t>
             </a:r>
           </a:p>
         </p:txBody>
@@ -998,7 +998,7 @@
                 <a:cs typeface="Times New Roman"/>
                 <a:ea typeface="Times New Roman"/>
               </a:rPr>
-              <a:t>Transistors Microchip</a:t>
+              <a:t>Rasm: Tranzistorlar va mikrochip</a:t>
             </a:r>
           </a:p>
         </p:txBody>
@@ -1241,7 +1241,7 @@
                 <a:cs typeface="Times New Roman"/>
                 <a:ea typeface="Times New Roman"/>
               </a:rPr>
-              <a:t>Physics Energy</a:t>
+              <a:t>Rasm: Energiya va fizika</a:t>
             </a:r>
           </a:p>
         </p:txBody>
@@ -1484,7 +1484,7 @@
                 <a:cs typeface="Times New Roman"/>
                 <a:ea typeface="Times New Roman"/>
               </a:rPr>
-              <a:t>Thermal Paste</a:t>
+              <a:t>Rasm: Termopasta</a:t>
             </a:r>
           </a:p>
         </p:txBody>
@@ -1727,7 +1727,7 @@
                 <a:cs typeface="Times New Roman"/>
                 <a:ea typeface="Times New Roman"/>
               </a:rPr>
-              <a:t>Heatsink</a:t>
+              <a:t>Rasm: Radiator (Heatsink)</a:t>
             </a:r>
           </a:p>
         </p:txBody>
@@ -1970,7 +1970,7 @@
                 <a:cs typeface="Times New Roman"/>
                 <a:ea typeface="Times New Roman"/>
               </a:rPr>
-              <a:t>Computer Fan</a:t>
+              <a:t>Rasm: Kuler (ventilyator)</a:t>
             </a:r>
           </a:p>
         </p:txBody>
@@ -2213,7 +2213,7 @@
                 <a:cs typeface="Times New Roman"/>
                 <a:ea typeface="Times New Roman"/>
               </a:rPr>
-              <a:t>Liquid Cooling</a:t>
+              <a:t>Rasm: Suvli sovutish</a:t>
             </a:r>
           </a:p>
         </p:txBody>
@@ -2456,7 +2456,7 @@
                 <a:cs typeface="Times New Roman"/>
                 <a:ea typeface="Times New Roman"/>
               </a:rPr>
-              <a:t>Data Center</a:t>
+              <a:t>Rasm: Ma'lumotlar markazi</a:t>
             </a:r>
           </a:p>
         </p:txBody>

--- a/taqdimot.pptx
+++ b/taqdimot.pptx
@@ -132,7 +132,7 @@
         <p:spPr>
           <a:xfrm>
             <a:off x="0" y="0"/>
-            <a:ext cx="164592" cy="6858000"/>
+            <a:ext cx="128016" cy="6858000"/>
           </a:xfrm>
           <a:prstGeom prst="rect">
             <a:avLst/>
@@ -151,40 +151,59 @@
       </p:sp>
       <p:sp>
         <p:nvSpPr>
-          <p:cNvPr id="4" name="placeholder"/>
-          <p:cNvSpPr/>
-          <p:nvPr/>
-        </p:nvSpPr>
-        <p:spPr>
-          <a:xfrm>
-            <a:off x="7863840" y="914400"/>
-            <a:ext cx="3840480" cy="4846320"/>
-          </a:xfrm>
-          <a:prstGeom prst="rect">
-            <a:avLst/>
-          </a:prstGeom>
-          <a:solidFill>
-            <a:srgbClr val="161B22"/>
-          </a:solidFill>
-          <a:ln w="25400">
-            <a:solidFill>
-              <a:srgbClr val="00B4D8"/>
-            </a:solidFill>
-          </a:ln>
-        </p:spPr>
-        <p:txBody>
-          <a:bodyPr wrap="square" anchor="ctr">
+          <p:cNvPr id="4" name="heroline"/>
+          <p:cNvSpPr/>
+          <p:nvPr/>
+        </p:nvSpPr>
+        <p:spPr>
+          <a:xfrm>
+            <a:off x="914400" y="2194560"/>
+            <a:ext cx="10360152" cy="36576"/>
+          </a:xfrm>
+          <a:prstGeom prst="rect">
+            <a:avLst/>
+          </a:prstGeom>
+          <a:solidFill>
+            <a:srgbClr val="00B4D8"/>
+          </a:solidFill>
+        </p:spPr>
+        <p:txBody>
+          <a:bodyPr wrap="square" anchor="ctr">
+            <a:normAutofit/>
+          </a:bodyPr>
+          <a:lstStyle/>
+          <a:p/>
+        </p:txBody>
+      </p:sp>
+      <p:sp>
+        <p:nvSpPr>
+          <p:cNvPr id="5" name="title"/>
+          <p:cNvSpPr txBox="1"/>
+          <p:nvPr/>
+        </p:nvSpPr>
+        <p:spPr>
+          <a:xfrm>
+            <a:off x="914400" y="1188720"/>
+            <a:ext cx="10360152" cy="1188720"/>
+          </a:xfrm>
+          <a:prstGeom prst="rect">
+            <a:avLst/>
+          </a:prstGeom>
+          <a:noFill/>
+        </p:spPr>
+        <p:txBody>
+          <a:bodyPr wrap="square" lIns="45720" rIns="45720" anchor="ctr">
             <a:normAutofit/>
           </a:bodyPr>
           <a:lstStyle/>
           <a:p>
             <a:pPr algn="ctr">
               <a:spcAft>
-                <a:spcPts val="400"/>
+                <a:spcPts val="0"/>
               </a:spcAft>
             </a:pPr>
             <a:r>
-              <a:rPr lang="uz-UZ" sz="1400" b="1" dirty="0">
+              <a:rPr lang="uz-UZ" sz="4000" b="1" dirty="0">
                 <a:solidFill>
                   <a:srgbClr val="00B4D8"/>
                 </a:solidFill>
@@ -192,21 +211,21 @@
                 <a:cs typeface="Times New Roman"/>
                 <a:ea typeface="Times New Roman"/>
               </a:rPr>
-              <a:t>Rasm: Protsessor</a:t>
+              <a:t>Kompyuterlar nima uchun qiziydi va qanday soviydi?</a:t>
             </a:r>
           </a:p>
         </p:txBody>
       </p:sp>
       <p:sp>
         <p:nvSpPr>
-          <p:cNvPr id="5" name="title"/>
+          <p:cNvPr id="6" name="subtitle"/>
           <p:cNvSpPr txBox="1"/>
           <p:nvPr/>
         </p:nvSpPr>
         <p:spPr>
           <a:xfrm>
-            <a:off x="457200" y="457200"/>
-            <a:ext cx="7132320" cy="1463040"/>
+            <a:off x="1463040" y="2468880"/>
+            <a:ext cx="9262872" cy="1005840"/>
           </a:xfrm>
           <a:prstGeom prst="rect">
             <a:avLst/>
@@ -214,40 +233,228 @@
           <a:noFill/>
         </p:spPr>
         <p:txBody>
-          <a:bodyPr wrap="square" anchor="t">
+          <a:bodyPr wrap="square" lIns="45720" rIns="45720" anchor="ctr">
+            <a:normAutofit/>
+          </a:bodyPr>
+          <a:lstStyle/>
+          <a:p>
+            <a:pPr algn="ctr">
+              <a:spcAft>
+                <a:spcPts val="0"/>
+              </a:spcAft>
+            </a:pPr>
+            <a:r>
+              <a:rPr lang="uz-UZ" sz="2200" dirty="0">
+                <a:solidFill>
+                  <a:srgbClr val="F0F6FC"/>
+                </a:solidFill>
+                <a:latin typeface="Times New Roman"/>
+                <a:cs typeface="Times New Roman"/>
+                <a:ea typeface="Times New Roman"/>
+              </a:rPr>
+              <a:t>Protsessor ishlayotganda issiqlik ajralib chiqishi va kulerlar yordamida sovutish fizikasi.</a:t>
+            </a:r>
+          </a:p>
+        </p:txBody>
+      </p:sp>
+      <p:sp>
+        <p:nvSpPr>
+          <p:cNvPr id="7" name="body"/>
+          <p:cNvSpPr txBox="1"/>
+          <p:nvPr/>
+        </p:nvSpPr>
+        <p:spPr>
+          <a:xfrm>
+            <a:off x="2286000" y="3657600"/>
+            <a:ext cx="7616952" cy="2194560"/>
+          </a:xfrm>
+          <a:prstGeom prst="rect">
+            <a:avLst/>
+          </a:prstGeom>
+          <a:noFill/>
+        </p:spPr>
+        <p:txBody>
+          <a:bodyPr wrap="square" lIns="45720" rIns="45720" anchor="t">
+            <a:normAutofit/>
+          </a:bodyPr>
+          <a:lstStyle/>
+          <a:p>
+            <a:pPr algn="ctr">
+              <a:spcAft>
+                <a:spcPts val="500"/>
+              </a:spcAft>
+            </a:pPr>
+            <a:r>
+              <a:rPr lang="uz-UZ" sz="1400" dirty="0">
+                <a:solidFill>
+                  <a:srgbClr val="F0F6FC"/>
+                </a:solidFill>
+                <a:latin typeface="Times New Roman"/>
+                <a:cs typeface="Times New Roman"/>
+                <a:ea typeface="Times New Roman"/>
+              </a:rPr>
+              <a:t>▪  Universitet: Jizzax davlat pedagogika universiteti tabiiy fanlar oliy maktabi</a:t>
+            </a:r>
+          </a:p>
+          <a:p>
+            <a:pPr algn="ctr">
+              <a:spcAft>
+                <a:spcPts val="500"/>
+              </a:spcAft>
+            </a:pPr>
+            <a:r>
+              <a:rPr lang="uz-UZ" sz="1400" dirty="0">
+                <a:solidFill>
+                  <a:srgbClr val="F0F6FC"/>
+                </a:solidFill>
+                <a:latin typeface="Times New Roman"/>
+                <a:cs typeface="Times New Roman"/>
+                <a:ea typeface="Times New Roman"/>
+              </a:rPr>
+              <a:t>▪  Fan: Axborot tizimlari</a:t>
+            </a:r>
+          </a:p>
+          <a:p>
+            <a:pPr algn="ctr">
+              <a:spcAft>
+                <a:spcPts val="500"/>
+              </a:spcAft>
+            </a:pPr>
+            <a:r>
+              <a:rPr lang="uz-UZ" sz="1400" dirty="0">
+                <a:solidFill>
+                  <a:srgbClr val="F0F6FC"/>
+                </a:solidFill>
+                <a:latin typeface="Times New Roman"/>
+                <a:cs typeface="Times New Roman"/>
+                <a:ea typeface="Times New Roman"/>
+              </a:rPr>
+              <a:t>▪  Guruh: 242_26</a:t>
+            </a:r>
+          </a:p>
+          <a:p>
+            <a:pPr algn="ctr">
+              <a:spcAft>
+                <a:spcPts val="500"/>
+              </a:spcAft>
+            </a:pPr>
+            <a:r>
+              <a:rPr lang="uz-UZ" sz="1400" dirty="0">
+                <a:solidFill>
+                  <a:srgbClr val="F0F6FC"/>
+                </a:solidFill>
+                <a:latin typeface="Times New Roman"/>
+                <a:cs typeface="Times New Roman"/>
+                <a:ea typeface="Times New Roman"/>
+              </a:rPr>
+              <a:t>▪  Talaba: Toshboʻriyeva Marjona</a:t>
+            </a:r>
+          </a:p>
+        </p:txBody>
+      </p:sp>
+      <p:sp>
+        <p:nvSpPr>
+          <p:cNvPr id="8" name="footerband"/>
+          <p:cNvSpPr/>
+          <p:nvPr/>
+        </p:nvSpPr>
+        <p:spPr>
+          <a:xfrm>
+            <a:off x="0" y="6473952"/>
+            <a:ext cx="12192000" cy="384048"/>
+          </a:xfrm>
+          <a:prstGeom prst="rect">
+            <a:avLst/>
+          </a:prstGeom>
+          <a:solidFill>
+            <a:srgbClr val="11202E"/>
+          </a:solidFill>
+        </p:spPr>
+        <p:txBody>
+          <a:bodyPr wrap="square" anchor="ctr">
+            <a:normAutofit/>
+          </a:bodyPr>
+          <a:lstStyle/>
+          <a:p/>
+        </p:txBody>
+      </p:sp>
+      <p:sp>
+        <p:nvSpPr>
+          <p:cNvPr id="9" name="footeraccent"/>
+          <p:cNvSpPr/>
+          <p:nvPr/>
+        </p:nvSpPr>
+        <p:spPr>
+          <a:xfrm>
+            <a:off x="0" y="6473952"/>
+            <a:ext cx="12192000" cy="27432"/>
+          </a:xfrm>
+          <a:prstGeom prst="rect">
+            <a:avLst/>
+          </a:prstGeom>
+          <a:solidFill>
+            <a:srgbClr val="00B4D8"/>
+          </a:solidFill>
+        </p:spPr>
+        <p:txBody>
+          <a:bodyPr wrap="square" anchor="ctr">
+            <a:normAutofit/>
+          </a:bodyPr>
+          <a:lstStyle/>
+          <a:p/>
+        </p:txBody>
+      </p:sp>
+      <p:sp>
+        <p:nvSpPr>
+          <p:cNvPr id="10" name="footerlabel"/>
+          <p:cNvSpPr txBox="1"/>
+          <p:nvPr/>
+        </p:nvSpPr>
+        <p:spPr>
+          <a:xfrm>
+            <a:off x="548640" y="6473952"/>
+            <a:ext cx="8229600" cy="384048"/>
+          </a:xfrm>
+          <a:prstGeom prst="rect">
+            <a:avLst/>
+          </a:prstGeom>
+          <a:noFill/>
+        </p:spPr>
+        <p:txBody>
+          <a:bodyPr wrap="square" lIns="45720" rIns="45720" anchor="ctr">
             <a:normAutofit/>
           </a:bodyPr>
           <a:lstStyle/>
           <a:p>
             <a:pPr algn="l">
               <a:spcAft>
-                <a:spcPts val="400"/>
+                <a:spcPts val="0"/>
               </a:spcAft>
             </a:pPr>
             <a:r>
-              <a:rPr lang="uz-UZ" sz="4000" b="1" dirty="0">
-                <a:solidFill>
-                  <a:srgbClr val="00B4D8"/>
-                </a:solidFill>
-                <a:latin typeface="Times New Roman"/>
-                <a:cs typeface="Times New Roman"/>
-                <a:ea typeface="Times New Roman"/>
-              </a:rPr>
-              <a:t>Kompyuterlar nima uchun qiziydi va qanday soviydi?</a:t>
+              <a:rPr lang="uz-UZ" sz="1200" dirty="0">
+                <a:solidFill>
+                  <a:srgbClr val="9FB3C8"/>
+                </a:solidFill>
+                <a:latin typeface="Times New Roman"/>
+                <a:cs typeface="Times New Roman"/>
+                <a:ea typeface="Times New Roman"/>
+              </a:rPr>
+              <a:t>Kompyuter qizishi va sovutish fizikasi</a:t>
             </a:r>
           </a:p>
         </p:txBody>
       </p:sp>
       <p:sp>
         <p:nvSpPr>
-          <p:cNvPr id="6" name="subtitle"/>
+          <p:cNvPr id="11" name="footernum"/>
           <p:cNvSpPr txBox="1"/>
           <p:nvPr/>
         </p:nvSpPr>
         <p:spPr>
           <a:xfrm>
-            <a:off x="457200" y="1920240"/>
-            <a:ext cx="7132320" cy="1005840"/>
+            <a:off x="10332720" y="6473952"/>
+            <a:ext cx="1371600" cy="384048"/>
           </a:xfrm>
           <a:prstGeom prst="rect">
             <a:avLst/>
@@ -255,121 +462,26 @@
           <a:noFill/>
         </p:spPr>
         <p:txBody>
-          <a:bodyPr wrap="square" anchor="t">
+          <a:bodyPr wrap="square" lIns="45720" rIns="45720" anchor="ctr">
             <a:normAutofit/>
           </a:bodyPr>
           <a:lstStyle/>
           <a:p>
-            <a:pPr algn="l">
+            <a:pPr algn="r">
               <a:spcAft>
-                <a:spcPts val="400"/>
+                <a:spcPts val="0"/>
               </a:spcAft>
             </a:pPr>
             <a:r>
-              <a:rPr lang="uz-UZ" sz="2200" dirty="0">
-                <a:solidFill>
-                  <a:srgbClr val="F0F6FC"/>
-                </a:solidFill>
-                <a:latin typeface="Times New Roman"/>
-                <a:cs typeface="Times New Roman"/>
-                <a:ea typeface="Times New Roman"/>
-              </a:rPr>
-              <a:t>Protsessor ishlayotganda issiqlik ajralib chiqishi va kulerlar yordamida sovutish fizikasi.</a:t>
-            </a:r>
-          </a:p>
-        </p:txBody>
-      </p:sp>
-      <p:sp>
-        <p:nvSpPr>
-          <p:cNvPr id="7" name="body"/>
-          <p:cNvSpPr txBox="1"/>
-          <p:nvPr/>
-        </p:nvSpPr>
-        <p:spPr>
-          <a:xfrm>
-            <a:off x="457200" y="3017520"/>
-            <a:ext cx="7132320" cy="3383280"/>
-          </a:xfrm>
-          <a:prstGeom prst="rect">
-            <a:avLst/>
-          </a:prstGeom>
-          <a:noFill/>
-        </p:spPr>
-        <p:txBody>
-          <a:bodyPr wrap="square" anchor="t">
-            <a:normAutofit/>
-          </a:bodyPr>
-          <a:lstStyle/>
-          <a:p>
-            <a:pPr algn="l">
-              <a:spcAft>
-                <a:spcPts val="400"/>
-              </a:spcAft>
-            </a:pPr>
-            <a:r>
-              <a:rPr lang="uz-UZ" sz="1400" dirty="0">
-                <a:solidFill>
-                  <a:srgbClr val="F0F6FC"/>
-                </a:solidFill>
-                <a:latin typeface="Times New Roman"/>
-                <a:cs typeface="Times New Roman"/>
-                <a:ea typeface="Times New Roman"/>
-              </a:rPr>
-              <a:t>Universitet: Jizzax davlat pedagogika universiteti tabiiy fanlar oliy maktabi</a:t>
-            </a:r>
-          </a:p>
-          <a:p>
-            <a:pPr algn="l">
-              <a:spcAft>
-                <a:spcPts val="400"/>
-              </a:spcAft>
-            </a:pPr>
-            <a:r>
-              <a:rPr lang="uz-UZ" sz="1400" dirty="0">
-                <a:solidFill>
-                  <a:srgbClr val="F0F6FC"/>
-                </a:solidFill>
-                <a:latin typeface="Times New Roman"/>
-                <a:cs typeface="Times New Roman"/>
-                <a:ea typeface="Times New Roman"/>
-              </a:rPr>
-              <a:t>Fan: Axborot tizimlari</a:t>
-            </a:r>
-          </a:p>
-          <a:p>
-            <a:pPr algn="l">
-              <a:spcAft>
-                <a:spcPts val="400"/>
-              </a:spcAft>
-            </a:pPr>
-            <a:r>
-              <a:rPr lang="uz-UZ" sz="1400" dirty="0">
-                <a:solidFill>
-                  <a:srgbClr val="F0F6FC"/>
-                </a:solidFill>
-                <a:latin typeface="Times New Roman"/>
-                <a:cs typeface="Times New Roman"/>
-                <a:ea typeface="Times New Roman"/>
-              </a:rPr>
-              <a:t>Guruh: 242_26</a:t>
-            </a:r>
-          </a:p>
-          <a:p>
-            <a:pPr algn="l">
-              <a:spcAft>
-                <a:spcPts val="400"/>
-              </a:spcAft>
-            </a:pPr>
-            <a:r>
-              <a:rPr lang="uz-UZ" sz="1400" dirty="0">
-                <a:solidFill>
-                  <a:srgbClr val="F0F6FC"/>
-                </a:solidFill>
-                <a:latin typeface="Times New Roman"/>
-                <a:cs typeface="Times New Roman"/>
-                <a:ea typeface="Times New Roman"/>
-              </a:rPr>
-              <a:t>Talaba: Toshboʻriyeva Marjona</a:t>
+              <a:rPr lang="uz-UZ" sz="1200" b="1" dirty="0">
+                <a:solidFill>
+                  <a:srgbClr val="00B4D8"/>
+                </a:solidFill>
+                <a:latin typeface="Times New Roman"/>
+                <a:cs typeface="Times New Roman"/>
+                <a:ea typeface="Times New Roman"/>
+              </a:rPr>
+              <a:t>1 / 10</a:t>
             </a:r>
           </a:p>
         </p:txBody>
@@ -434,7 +546,7 @@
         <p:spPr>
           <a:xfrm>
             <a:off x="0" y="0"/>
-            <a:ext cx="164592" cy="6858000"/>
+            <a:ext cx="128016" cy="6858000"/>
           </a:xfrm>
           <a:prstGeom prst="rect">
             <a:avLst/>
@@ -453,40 +565,59 @@
       </p:sp>
       <p:sp>
         <p:nvSpPr>
-          <p:cNvPr id="4" name="placeholder"/>
-          <p:cNvSpPr/>
-          <p:nvPr/>
-        </p:nvSpPr>
-        <p:spPr>
-          <a:xfrm>
-            <a:off x="7863840" y="914400"/>
-            <a:ext cx="3840480" cy="4846320"/>
-          </a:xfrm>
-          <a:prstGeom prst="rect">
-            <a:avLst/>
-          </a:prstGeom>
-          <a:solidFill>
-            <a:srgbClr val="161B22"/>
-          </a:solidFill>
-          <a:ln w="25400">
-            <a:solidFill>
-              <a:srgbClr val="00B4D8"/>
-            </a:solidFill>
-          </a:ln>
-        </p:spPr>
-        <p:txBody>
-          <a:bodyPr wrap="square" anchor="ctr">
+          <p:cNvPr id="4" name="heroline"/>
+          <p:cNvSpPr/>
+          <p:nvPr/>
+        </p:nvSpPr>
+        <p:spPr>
+          <a:xfrm>
+            <a:off x="914400" y="2194560"/>
+            <a:ext cx="10360152" cy="36576"/>
+          </a:xfrm>
+          <a:prstGeom prst="rect">
+            <a:avLst/>
+          </a:prstGeom>
+          <a:solidFill>
+            <a:srgbClr val="00B4D8"/>
+          </a:solidFill>
+        </p:spPr>
+        <p:txBody>
+          <a:bodyPr wrap="square" anchor="ctr">
+            <a:normAutofit/>
+          </a:bodyPr>
+          <a:lstStyle/>
+          <a:p/>
+        </p:txBody>
+      </p:sp>
+      <p:sp>
+        <p:nvSpPr>
+          <p:cNvPr id="5" name="title"/>
+          <p:cNvSpPr txBox="1"/>
+          <p:nvPr/>
+        </p:nvSpPr>
+        <p:spPr>
+          <a:xfrm>
+            <a:off x="914400" y="1188720"/>
+            <a:ext cx="10360152" cy="1188720"/>
+          </a:xfrm>
+          <a:prstGeom prst="rect">
+            <a:avLst/>
+          </a:prstGeom>
+          <a:noFill/>
+        </p:spPr>
+        <p:txBody>
+          <a:bodyPr wrap="square" lIns="45720" rIns="45720" anchor="ctr">
             <a:normAutofit/>
           </a:bodyPr>
           <a:lstStyle/>
           <a:p>
             <a:pPr algn="ctr">
               <a:spcAft>
-                <a:spcPts val="400"/>
+                <a:spcPts val="0"/>
               </a:spcAft>
             </a:pPr>
             <a:r>
-              <a:rPr lang="uz-UZ" sz="1400" b="1" dirty="0">
+              <a:rPr lang="uz-UZ" sz="4000" b="1" dirty="0">
                 <a:solidFill>
                   <a:srgbClr val="00B4D8"/>
                 </a:solidFill>
@@ -494,21 +625,21 @@
                 <a:cs typeface="Times New Roman"/>
                 <a:ea typeface="Times New Roman"/>
               </a:rPr>
-              <a:t>Rasm: Axborot texnologiyalari</a:t>
+              <a:t>E'tiboringiz uchun rahmat!</a:t>
             </a:r>
           </a:p>
         </p:txBody>
       </p:sp>
       <p:sp>
         <p:nvSpPr>
-          <p:cNvPr id="5" name="title"/>
+          <p:cNvPr id="6" name="body"/>
           <p:cNvSpPr txBox="1"/>
           <p:nvPr/>
         </p:nvSpPr>
         <p:spPr>
           <a:xfrm>
-            <a:off x="457200" y="457200"/>
-            <a:ext cx="7132320" cy="1463040"/>
+            <a:off x="2286000" y="3657600"/>
+            <a:ext cx="7616952" cy="2194560"/>
           </a:xfrm>
           <a:prstGeom prst="rect">
             <a:avLst/>
@@ -516,40 +647,169 @@
           <a:noFill/>
         </p:spPr>
         <p:txBody>
-          <a:bodyPr wrap="square" anchor="t">
+          <a:bodyPr wrap="square" lIns="45720" rIns="45720" anchor="t">
+            <a:normAutofit/>
+          </a:bodyPr>
+          <a:lstStyle/>
+          <a:p>
+            <a:pPr algn="ctr">
+              <a:spcAft>
+                <a:spcPts val="500"/>
+              </a:spcAft>
+            </a:pPr>
+            <a:r>
+              <a:rPr lang="uz-UZ" sz="1400" dirty="0">
+                <a:solidFill>
+                  <a:srgbClr val="F0F6FC"/>
+                </a:solidFill>
+                <a:latin typeface="Times New Roman"/>
+                <a:cs typeface="Times New Roman"/>
+                <a:ea typeface="Times New Roman"/>
+              </a:rPr>
+              <a:t>▪  Mavzu: Kompyuterning qizishi va sovutish fizikasi</a:t>
+            </a:r>
+          </a:p>
+          <a:p>
+            <a:pPr algn="ctr">
+              <a:spcAft>
+                <a:spcPts val="500"/>
+              </a:spcAft>
+            </a:pPr>
+            <a:r>
+              <a:rPr lang="uz-UZ" sz="1400" dirty="0">
+                <a:solidFill>
+                  <a:srgbClr val="F0F6FC"/>
+                </a:solidFill>
+                <a:latin typeface="Times New Roman"/>
+                <a:cs typeface="Times New Roman"/>
+                <a:ea typeface="Times New Roman"/>
+              </a:rPr>
+              <a:t>▪  Taqdimotchi: Toshboʻriyeva Marjona (242_26 - guruh)</a:t>
+            </a:r>
+          </a:p>
+          <a:p>
+            <a:pPr algn="ctr">
+              <a:spcAft>
+                <a:spcPts val="500"/>
+              </a:spcAft>
+            </a:pPr>
+            <a:r>
+              <a:rPr lang="uz-UZ" sz="1400" dirty="0">
+                <a:solidFill>
+                  <a:srgbClr val="F0F6FC"/>
+                </a:solidFill>
+                <a:latin typeface="Times New Roman"/>
+                <a:cs typeface="Times New Roman"/>
+                <a:ea typeface="Times New Roman"/>
+              </a:rPr>
+              <a:t>▪  Jizzax davlat pedagogika universiteti - Axborot tizimlari fani.</a:t>
+            </a:r>
+          </a:p>
+        </p:txBody>
+      </p:sp>
+      <p:sp>
+        <p:nvSpPr>
+          <p:cNvPr id="7" name="footerband"/>
+          <p:cNvSpPr/>
+          <p:nvPr/>
+        </p:nvSpPr>
+        <p:spPr>
+          <a:xfrm>
+            <a:off x="0" y="6473952"/>
+            <a:ext cx="12192000" cy="384048"/>
+          </a:xfrm>
+          <a:prstGeom prst="rect">
+            <a:avLst/>
+          </a:prstGeom>
+          <a:solidFill>
+            <a:srgbClr val="11202E"/>
+          </a:solidFill>
+        </p:spPr>
+        <p:txBody>
+          <a:bodyPr wrap="square" anchor="ctr">
+            <a:normAutofit/>
+          </a:bodyPr>
+          <a:lstStyle/>
+          <a:p/>
+        </p:txBody>
+      </p:sp>
+      <p:sp>
+        <p:nvSpPr>
+          <p:cNvPr id="8" name="footeraccent"/>
+          <p:cNvSpPr/>
+          <p:nvPr/>
+        </p:nvSpPr>
+        <p:spPr>
+          <a:xfrm>
+            <a:off x="0" y="6473952"/>
+            <a:ext cx="12192000" cy="27432"/>
+          </a:xfrm>
+          <a:prstGeom prst="rect">
+            <a:avLst/>
+          </a:prstGeom>
+          <a:solidFill>
+            <a:srgbClr val="00B4D8"/>
+          </a:solidFill>
+        </p:spPr>
+        <p:txBody>
+          <a:bodyPr wrap="square" anchor="ctr">
+            <a:normAutofit/>
+          </a:bodyPr>
+          <a:lstStyle/>
+          <a:p/>
+        </p:txBody>
+      </p:sp>
+      <p:sp>
+        <p:nvSpPr>
+          <p:cNvPr id="9" name="footerlabel"/>
+          <p:cNvSpPr txBox="1"/>
+          <p:nvPr/>
+        </p:nvSpPr>
+        <p:spPr>
+          <a:xfrm>
+            <a:off x="548640" y="6473952"/>
+            <a:ext cx="8229600" cy="384048"/>
+          </a:xfrm>
+          <a:prstGeom prst="rect">
+            <a:avLst/>
+          </a:prstGeom>
+          <a:noFill/>
+        </p:spPr>
+        <p:txBody>
+          <a:bodyPr wrap="square" lIns="45720" rIns="45720" anchor="ctr">
             <a:normAutofit/>
           </a:bodyPr>
           <a:lstStyle/>
           <a:p>
             <a:pPr algn="l">
               <a:spcAft>
-                <a:spcPts val="400"/>
+                <a:spcPts val="0"/>
               </a:spcAft>
             </a:pPr>
             <a:r>
-              <a:rPr lang="uz-UZ" sz="4000" b="1" dirty="0">
-                <a:solidFill>
-                  <a:srgbClr val="00B4D8"/>
-                </a:solidFill>
-                <a:latin typeface="Times New Roman"/>
-                <a:cs typeface="Times New Roman"/>
-                <a:ea typeface="Times New Roman"/>
-              </a:rPr>
-              <a:t>E'tiboringiz uchun rahmat!</a:t>
+              <a:rPr lang="uz-UZ" sz="1200" dirty="0">
+                <a:solidFill>
+                  <a:srgbClr val="9FB3C8"/>
+                </a:solidFill>
+                <a:latin typeface="Times New Roman"/>
+                <a:cs typeface="Times New Roman"/>
+                <a:ea typeface="Times New Roman"/>
+              </a:rPr>
+              <a:t>Kompyuter qizishi va sovutish fizikasi</a:t>
             </a:r>
           </a:p>
         </p:txBody>
       </p:sp>
       <p:sp>
         <p:nvSpPr>
-          <p:cNvPr id="6" name="body"/>
+          <p:cNvPr id="10" name="footernum"/>
           <p:cNvSpPr txBox="1"/>
           <p:nvPr/>
         </p:nvSpPr>
         <p:spPr>
           <a:xfrm>
-            <a:off x="457200" y="2103120"/>
-            <a:ext cx="7132320" cy="4297680"/>
+            <a:off x="10332720" y="6473952"/>
+            <a:ext cx="1371600" cy="384048"/>
           </a:xfrm>
           <a:prstGeom prst="rect">
             <a:avLst/>
@@ -557,62 +817,26 @@
           <a:noFill/>
         </p:spPr>
         <p:txBody>
-          <a:bodyPr wrap="square" anchor="t">
+          <a:bodyPr wrap="square" lIns="45720" rIns="45720" anchor="ctr">
             <a:normAutofit/>
           </a:bodyPr>
           <a:lstStyle/>
           <a:p>
-            <a:pPr algn="l">
+            <a:pPr algn="r">
               <a:spcAft>
-                <a:spcPts val="400"/>
+                <a:spcPts val="0"/>
               </a:spcAft>
             </a:pPr>
             <a:r>
-              <a:rPr lang="uz-UZ" sz="1400" dirty="0">
-                <a:solidFill>
-                  <a:srgbClr val="F0F6FC"/>
-                </a:solidFill>
-                <a:latin typeface="Times New Roman"/>
-                <a:cs typeface="Times New Roman"/>
-                <a:ea typeface="Times New Roman"/>
-              </a:rPr>
-              <a:t>Mavzu: Kompyuterning qizishi va sovutish fizikasi</a:t>
-            </a:r>
-          </a:p>
-          <a:p>
-            <a:pPr algn="l">
-              <a:spcAft>
-                <a:spcPts val="400"/>
-              </a:spcAft>
-            </a:pPr>
-            <a:r>
-              <a:rPr lang="uz-UZ" sz="1400" dirty="0">
-                <a:solidFill>
-                  <a:srgbClr val="F0F6FC"/>
-                </a:solidFill>
-                <a:latin typeface="Times New Roman"/>
-                <a:cs typeface="Times New Roman"/>
-                <a:ea typeface="Times New Roman"/>
-              </a:rPr>
-              <a:t>Taqdimotchi: Toshboʻriyeva Marjona (242_26 - guruh)</a:t>
-            </a:r>
-          </a:p>
-          <a:p>
-            <a:pPr algn="l">
-              <a:spcAft>
-                <a:spcPts val="400"/>
-              </a:spcAft>
-            </a:pPr>
-            <a:r>
-              <a:rPr lang="uz-UZ" sz="1400" dirty="0">
-                <a:solidFill>
-                  <a:srgbClr val="F0F6FC"/>
-                </a:solidFill>
-                <a:latin typeface="Times New Roman"/>
-                <a:cs typeface="Times New Roman"/>
-                <a:ea typeface="Times New Roman"/>
-              </a:rPr>
-              <a:t>Jizzax davlat pedagogika universiteti - Axborot tizimlari fani.</a:t>
+              <a:rPr lang="uz-UZ" sz="1200" b="1" dirty="0">
+                <a:solidFill>
+                  <a:srgbClr val="00B4D8"/>
+                </a:solidFill>
+                <a:latin typeface="Times New Roman"/>
+                <a:cs typeface="Times New Roman"/>
+                <a:ea typeface="Times New Roman"/>
+              </a:rPr>
+              <a:t>10 / 10</a:t>
             </a:r>
           </a:p>
         </p:txBody>
@@ -677,7 +901,7 @@
         <p:spPr>
           <a:xfrm>
             <a:off x="0" y="0"/>
-            <a:ext cx="164592" cy="6858000"/>
+            <a:ext cx="128016" cy="6858000"/>
           </a:xfrm>
           <a:prstGeom prst="rect">
             <a:avLst/>
@@ -696,22 +920,115 @@
       </p:sp>
       <p:sp>
         <p:nvSpPr>
-          <p:cNvPr id="4" name="placeholder"/>
-          <p:cNvSpPr/>
-          <p:nvPr/>
-        </p:nvSpPr>
-        <p:spPr>
-          <a:xfrm>
-            <a:off x="7863840" y="914400"/>
-            <a:ext cx="3840480" cy="4846320"/>
-          </a:xfrm>
-          <a:prstGeom prst="rect">
-            <a:avLst/>
-          </a:prstGeom>
-          <a:solidFill>
-            <a:srgbClr val="161B22"/>
-          </a:solidFill>
-          <a:ln w="25400">
+          <p:cNvPr id="4" name="headerband"/>
+          <p:cNvSpPr/>
+          <p:nvPr/>
+        </p:nvSpPr>
+        <p:spPr>
+          <a:xfrm>
+            <a:off x="128016" y="0"/>
+            <a:ext cx="12063984" cy="1417320"/>
+          </a:xfrm>
+          <a:prstGeom prst="rect">
+            <a:avLst/>
+          </a:prstGeom>
+          <a:solidFill>
+            <a:srgbClr val="11202E"/>
+          </a:solidFill>
+        </p:spPr>
+        <p:txBody>
+          <a:bodyPr wrap="square" anchor="ctr">
+            <a:normAutofit/>
+          </a:bodyPr>
+          <a:lstStyle/>
+          <a:p/>
+        </p:txBody>
+      </p:sp>
+      <p:sp>
+        <p:nvSpPr>
+          <p:cNvPr id="5" name="titleline"/>
+          <p:cNvSpPr/>
+          <p:nvPr/>
+        </p:nvSpPr>
+        <p:spPr>
+          <a:xfrm>
+            <a:off x="548640" y="1170432"/>
+            <a:ext cx="4754880" cy="41148"/>
+          </a:xfrm>
+          <a:prstGeom prst="rect">
+            <a:avLst/>
+          </a:prstGeom>
+          <a:solidFill>
+            <a:srgbClr val="00B4D8"/>
+          </a:solidFill>
+        </p:spPr>
+        <p:txBody>
+          <a:bodyPr wrap="square" anchor="ctr">
+            <a:normAutofit/>
+          </a:bodyPr>
+          <a:lstStyle/>
+          <a:p/>
+        </p:txBody>
+      </p:sp>
+      <p:sp>
+        <p:nvSpPr>
+          <p:cNvPr id="6" name="title"/>
+          <p:cNvSpPr txBox="1"/>
+          <p:nvPr/>
+        </p:nvSpPr>
+        <p:spPr>
+          <a:xfrm>
+            <a:off x="548640" y="274320"/>
+            <a:ext cx="10607040" cy="914400"/>
+          </a:xfrm>
+          <a:prstGeom prst="rect">
+            <a:avLst/>
+          </a:prstGeom>
+          <a:noFill/>
+        </p:spPr>
+        <p:txBody>
+          <a:bodyPr wrap="square" lIns="45720" rIns="45720" anchor="ctr">
+            <a:normAutofit/>
+          </a:bodyPr>
+          <a:lstStyle/>
+          <a:p>
+            <a:pPr algn="l">
+              <a:spcAft>
+                <a:spcPts val="0"/>
+              </a:spcAft>
+            </a:pPr>
+            <a:r>
+              <a:rPr lang="uz-UZ" sz="3200" b="1" dirty="0">
+                <a:solidFill>
+                  <a:srgbClr val="00B4D8"/>
+                </a:solidFill>
+                <a:latin typeface="Times New Roman"/>
+                <a:cs typeface="Times New Roman"/>
+                <a:ea typeface="Times New Roman"/>
+              </a:rPr>
+              <a:t>Taqdimot rejasi</a:t>
+            </a:r>
+          </a:p>
+        </p:txBody>
+      </p:sp>
+      <p:sp>
+        <p:nvSpPr>
+          <p:cNvPr id="7" name="imgframe"/>
+          <p:cNvSpPr/>
+          <p:nvPr/>
+        </p:nvSpPr>
+        <p:spPr>
+          <a:xfrm>
+            <a:off x="7754112" y="1719072"/>
+            <a:ext cx="4014216" cy="3831336"/>
+          </a:xfrm>
+          <a:prstGeom prst="rect">
+            <a:avLst/>
+          </a:prstGeom>
+          <a:solidFill>
+            <a:srgbClr val="1F2630"/>
+          </a:solidFill>
+          <a:ln w="28575">
             <a:solidFill>
               <a:srgbClr val="00B4D8"/>
             </a:solidFill>
@@ -722,10 +1039,398 @@
             <a:normAutofit/>
           </a:bodyPr>
           <a:lstStyle/>
+          <a:p/>
+        </p:txBody>
+      </p:sp>
+      <p:sp>
+        <p:nvSpPr>
+          <p:cNvPr id="8" name="placeholder"/>
+          <p:cNvSpPr/>
+          <p:nvPr/>
+        </p:nvSpPr>
+        <p:spPr>
+          <a:xfrm>
+            <a:off x="7818120" y="1783080"/>
+            <a:ext cx="3886200" cy="3703320"/>
+          </a:xfrm>
+          <a:prstGeom prst="rect">
+            <a:avLst/>
+          </a:prstGeom>
+          <a:solidFill>
+            <a:srgbClr val="161B22"/>
+          </a:solidFill>
+        </p:spPr>
+        <p:txBody>
+          <a:bodyPr wrap="square" anchor="ctr">
+            <a:normAutofit/>
+          </a:bodyPr>
+          <a:lstStyle/>
+          <a:p/>
+        </p:txBody>
+      </p:sp>
+      <p:sp>
+        <p:nvSpPr>
+          <p:cNvPr id="9" name="chip0"/>
+          <p:cNvSpPr/>
+          <p:nvPr/>
+        </p:nvSpPr>
+        <p:spPr>
+          <a:xfrm>
+            <a:off x="9100566" y="2708910"/>
+            <a:ext cx="1321308" cy="1259128"/>
+          </a:xfrm>
+          <a:prstGeom prst="rect">
+            <a:avLst/>
+          </a:prstGeom>
+          <a:solidFill>
+            <a:srgbClr val="00B4D8"/>
+          </a:solidFill>
+        </p:spPr>
+        <p:txBody>
+          <a:bodyPr wrap="square" anchor="ctr">
+            <a:normAutofit/>
+          </a:bodyPr>
+          <a:lstStyle/>
+          <a:p/>
+        </p:txBody>
+      </p:sp>
+      <p:sp>
+        <p:nvSpPr>
+          <p:cNvPr id="10" name="chip1"/>
+          <p:cNvSpPr/>
+          <p:nvPr/>
+        </p:nvSpPr>
+        <p:spPr>
+          <a:xfrm>
+            <a:off x="9294876" y="2894076"/>
+            <a:ext cx="932688" cy="888796"/>
+          </a:xfrm>
+          <a:prstGeom prst="rect">
+            <a:avLst/>
+          </a:prstGeom>
+          <a:solidFill>
+            <a:srgbClr val="1F2630"/>
+          </a:solidFill>
+        </p:spPr>
+        <p:txBody>
+          <a:bodyPr wrap="square" anchor="ctr">
+            <a:normAutofit/>
+          </a:bodyPr>
+          <a:lstStyle/>
+          <a:p/>
+        </p:txBody>
+      </p:sp>
+      <p:sp>
+        <p:nvSpPr>
+          <p:cNvPr id="11" name="chip2"/>
+          <p:cNvSpPr/>
+          <p:nvPr/>
+        </p:nvSpPr>
+        <p:spPr>
+          <a:xfrm>
+            <a:off x="9489186" y="3079242"/>
+            <a:ext cx="544068" cy="518464"/>
+          </a:xfrm>
+          <a:prstGeom prst="rect">
+            <a:avLst/>
+          </a:prstGeom>
+          <a:solidFill>
+            <a:srgbClr val="00B4D8"/>
+          </a:solidFill>
+        </p:spPr>
+        <p:txBody>
+          <a:bodyPr wrap="square" anchor="ctr">
+            <a:normAutofit/>
+          </a:bodyPr>
+          <a:lstStyle/>
+          <a:p/>
+        </p:txBody>
+      </p:sp>
+      <p:sp>
+        <p:nvSpPr>
+          <p:cNvPr id="12" name="pinl0"/>
+          <p:cNvSpPr/>
+          <p:nvPr/>
+        </p:nvSpPr>
+        <p:spPr>
+          <a:xfrm>
+            <a:off x="8935974" y="3009290"/>
+            <a:ext cx="164592" cy="45720"/>
+          </a:xfrm>
+          <a:prstGeom prst="rect">
+            <a:avLst/>
+          </a:prstGeom>
+          <a:solidFill>
+            <a:srgbClr val="00B4D8"/>
+          </a:solidFill>
+        </p:spPr>
+        <p:txBody>
+          <a:bodyPr wrap="square" anchor="ctr">
+            <a:normAutofit/>
+          </a:bodyPr>
+          <a:lstStyle/>
+          <a:p/>
+        </p:txBody>
+      </p:sp>
+      <p:sp>
+        <p:nvSpPr>
+          <p:cNvPr id="13" name="pinr0"/>
+          <p:cNvSpPr/>
+          <p:nvPr/>
+        </p:nvSpPr>
+        <p:spPr>
+          <a:xfrm>
+            <a:off x="10421874" y="3009290"/>
+            <a:ext cx="164592" cy="45720"/>
+          </a:xfrm>
+          <a:prstGeom prst="rect">
+            <a:avLst/>
+          </a:prstGeom>
+          <a:solidFill>
+            <a:srgbClr val="00B4D8"/>
+          </a:solidFill>
+        </p:spPr>
+        <p:txBody>
+          <a:bodyPr wrap="square" anchor="ctr">
+            <a:normAutofit/>
+          </a:bodyPr>
+          <a:lstStyle/>
+          <a:p/>
+        </p:txBody>
+      </p:sp>
+      <p:sp>
+        <p:nvSpPr>
+          <p:cNvPr id="14" name="pinl1"/>
+          <p:cNvSpPr/>
+          <p:nvPr/>
+        </p:nvSpPr>
+        <p:spPr>
+          <a:xfrm>
+            <a:off x="8935974" y="3173882"/>
+            <a:ext cx="164592" cy="45720"/>
+          </a:xfrm>
+          <a:prstGeom prst="rect">
+            <a:avLst/>
+          </a:prstGeom>
+          <a:solidFill>
+            <a:srgbClr val="00B4D8"/>
+          </a:solidFill>
+        </p:spPr>
+        <p:txBody>
+          <a:bodyPr wrap="square" anchor="ctr">
+            <a:normAutofit/>
+          </a:bodyPr>
+          <a:lstStyle/>
+          <a:p/>
+        </p:txBody>
+      </p:sp>
+      <p:sp>
+        <p:nvSpPr>
+          <p:cNvPr id="15" name="pinr1"/>
+          <p:cNvSpPr/>
+          <p:nvPr/>
+        </p:nvSpPr>
+        <p:spPr>
+          <a:xfrm>
+            <a:off x="10421874" y="3173882"/>
+            <a:ext cx="164592" cy="45720"/>
+          </a:xfrm>
+          <a:prstGeom prst="rect">
+            <a:avLst/>
+          </a:prstGeom>
+          <a:solidFill>
+            <a:srgbClr val="00B4D8"/>
+          </a:solidFill>
+        </p:spPr>
+        <p:txBody>
+          <a:bodyPr wrap="square" anchor="ctr">
+            <a:normAutofit/>
+          </a:bodyPr>
+          <a:lstStyle/>
+          <a:p/>
+        </p:txBody>
+      </p:sp>
+      <p:sp>
+        <p:nvSpPr>
+          <p:cNvPr id="16" name="pinl2"/>
+          <p:cNvSpPr/>
+          <p:nvPr/>
+        </p:nvSpPr>
+        <p:spPr>
+          <a:xfrm>
+            <a:off x="8935974" y="3338474"/>
+            <a:ext cx="164592" cy="45720"/>
+          </a:xfrm>
+          <a:prstGeom prst="rect">
+            <a:avLst/>
+          </a:prstGeom>
+          <a:solidFill>
+            <a:srgbClr val="00B4D8"/>
+          </a:solidFill>
+        </p:spPr>
+        <p:txBody>
+          <a:bodyPr wrap="square" anchor="ctr">
+            <a:normAutofit/>
+          </a:bodyPr>
+          <a:lstStyle/>
+          <a:p/>
+        </p:txBody>
+      </p:sp>
+      <p:sp>
+        <p:nvSpPr>
+          <p:cNvPr id="17" name="pinr2"/>
+          <p:cNvSpPr/>
+          <p:nvPr/>
+        </p:nvSpPr>
+        <p:spPr>
+          <a:xfrm>
+            <a:off x="10421874" y="3338474"/>
+            <a:ext cx="164592" cy="45720"/>
+          </a:xfrm>
+          <a:prstGeom prst="rect">
+            <a:avLst/>
+          </a:prstGeom>
+          <a:solidFill>
+            <a:srgbClr val="00B4D8"/>
+          </a:solidFill>
+        </p:spPr>
+        <p:txBody>
+          <a:bodyPr wrap="square" anchor="ctr">
+            <a:normAutofit/>
+          </a:bodyPr>
+          <a:lstStyle/>
+          <a:p/>
+        </p:txBody>
+      </p:sp>
+      <p:sp>
+        <p:nvSpPr>
+          <p:cNvPr id="18" name="pinl3"/>
+          <p:cNvSpPr/>
+          <p:nvPr/>
+        </p:nvSpPr>
+        <p:spPr>
+          <a:xfrm>
+            <a:off x="8935974" y="3503066"/>
+            <a:ext cx="164592" cy="45720"/>
+          </a:xfrm>
+          <a:prstGeom prst="rect">
+            <a:avLst/>
+          </a:prstGeom>
+          <a:solidFill>
+            <a:srgbClr val="00B4D8"/>
+          </a:solidFill>
+        </p:spPr>
+        <p:txBody>
+          <a:bodyPr wrap="square" anchor="ctr">
+            <a:normAutofit/>
+          </a:bodyPr>
+          <a:lstStyle/>
+          <a:p/>
+        </p:txBody>
+      </p:sp>
+      <p:sp>
+        <p:nvSpPr>
+          <p:cNvPr id="19" name="pinr3"/>
+          <p:cNvSpPr/>
+          <p:nvPr/>
+        </p:nvSpPr>
+        <p:spPr>
+          <a:xfrm>
+            <a:off x="10421874" y="3503066"/>
+            <a:ext cx="164592" cy="45720"/>
+          </a:xfrm>
+          <a:prstGeom prst="rect">
+            <a:avLst/>
+          </a:prstGeom>
+          <a:solidFill>
+            <a:srgbClr val="00B4D8"/>
+          </a:solidFill>
+        </p:spPr>
+        <p:txBody>
+          <a:bodyPr wrap="square" anchor="ctr">
+            <a:normAutofit/>
+          </a:bodyPr>
+          <a:lstStyle/>
+          <a:p/>
+        </p:txBody>
+      </p:sp>
+      <p:sp>
+        <p:nvSpPr>
+          <p:cNvPr id="20" name="pinl4"/>
+          <p:cNvSpPr/>
+          <p:nvPr/>
+        </p:nvSpPr>
+        <p:spPr>
+          <a:xfrm>
+            <a:off x="8935974" y="3667658"/>
+            <a:ext cx="164592" cy="45720"/>
+          </a:xfrm>
+          <a:prstGeom prst="rect">
+            <a:avLst/>
+          </a:prstGeom>
+          <a:solidFill>
+            <a:srgbClr val="00B4D8"/>
+          </a:solidFill>
+        </p:spPr>
+        <p:txBody>
+          <a:bodyPr wrap="square" anchor="ctr">
+            <a:normAutofit/>
+          </a:bodyPr>
+          <a:lstStyle/>
+          <a:p/>
+        </p:txBody>
+      </p:sp>
+      <p:sp>
+        <p:nvSpPr>
+          <p:cNvPr id="21" name="pinr4"/>
+          <p:cNvSpPr/>
+          <p:nvPr/>
+        </p:nvSpPr>
+        <p:spPr>
+          <a:xfrm>
+            <a:off x="10421874" y="3667658"/>
+            <a:ext cx="164592" cy="45720"/>
+          </a:xfrm>
+          <a:prstGeom prst="rect">
+            <a:avLst/>
+          </a:prstGeom>
+          <a:solidFill>
+            <a:srgbClr val="00B4D8"/>
+          </a:solidFill>
+        </p:spPr>
+        <p:txBody>
+          <a:bodyPr wrap="square" anchor="ctr">
+            <a:normAutofit/>
+          </a:bodyPr>
+          <a:lstStyle/>
+          <a:p/>
+        </p:txBody>
+      </p:sp>
+      <p:sp>
+        <p:nvSpPr>
+          <p:cNvPr id="22" name="imglabel"/>
+          <p:cNvSpPr txBox="1"/>
+          <p:nvPr/>
+        </p:nvSpPr>
+        <p:spPr>
+          <a:xfrm>
+            <a:off x="7818120" y="4983480"/>
+            <a:ext cx="3886200" cy="457200"/>
+          </a:xfrm>
+          <a:prstGeom prst="rect">
+            <a:avLst/>
+          </a:prstGeom>
+          <a:noFill/>
+        </p:spPr>
+        <p:txBody>
+          <a:bodyPr wrap="square" lIns="45720" rIns="45720" anchor="ctr">
+            <a:normAutofit/>
+          </a:bodyPr>
+          <a:lstStyle/>
           <a:p>
             <a:pPr algn="ctr">
               <a:spcAft>
-                <a:spcPts val="400"/>
+                <a:spcPts val="0"/>
               </a:spcAft>
             </a:pPr>
             <a:r>
@@ -744,14 +1449,14 @@
       </p:sp>
       <p:sp>
         <p:nvSpPr>
-          <p:cNvPr id="5" name="title"/>
+          <p:cNvPr id="23" name="body"/>
           <p:cNvSpPr txBox="1"/>
           <p:nvPr/>
         </p:nvSpPr>
         <p:spPr>
           <a:xfrm>
-            <a:off x="457200" y="457200"/>
-            <a:ext cx="7132320" cy="1463040"/>
+            <a:off x="548640" y="1783080"/>
+            <a:ext cx="6858000" cy="4023360"/>
           </a:xfrm>
           <a:prstGeom prst="rect">
             <a:avLst/>
@@ -759,40 +1464,199 @@
           <a:noFill/>
         </p:spPr>
         <p:txBody>
-          <a:bodyPr wrap="square" anchor="t">
+          <a:bodyPr wrap="square" lIns="45720" rIns="45720" anchor="t">
+            <a:normAutofit/>
+          </a:bodyPr>
+          <a:lstStyle/>
+          <a:p>
+            <a:pPr algn="l">
+              <a:lnSpc>
+                <a:spcPct val="108"/>
+              </a:lnSpc>
+              <a:spcAft>
+                <a:spcPts val="600"/>
+              </a:spcAft>
+            </a:pPr>
+            <a:r>
+              <a:rPr lang="uz-UZ" sz="1800" dirty="0">
+                <a:solidFill>
+                  <a:srgbClr val="F0F6FC"/>
+                </a:solidFill>
+                <a:latin typeface="Times New Roman"/>
+                <a:cs typeface="Times New Roman"/>
+                <a:ea typeface="Times New Roman"/>
+              </a:rPr>
+              <a:t>1-reja. Tranzistorlar va issiqlik ajralib chiqish fizikasi (Joul-Lents qonuni).</a:t>
+            </a:r>
+          </a:p>
+          <a:p>
+            <a:pPr algn="l">
+              <a:lnSpc>
+                <a:spcPct val="108"/>
+              </a:lnSpc>
+              <a:spcAft>
+                <a:spcPts val="600"/>
+              </a:spcAft>
+            </a:pPr>
+            <a:r>
+              <a:rPr lang="uz-UZ" sz="1800" dirty="0">
+                <a:solidFill>
+                  <a:srgbClr val="F0F6FC"/>
+                </a:solidFill>
+                <a:latin typeface="Times New Roman"/>
+                <a:cs typeface="Times New Roman"/>
+                <a:ea typeface="Times New Roman"/>
+              </a:rPr>
+              <a:t>2-reja. Issiqlik o'tkazuvchanlik: Termopasta va radiatorlar vazifasi.</a:t>
+            </a:r>
+          </a:p>
+          <a:p>
+            <a:pPr algn="l">
+              <a:lnSpc>
+                <a:spcPct val="108"/>
+              </a:lnSpc>
+              <a:spcAft>
+                <a:spcPts val="600"/>
+              </a:spcAft>
+            </a:pPr>
+            <a:r>
+              <a:rPr lang="uz-UZ" sz="1800" dirty="0">
+                <a:solidFill>
+                  <a:srgbClr val="F0F6FC"/>
+                </a:solidFill>
+                <a:latin typeface="Times New Roman"/>
+                <a:cs typeface="Times New Roman"/>
+                <a:ea typeface="Times New Roman"/>
+              </a:rPr>
+              <a:t>3-reja. Konveksiya va faol sovutish (Kulerlar va suvli tizimlar).</a:t>
+            </a:r>
+          </a:p>
+          <a:p>
+            <a:pPr algn="l">
+              <a:lnSpc>
+                <a:spcPct val="108"/>
+              </a:lnSpc>
+              <a:spcAft>
+                <a:spcPts val="600"/>
+              </a:spcAft>
+            </a:pPr>
+            <a:r>
+              <a:rPr lang="uz-UZ" sz="1800" dirty="0">
+                <a:solidFill>
+                  <a:srgbClr val="F0F6FC"/>
+                </a:solidFill>
+                <a:latin typeface="Times New Roman"/>
+                <a:cs typeface="Times New Roman"/>
+                <a:ea typeface="Times New Roman"/>
+              </a:rPr>
+              <a:t>Xulosa. Issiqlik boshqaruvining zamonaviy axborot tizimlaridagi ahamiyati.</a:t>
+            </a:r>
+          </a:p>
+        </p:txBody>
+      </p:sp>
+      <p:sp>
+        <p:nvSpPr>
+          <p:cNvPr id="24" name="footerband"/>
+          <p:cNvSpPr/>
+          <p:nvPr/>
+        </p:nvSpPr>
+        <p:spPr>
+          <a:xfrm>
+            <a:off x="0" y="6473952"/>
+            <a:ext cx="12192000" cy="384048"/>
+          </a:xfrm>
+          <a:prstGeom prst="rect">
+            <a:avLst/>
+          </a:prstGeom>
+          <a:solidFill>
+            <a:srgbClr val="11202E"/>
+          </a:solidFill>
+        </p:spPr>
+        <p:txBody>
+          <a:bodyPr wrap="square" anchor="ctr">
+            <a:normAutofit/>
+          </a:bodyPr>
+          <a:lstStyle/>
+          <a:p/>
+        </p:txBody>
+      </p:sp>
+      <p:sp>
+        <p:nvSpPr>
+          <p:cNvPr id="25" name="footeraccent"/>
+          <p:cNvSpPr/>
+          <p:nvPr/>
+        </p:nvSpPr>
+        <p:spPr>
+          <a:xfrm>
+            <a:off x="0" y="6473952"/>
+            <a:ext cx="12192000" cy="27432"/>
+          </a:xfrm>
+          <a:prstGeom prst="rect">
+            <a:avLst/>
+          </a:prstGeom>
+          <a:solidFill>
+            <a:srgbClr val="00B4D8"/>
+          </a:solidFill>
+        </p:spPr>
+        <p:txBody>
+          <a:bodyPr wrap="square" anchor="ctr">
+            <a:normAutofit/>
+          </a:bodyPr>
+          <a:lstStyle/>
+          <a:p/>
+        </p:txBody>
+      </p:sp>
+      <p:sp>
+        <p:nvSpPr>
+          <p:cNvPr id="26" name="footerlabel"/>
+          <p:cNvSpPr txBox="1"/>
+          <p:nvPr/>
+        </p:nvSpPr>
+        <p:spPr>
+          <a:xfrm>
+            <a:off x="548640" y="6473952"/>
+            <a:ext cx="8229600" cy="384048"/>
+          </a:xfrm>
+          <a:prstGeom prst="rect">
+            <a:avLst/>
+          </a:prstGeom>
+          <a:noFill/>
+        </p:spPr>
+        <p:txBody>
+          <a:bodyPr wrap="square" lIns="45720" rIns="45720" anchor="ctr">
             <a:normAutofit/>
           </a:bodyPr>
           <a:lstStyle/>
           <a:p>
             <a:pPr algn="l">
               <a:spcAft>
-                <a:spcPts val="400"/>
+                <a:spcPts val="0"/>
               </a:spcAft>
             </a:pPr>
             <a:r>
-              <a:rPr lang="uz-UZ" sz="4000" b="1" dirty="0">
-                <a:solidFill>
-                  <a:srgbClr val="00B4D8"/>
-                </a:solidFill>
-                <a:latin typeface="Times New Roman"/>
-                <a:cs typeface="Times New Roman"/>
-                <a:ea typeface="Times New Roman"/>
-              </a:rPr>
-              <a:t>Taqdimot rejasi</a:t>
+              <a:rPr lang="uz-UZ" sz="1200" dirty="0">
+                <a:solidFill>
+                  <a:srgbClr val="9FB3C8"/>
+                </a:solidFill>
+                <a:latin typeface="Times New Roman"/>
+                <a:cs typeface="Times New Roman"/>
+                <a:ea typeface="Times New Roman"/>
+              </a:rPr>
+              <a:t>Kompyuter qizishi va sovutish fizikasi</a:t>
             </a:r>
           </a:p>
         </p:txBody>
       </p:sp>
       <p:sp>
         <p:nvSpPr>
-          <p:cNvPr id="6" name="body"/>
+          <p:cNvPr id="27" name="footernum"/>
           <p:cNvSpPr txBox="1"/>
           <p:nvPr/>
         </p:nvSpPr>
         <p:spPr>
           <a:xfrm>
-            <a:off x="457200" y="2103120"/>
-            <a:ext cx="7132320" cy="4297680"/>
+            <a:off x="10332720" y="6473952"/>
+            <a:ext cx="1371600" cy="384048"/>
           </a:xfrm>
           <a:prstGeom prst="rect">
             <a:avLst/>
@@ -800,80 +1664,26 @@
           <a:noFill/>
         </p:spPr>
         <p:txBody>
-          <a:bodyPr wrap="square" anchor="t">
+          <a:bodyPr wrap="square" lIns="45720" rIns="45720" anchor="ctr">
             <a:normAutofit/>
           </a:bodyPr>
           <a:lstStyle/>
           <a:p>
-            <a:pPr algn="l">
+            <a:pPr algn="r">
               <a:spcAft>
-                <a:spcPts val="400"/>
+                <a:spcPts val="0"/>
               </a:spcAft>
             </a:pPr>
             <a:r>
-              <a:rPr lang="uz-UZ" sz="1800" dirty="0">
-                <a:solidFill>
-                  <a:srgbClr val="F0F6FC"/>
-                </a:solidFill>
-                <a:latin typeface="Times New Roman"/>
-                <a:cs typeface="Times New Roman"/>
-                <a:ea typeface="Times New Roman"/>
-              </a:rPr>
-              <a:t>1-reja. Tranzistorlar va issiqlik ajralib chiqish fizikasi (Joul-Lents qonuni).</a:t>
-            </a:r>
-          </a:p>
-          <a:p>
-            <a:pPr algn="l">
-              <a:spcAft>
-                <a:spcPts val="400"/>
-              </a:spcAft>
-            </a:pPr>
-            <a:r>
-              <a:rPr lang="uz-UZ" sz="1800" dirty="0">
-                <a:solidFill>
-                  <a:srgbClr val="F0F6FC"/>
-                </a:solidFill>
-                <a:latin typeface="Times New Roman"/>
-                <a:cs typeface="Times New Roman"/>
-                <a:ea typeface="Times New Roman"/>
-              </a:rPr>
-              <a:t>2-reja. Issiqlik o'tkazuvchanlik: Termopasta va radiatorlar vazifasi.</a:t>
-            </a:r>
-          </a:p>
-          <a:p>
-            <a:pPr algn="l">
-              <a:spcAft>
-                <a:spcPts val="400"/>
-              </a:spcAft>
-            </a:pPr>
-            <a:r>
-              <a:rPr lang="uz-UZ" sz="1800" dirty="0">
-                <a:solidFill>
-                  <a:srgbClr val="F0F6FC"/>
-                </a:solidFill>
-                <a:latin typeface="Times New Roman"/>
-                <a:cs typeface="Times New Roman"/>
-                <a:ea typeface="Times New Roman"/>
-              </a:rPr>
-              <a:t>3-reja. Konveksiya va faol sovutish (Kulerlar va suvli tizimlar).</a:t>
-            </a:r>
-          </a:p>
-          <a:p>
-            <a:pPr algn="l">
-              <a:spcAft>
-                <a:spcPts val="400"/>
-              </a:spcAft>
-            </a:pPr>
-            <a:r>
-              <a:rPr lang="uz-UZ" sz="1800" dirty="0">
-                <a:solidFill>
-                  <a:srgbClr val="F0F6FC"/>
-                </a:solidFill>
-                <a:latin typeface="Times New Roman"/>
-                <a:cs typeface="Times New Roman"/>
-                <a:ea typeface="Times New Roman"/>
-              </a:rPr>
-              <a:t>Xulosa. Issiqlik boshqaruvining zamonaviy axborot tizimlaridagi ahamiyati.</a:t>
+              <a:rPr lang="uz-UZ" sz="1200" b="1" dirty="0">
+                <a:solidFill>
+                  <a:srgbClr val="00B4D8"/>
+                </a:solidFill>
+                <a:latin typeface="Times New Roman"/>
+                <a:cs typeface="Times New Roman"/>
+                <a:ea typeface="Times New Roman"/>
+              </a:rPr>
+              <a:t>2 / 10</a:t>
             </a:r>
           </a:p>
         </p:txBody>
@@ -938,7 +1748,7 @@
         <p:spPr>
           <a:xfrm>
             <a:off x="0" y="0"/>
-            <a:ext cx="164592" cy="6858000"/>
+            <a:ext cx="128016" cy="6858000"/>
           </a:xfrm>
           <a:prstGeom prst="rect">
             <a:avLst/>
@@ -957,22 +1767,115 @@
       </p:sp>
       <p:sp>
         <p:nvSpPr>
-          <p:cNvPr id="4" name="placeholder"/>
-          <p:cNvSpPr/>
-          <p:nvPr/>
-        </p:nvSpPr>
-        <p:spPr>
-          <a:xfrm>
-            <a:off x="7863840" y="914400"/>
-            <a:ext cx="3840480" cy="4846320"/>
-          </a:xfrm>
-          <a:prstGeom prst="rect">
-            <a:avLst/>
-          </a:prstGeom>
-          <a:solidFill>
-            <a:srgbClr val="161B22"/>
-          </a:solidFill>
-          <a:ln w="25400">
+          <p:cNvPr id="4" name="headerband"/>
+          <p:cNvSpPr/>
+          <p:nvPr/>
+        </p:nvSpPr>
+        <p:spPr>
+          <a:xfrm>
+            <a:off x="128016" y="0"/>
+            <a:ext cx="12063984" cy="1417320"/>
+          </a:xfrm>
+          <a:prstGeom prst="rect">
+            <a:avLst/>
+          </a:prstGeom>
+          <a:solidFill>
+            <a:srgbClr val="11202E"/>
+          </a:solidFill>
+        </p:spPr>
+        <p:txBody>
+          <a:bodyPr wrap="square" anchor="ctr">
+            <a:normAutofit/>
+          </a:bodyPr>
+          <a:lstStyle/>
+          <a:p/>
+        </p:txBody>
+      </p:sp>
+      <p:sp>
+        <p:nvSpPr>
+          <p:cNvPr id="5" name="titleline"/>
+          <p:cNvSpPr/>
+          <p:nvPr/>
+        </p:nvSpPr>
+        <p:spPr>
+          <a:xfrm>
+            <a:off x="548640" y="1170432"/>
+            <a:ext cx="4754880" cy="41148"/>
+          </a:xfrm>
+          <a:prstGeom prst="rect">
+            <a:avLst/>
+          </a:prstGeom>
+          <a:solidFill>
+            <a:srgbClr val="FF6B35"/>
+          </a:solidFill>
+        </p:spPr>
+        <p:txBody>
+          <a:bodyPr wrap="square" anchor="ctr">
+            <a:normAutofit/>
+          </a:bodyPr>
+          <a:lstStyle/>
+          <a:p/>
+        </p:txBody>
+      </p:sp>
+      <p:sp>
+        <p:nvSpPr>
+          <p:cNvPr id="6" name="title"/>
+          <p:cNvSpPr txBox="1"/>
+          <p:nvPr/>
+        </p:nvSpPr>
+        <p:spPr>
+          <a:xfrm>
+            <a:off x="548640" y="274320"/>
+            <a:ext cx="10607040" cy="914400"/>
+          </a:xfrm>
+          <a:prstGeom prst="rect">
+            <a:avLst/>
+          </a:prstGeom>
+          <a:noFill/>
+        </p:spPr>
+        <p:txBody>
+          <a:bodyPr wrap="square" lIns="45720" rIns="45720" anchor="ctr">
+            <a:normAutofit/>
+          </a:bodyPr>
+          <a:lstStyle/>
+          <a:p>
+            <a:pPr algn="l">
+              <a:spcAft>
+                <a:spcPts val="0"/>
+              </a:spcAft>
+            </a:pPr>
+            <a:r>
+              <a:rPr lang="uz-UZ" sz="3200" b="1" dirty="0">
+                <a:solidFill>
+                  <a:srgbClr val="FF6B35"/>
+                </a:solidFill>
+                <a:latin typeface="Times New Roman"/>
+                <a:cs typeface="Times New Roman"/>
+                <a:ea typeface="Times New Roman"/>
+              </a:rPr>
+              <a:t>1. Nega protsessor (CPU) qiziydi?</a:t>
+            </a:r>
+          </a:p>
+        </p:txBody>
+      </p:sp>
+      <p:sp>
+        <p:nvSpPr>
+          <p:cNvPr id="7" name="imgframe"/>
+          <p:cNvSpPr/>
+          <p:nvPr/>
+        </p:nvSpPr>
+        <p:spPr>
+          <a:xfrm>
+            <a:off x="7754112" y="1719072"/>
+            <a:ext cx="4014216" cy="3831336"/>
+          </a:xfrm>
+          <a:prstGeom prst="rect">
+            <a:avLst/>
+          </a:prstGeom>
+          <a:solidFill>
+            <a:srgbClr val="1F2630"/>
+          </a:solidFill>
+          <a:ln w="28575">
             <a:solidFill>
               <a:srgbClr val="FF6B35"/>
             </a:solidFill>
@@ -983,10 +1886,398 @@
             <a:normAutofit/>
           </a:bodyPr>
           <a:lstStyle/>
+          <a:p/>
+        </p:txBody>
+      </p:sp>
+      <p:sp>
+        <p:nvSpPr>
+          <p:cNvPr id="8" name="placeholder"/>
+          <p:cNvSpPr/>
+          <p:nvPr/>
+        </p:nvSpPr>
+        <p:spPr>
+          <a:xfrm>
+            <a:off x="7818120" y="1783080"/>
+            <a:ext cx="3886200" cy="3703320"/>
+          </a:xfrm>
+          <a:prstGeom prst="rect">
+            <a:avLst/>
+          </a:prstGeom>
+          <a:solidFill>
+            <a:srgbClr val="161B22"/>
+          </a:solidFill>
+        </p:spPr>
+        <p:txBody>
+          <a:bodyPr wrap="square" anchor="ctr">
+            <a:normAutofit/>
+          </a:bodyPr>
+          <a:lstStyle/>
+          <a:p/>
+        </p:txBody>
+      </p:sp>
+      <p:sp>
+        <p:nvSpPr>
+          <p:cNvPr id="9" name="chip0"/>
+          <p:cNvSpPr/>
+          <p:nvPr/>
+        </p:nvSpPr>
+        <p:spPr>
+          <a:xfrm>
+            <a:off x="9100566" y="2708910"/>
+            <a:ext cx="1321308" cy="1259128"/>
+          </a:xfrm>
+          <a:prstGeom prst="rect">
+            <a:avLst/>
+          </a:prstGeom>
+          <a:solidFill>
+            <a:srgbClr val="FF6B35"/>
+          </a:solidFill>
+        </p:spPr>
+        <p:txBody>
+          <a:bodyPr wrap="square" anchor="ctr">
+            <a:normAutofit/>
+          </a:bodyPr>
+          <a:lstStyle/>
+          <a:p/>
+        </p:txBody>
+      </p:sp>
+      <p:sp>
+        <p:nvSpPr>
+          <p:cNvPr id="10" name="chip1"/>
+          <p:cNvSpPr/>
+          <p:nvPr/>
+        </p:nvSpPr>
+        <p:spPr>
+          <a:xfrm>
+            <a:off x="9294876" y="2894076"/>
+            <a:ext cx="932688" cy="888796"/>
+          </a:xfrm>
+          <a:prstGeom prst="rect">
+            <a:avLst/>
+          </a:prstGeom>
+          <a:solidFill>
+            <a:srgbClr val="1F2630"/>
+          </a:solidFill>
+        </p:spPr>
+        <p:txBody>
+          <a:bodyPr wrap="square" anchor="ctr">
+            <a:normAutofit/>
+          </a:bodyPr>
+          <a:lstStyle/>
+          <a:p/>
+        </p:txBody>
+      </p:sp>
+      <p:sp>
+        <p:nvSpPr>
+          <p:cNvPr id="11" name="chip2"/>
+          <p:cNvSpPr/>
+          <p:nvPr/>
+        </p:nvSpPr>
+        <p:spPr>
+          <a:xfrm>
+            <a:off x="9489186" y="3079242"/>
+            <a:ext cx="544068" cy="518464"/>
+          </a:xfrm>
+          <a:prstGeom prst="rect">
+            <a:avLst/>
+          </a:prstGeom>
+          <a:solidFill>
+            <a:srgbClr val="FF6B35"/>
+          </a:solidFill>
+        </p:spPr>
+        <p:txBody>
+          <a:bodyPr wrap="square" anchor="ctr">
+            <a:normAutofit/>
+          </a:bodyPr>
+          <a:lstStyle/>
+          <a:p/>
+        </p:txBody>
+      </p:sp>
+      <p:sp>
+        <p:nvSpPr>
+          <p:cNvPr id="12" name="pinl0"/>
+          <p:cNvSpPr/>
+          <p:nvPr/>
+        </p:nvSpPr>
+        <p:spPr>
+          <a:xfrm>
+            <a:off x="8935974" y="3009290"/>
+            <a:ext cx="164592" cy="45720"/>
+          </a:xfrm>
+          <a:prstGeom prst="rect">
+            <a:avLst/>
+          </a:prstGeom>
+          <a:solidFill>
+            <a:srgbClr val="FF6B35"/>
+          </a:solidFill>
+        </p:spPr>
+        <p:txBody>
+          <a:bodyPr wrap="square" anchor="ctr">
+            <a:normAutofit/>
+          </a:bodyPr>
+          <a:lstStyle/>
+          <a:p/>
+        </p:txBody>
+      </p:sp>
+      <p:sp>
+        <p:nvSpPr>
+          <p:cNvPr id="13" name="pinr0"/>
+          <p:cNvSpPr/>
+          <p:nvPr/>
+        </p:nvSpPr>
+        <p:spPr>
+          <a:xfrm>
+            <a:off x="10421874" y="3009290"/>
+            <a:ext cx="164592" cy="45720"/>
+          </a:xfrm>
+          <a:prstGeom prst="rect">
+            <a:avLst/>
+          </a:prstGeom>
+          <a:solidFill>
+            <a:srgbClr val="FF6B35"/>
+          </a:solidFill>
+        </p:spPr>
+        <p:txBody>
+          <a:bodyPr wrap="square" anchor="ctr">
+            <a:normAutofit/>
+          </a:bodyPr>
+          <a:lstStyle/>
+          <a:p/>
+        </p:txBody>
+      </p:sp>
+      <p:sp>
+        <p:nvSpPr>
+          <p:cNvPr id="14" name="pinl1"/>
+          <p:cNvSpPr/>
+          <p:nvPr/>
+        </p:nvSpPr>
+        <p:spPr>
+          <a:xfrm>
+            <a:off x="8935974" y="3173882"/>
+            <a:ext cx="164592" cy="45720"/>
+          </a:xfrm>
+          <a:prstGeom prst="rect">
+            <a:avLst/>
+          </a:prstGeom>
+          <a:solidFill>
+            <a:srgbClr val="FF6B35"/>
+          </a:solidFill>
+        </p:spPr>
+        <p:txBody>
+          <a:bodyPr wrap="square" anchor="ctr">
+            <a:normAutofit/>
+          </a:bodyPr>
+          <a:lstStyle/>
+          <a:p/>
+        </p:txBody>
+      </p:sp>
+      <p:sp>
+        <p:nvSpPr>
+          <p:cNvPr id="15" name="pinr1"/>
+          <p:cNvSpPr/>
+          <p:nvPr/>
+        </p:nvSpPr>
+        <p:spPr>
+          <a:xfrm>
+            <a:off x="10421874" y="3173882"/>
+            <a:ext cx="164592" cy="45720"/>
+          </a:xfrm>
+          <a:prstGeom prst="rect">
+            <a:avLst/>
+          </a:prstGeom>
+          <a:solidFill>
+            <a:srgbClr val="FF6B35"/>
+          </a:solidFill>
+        </p:spPr>
+        <p:txBody>
+          <a:bodyPr wrap="square" anchor="ctr">
+            <a:normAutofit/>
+          </a:bodyPr>
+          <a:lstStyle/>
+          <a:p/>
+        </p:txBody>
+      </p:sp>
+      <p:sp>
+        <p:nvSpPr>
+          <p:cNvPr id="16" name="pinl2"/>
+          <p:cNvSpPr/>
+          <p:nvPr/>
+        </p:nvSpPr>
+        <p:spPr>
+          <a:xfrm>
+            <a:off x="8935974" y="3338474"/>
+            <a:ext cx="164592" cy="45720"/>
+          </a:xfrm>
+          <a:prstGeom prst="rect">
+            <a:avLst/>
+          </a:prstGeom>
+          <a:solidFill>
+            <a:srgbClr val="FF6B35"/>
+          </a:solidFill>
+        </p:spPr>
+        <p:txBody>
+          <a:bodyPr wrap="square" anchor="ctr">
+            <a:normAutofit/>
+          </a:bodyPr>
+          <a:lstStyle/>
+          <a:p/>
+        </p:txBody>
+      </p:sp>
+      <p:sp>
+        <p:nvSpPr>
+          <p:cNvPr id="17" name="pinr2"/>
+          <p:cNvSpPr/>
+          <p:nvPr/>
+        </p:nvSpPr>
+        <p:spPr>
+          <a:xfrm>
+            <a:off x="10421874" y="3338474"/>
+            <a:ext cx="164592" cy="45720"/>
+          </a:xfrm>
+          <a:prstGeom prst="rect">
+            <a:avLst/>
+          </a:prstGeom>
+          <a:solidFill>
+            <a:srgbClr val="FF6B35"/>
+          </a:solidFill>
+        </p:spPr>
+        <p:txBody>
+          <a:bodyPr wrap="square" anchor="ctr">
+            <a:normAutofit/>
+          </a:bodyPr>
+          <a:lstStyle/>
+          <a:p/>
+        </p:txBody>
+      </p:sp>
+      <p:sp>
+        <p:nvSpPr>
+          <p:cNvPr id="18" name="pinl3"/>
+          <p:cNvSpPr/>
+          <p:nvPr/>
+        </p:nvSpPr>
+        <p:spPr>
+          <a:xfrm>
+            <a:off x="8935974" y="3503066"/>
+            <a:ext cx="164592" cy="45720"/>
+          </a:xfrm>
+          <a:prstGeom prst="rect">
+            <a:avLst/>
+          </a:prstGeom>
+          <a:solidFill>
+            <a:srgbClr val="FF6B35"/>
+          </a:solidFill>
+        </p:spPr>
+        <p:txBody>
+          <a:bodyPr wrap="square" anchor="ctr">
+            <a:normAutofit/>
+          </a:bodyPr>
+          <a:lstStyle/>
+          <a:p/>
+        </p:txBody>
+      </p:sp>
+      <p:sp>
+        <p:nvSpPr>
+          <p:cNvPr id="19" name="pinr3"/>
+          <p:cNvSpPr/>
+          <p:nvPr/>
+        </p:nvSpPr>
+        <p:spPr>
+          <a:xfrm>
+            <a:off x="10421874" y="3503066"/>
+            <a:ext cx="164592" cy="45720"/>
+          </a:xfrm>
+          <a:prstGeom prst="rect">
+            <a:avLst/>
+          </a:prstGeom>
+          <a:solidFill>
+            <a:srgbClr val="FF6B35"/>
+          </a:solidFill>
+        </p:spPr>
+        <p:txBody>
+          <a:bodyPr wrap="square" anchor="ctr">
+            <a:normAutofit/>
+          </a:bodyPr>
+          <a:lstStyle/>
+          <a:p/>
+        </p:txBody>
+      </p:sp>
+      <p:sp>
+        <p:nvSpPr>
+          <p:cNvPr id="20" name="pinl4"/>
+          <p:cNvSpPr/>
+          <p:nvPr/>
+        </p:nvSpPr>
+        <p:spPr>
+          <a:xfrm>
+            <a:off x="8935974" y="3667658"/>
+            <a:ext cx="164592" cy="45720"/>
+          </a:xfrm>
+          <a:prstGeom prst="rect">
+            <a:avLst/>
+          </a:prstGeom>
+          <a:solidFill>
+            <a:srgbClr val="FF6B35"/>
+          </a:solidFill>
+        </p:spPr>
+        <p:txBody>
+          <a:bodyPr wrap="square" anchor="ctr">
+            <a:normAutofit/>
+          </a:bodyPr>
+          <a:lstStyle/>
+          <a:p/>
+        </p:txBody>
+      </p:sp>
+      <p:sp>
+        <p:nvSpPr>
+          <p:cNvPr id="21" name="pinr4"/>
+          <p:cNvSpPr/>
+          <p:nvPr/>
+        </p:nvSpPr>
+        <p:spPr>
+          <a:xfrm>
+            <a:off x="10421874" y="3667658"/>
+            <a:ext cx="164592" cy="45720"/>
+          </a:xfrm>
+          <a:prstGeom prst="rect">
+            <a:avLst/>
+          </a:prstGeom>
+          <a:solidFill>
+            <a:srgbClr val="FF6B35"/>
+          </a:solidFill>
+        </p:spPr>
+        <p:txBody>
+          <a:bodyPr wrap="square" anchor="ctr">
+            <a:normAutofit/>
+          </a:bodyPr>
+          <a:lstStyle/>
+          <a:p/>
+        </p:txBody>
+      </p:sp>
+      <p:sp>
+        <p:nvSpPr>
+          <p:cNvPr id="22" name="imglabel"/>
+          <p:cNvSpPr txBox="1"/>
+          <p:nvPr/>
+        </p:nvSpPr>
+        <p:spPr>
+          <a:xfrm>
+            <a:off x="7818120" y="4983480"/>
+            <a:ext cx="3886200" cy="457200"/>
+          </a:xfrm>
+          <a:prstGeom prst="rect">
+            <a:avLst/>
+          </a:prstGeom>
+          <a:noFill/>
+        </p:spPr>
+        <p:txBody>
+          <a:bodyPr wrap="square" lIns="45720" rIns="45720" anchor="ctr">
+            <a:normAutofit/>
+          </a:bodyPr>
+          <a:lstStyle/>
           <a:p>
             <a:pPr algn="ctr">
               <a:spcAft>
-                <a:spcPts val="400"/>
+                <a:spcPts val="0"/>
               </a:spcAft>
             </a:pPr>
             <a:r>
@@ -1005,14 +2296,14 @@
       </p:sp>
       <p:sp>
         <p:nvSpPr>
-          <p:cNvPr id="5" name="title"/>
+          <p:cNvPr id="23" name="body"/>
           <p:cNvSpPr txBox="1"/>
           <p:nvPr/>
         </p:nvSpPr>
         <p:spPr>
           <a:xfrm>
-            <a:off x="457200" y="457200"/>
-            <a:ext cx="7132320" cy="1463040"/>
+            <a:off x="548640" y="1783080"/>
+            <a:ext cx="6858000" cy="4023360"/>
           </a:xfrm>
           <a:prstGeom prst="rect">
             <a:avLst/>
@@ -1020,40 +2311,200 @@
           <a:noFill/>
         </p:spPr>
         <p:txBody>
-          <a:bodyPr wrap="square" anchor="t">
+          <a:bodyPr wrap="square" lIns="45720" rIns="45720" anchor="t">
+            <a:normAutofit/>
+          </a:bodyPr>
+          <a:lstStyle/>
+          <a:p>
+            <a:pPr algn="l">
+              <a:lnSpc>
+                <a:spcPct val="108"/>
+              </a:lnSpc>
+              <a:spcAft>
+                <a:spcPts val="600"/>
+              </a:spcAft>
+            </a:pPr>
+            <a:r>
+              <a:rPr lang="uz-UZ" sz="1800" dirty="0">
+                <a:solidFill>
+                  <a:srgbClr val="F0F6FC"/>
+                </a:solidFill>
+                <a:latin typeface="Times New Roman"/>
+                <a:cs typeface="Times New Roman"/>
+                <a:ea typeface="Times New Roman"/>
+              </a:rPr>
+              <a:t>Kompyuterning miyasi bo'lgan protsessor (CPU) ichida milliardlab mikroskopik tranzistorlar joylashgan.</a:t>
+            </a:r>
+          </a:p>
+          <a:p>
+            <a:pPr algn="l">
+              <a:lnSpc>
+                <a:spcPct val="108"/>
+              </a:lnSpc>
+              <a:spcAft>
+                <a:spcPts val="600"/>
+              </a:spcAft>
+            </a:pPr>
+            <a:r>
+              <a:rPr lang="uz-UZ" sz="1800" b="1" dirty="0">
+                <a:solidFill>
+                  <a:srgbClr val="FF6B35"/>
+                </a:solidFill>
+                <a:latin typeface="Times New Roman"/>
+                <a:cs typeface="Times New Roman"/>
+                <a:ea typeface="Times New Roman"/>
+              </a:rPr>
+              <a:t>▪  </a:t>
+            </a:r>
+            <a:r>
+              <a:rPr lang="uz-UZ" sz="1800" dirty="0">
+                <a:solidFill>
+                  <a:srgbClr val="F0F6FC"/>
+                </a:solidFill>
+                <a:latin typeface="Times New Roman"/>
+                <a:cs typeface="Times New Roman"/>
+                <a:ea typeface="Times New Roman"/>
+              </a:rPr>
+              <a:t>Elektr signallari: Har doim kompyuter ma'lumotni (0 va 1) qayta ishlaganda, bu tranzistorlar orqali elektr toki o'tadi.</a:t>
+            </a:r>
+          </a:p>
+          <a:p>
+            <a:pPr algn="l">
+              <a:lnSpc>
+                <a:spcPct val="108"/>
+              </a:lnSpc>
+              <a:spcAft>
+                <a:spcPts val="600"/>
+              </a:spcAft>
+            </a:pPr>
+            <a:r>
+              <a:rPr lang="uz-UZ" sz="1800" b="1" dirty="0">
+                <a:solidFill>
+                  <a:srgbClr val="FF6B35"/>
+                </a:solidFill>
+                <a:latin typeface="Times New Roman"/>
+                <a:cs typeface="Times New Roman"/>
+                <a:ea typeface="Times New Roman"/>
+              </a:rPr>
+              <a:t>▪  </a:t>
+            </a:r>
+            <a:r>
+              <a:rPr lang="uz-UZ" sz="1800" dirty="0">
+                <a:solidFill>
+                  <a:srgbClr val="F0F6FC"/>
+                </a:solidFill>
+                <a:latin typeface="Times New Roman"/>
+                <a:cs typeface="Times New Roman"/>
+                <a:ea typeface="Times New Roman"/>
+              </a:rPr>
+              <a:t>Energiya almashinuvi: Fizikaning energiya saqlanish qonuniga ko'ra, tranzistorlarning ishlashiga sarflangan elektr energiyasi yo'qolib ketmaydi, balki to'g'ridan-to'g'ri issiqlik energiyasiga aylanadi.</a:t>
+            </a:r>
+          </a:p>
+        </p:txBody>
+      </p:sp>
+      <p:sp>
+        <p:nvSpPr>
+          <p:cNvPr id="24" name="footerband"/>
+          <p:cNvSpPr/>
+          <p:nvPr/>
+        </p:nvSpPr>
+        <p:spPr>
+          <a:xfrm>
+            <a:off x="0" y="6473952"/>
+            <a:ext cx="12192000" cy="384048"/>
+          </a:xfrm>
+          <a:prstGeom prst="rect">
+            <a:avLst/>
+          </a:prstGeom>
+          <a:solidFill>
+            <a:srgbClr val="11202E"/>
+          </a:solidFill>
+        </p:spPr>
+        <p:txBody>
+          <a:bodyPr wrap="square" anchor="ctr">
+            <a:normAutofit/>
+          </a:bodyPr>
+          <a:lstStyle/>
+          <a:p/>
+        </p:txBody>
+      </p:sp>
+      <p:sp>
+        <p:nvSpPr>
+          <p:cNvPr id="25" name="footeraccent"/>
+          <p:cNvSpPr/>
+          <p:nvPr/>
+        </p:nvSpPr>
+        <p:spPr>
+          <a:xfrm>
+            <a:off x="0" y="6473952"/>
+            <a:ext cx="12192000" cy="27432"/>
+          </a:xfrm>
+          <a:prstGeom prst="rect">
+            <a:avLst/>
+          </a:prstGeom>
+          <a:solidFill>
+            <a:srgbClr val="FF6B35"/>
+          </a:solidFill>
+        </p:spPr>
+        <p:txBody>
+          <a:bodyPr wrap="square" anchor="ctr">
+            <a:normAutofit/>
+          </a:bodyPr>
+          <a:lstStyle/>
+          <a:p/>
+        </p:txBody>
+      </p:sp>
+      <p:sp>
+        <p:nvSpPr>
+          <p:cNvPr id="26" name="footerlabel"/>
+          <p:cNvSpPr txBox="1"/>
+          <p:nvPr/>
+        </p:nvSpPr>
+        <p:spPr>
+          <a:xfrm>
+            <a:off x="548640" y="6473952"/>
+            <a:ext cx="8229600" cy="384048"/>
+          </a:xfrm>
+          <a:prstGeom prst="rect">
+            <a:avLst/>
+          </a:prstGeom>
+          <a:noFill/>
+        </p:spPr>
+        <p:txBody>
+          <a:bodyPr wrap="square" lIns="45720" rIns="45720" anchor="ctr">
             <a:normAutofit/>
           </a:bodyPr>
           <a:lstStyle/>
           <a:p>
             <a:pPr algn="l">
               <a:spcAft>
-                <a:spcPts val="400"/>
+                <a:spcPts val="0"/>
               </a:spcAft>
             </a:pPr>
             <a:r>
-              <a:rPr lang="uz-UZ" sz="4000" b="1" dirty="0">
-                <a:solidFill>
-                  <a:srgbClr val="FF6B35"/>
-                </a:solidFill>
-                <a:latin typeface="Times New Roman"/>
-                <a:cs typeface="Times New Roman"/>
-                <a:ea typeface="Times New Roman"/>
-              </a:rPr>
-              <a:t>1. Nega protsessor (CPU) qiziydi?</a:t>
+              <a:rPr lang="uz-UZ" sz="1200" dirty="0">
+                <a:solidFill>
+                  <a:srgbClr val="9FB3C8"/>
+                </a:solidFill>
+                <a:latin typeface="Times New Roman"/>
+                <a:cs typeface="Times New Roman"/>
+                <a:ea typeface="Times New Roman"/>
+              </a:rPr>
+              <a:t>Kompyuter qizishi va sovutish fizikasi</a:t>
             </a:r>
           </a:p>
         </p:txBody>
       </p:sp>
       <p:sp>
         <p:nvSpPr>
-          <p:cNvPr id="6" name="body"/>
+          <p:cNvPr id="27" name="footernum"/>
           <p:cNvSpPr txBox="1"/>
           <p:nvPr/>
         </p:nvSpPr>
         <p:spPr>
           <a:xfrm>
-            <a:off x="457200" y="2103120"/>
-            <a:ext cx="7132320" cy="4297680"/>
+            <a:off x="10332720" y="6473952"/>
+            <a:ext cx="1371600" cy="384048"/>
           </a:xfrm>
           <a:prstGeom prst="rect">
             <a:avLst/>
@@ -1061,62 +2512,26 @@
           <a:noFill/>
         </p:spPr>
         <p:txBody>
-          <a:bodyPr wrap="square" anchor="t">
+          <a:bodyPr wrap="square" lIns="45720" rIns="45720" anchor="ctr">
             <a:normAutofit/>
           </a:bodyPr>
           <a:lstStyle/>
           <a:p>
-            <a:pPr algn="l">
+            <a:pPr algn="r">
               <a:spcAft>
-                <a:spcPts val="400"/>
+                <a:spcPts val="0"/>
               </a:spcAft>
             </a:pPr>
             <a:r>
-              <a:rPr lang="uz-UZ" sz="1800" dirty="0">
-                <a:solidFill>
-                  <a:srgbClr val="F0F6FC"/>
-                </a:solidFill>
-                <a:latin typeface="Times New Roman"/>
-                <a:cs typeface="Times New Roman"/>
-                <a:ea typeface="Times New Roman"/>
-              </a:rPr>
-              <a:t>Kompyuterning miyasi bo'lgan protsessor (CPU) ichida milliardlab mikroskopik tranzistorlar joylashgan.</a:t>
-            </a:r>
-          </a:p>
-          <a:p>
-            <a:pPr algn="l">
-              <a:spcAft>
-                <a:spcPts val="400"/>
-              </a:spcAft>
-            </a:pPr>
-            <a:r>
-              <a:rPr lang="uz-UZ" sz="1800" dirty="0">
-                <a:solidFill>
-                  <a:srgbClr val="F0F6FC"/>
-                </a:solidFill>
-                <a:latin typeface="Times New Roman"/>
-                <a:cs typeface="Times New Roman"/>
-                <a:ea typeface="Times New Roman"/>
-              </a:rPr>
-              <a:t>- Elektr signallari: Har doim kompyuter ma'lumotni (0 va 1) qayta ishlaganda, bu tranzistorlar orqali elektr toki o'tadi.</a:t>
-            </a:r>
-          </a:p>
-          <a:p>
-            <a:pPr algn="l">
-              <a:spcAft>
-                <a:spcPts val="400"/>
-              </a:spcAft>
-            </a:pPr>
-            <a:r>
-              <a:rPr lang="uz-UZ" sz="1800" dirty="0">
-                <a:solidFill>
-                  <a:srgbClr val="F0F6FC"/>
-                </a:solidFill>
-                <a:latin typeface="Times New Roman"/>
-                <a:cs typeface="Times New Roman"/>
-                <a:ea typeface="Times New Roman"/>
-              </a:rPr>
-              <a:t>- Energiya almashinuvi: Fizikaning energiya saqlanish qonuniga ko'ra, tranzistorlarning ishlashiga sarflangan elektr energiyasi yo'qolib ketmaydi, balki to'g'ridan-to'g'ri issiqlik energiyasiga aylanadi.</a:t>
+              <a:rPr lang="uz-UZ" sz="1200" b="1" dirty="0">
+                <a:solidFill>
+                  <a:srgbClr val="FF6B35"/>
+                </a:solidFill>
+                <a:latin typeface="Times New Roman"/>
+                <a:cs typeface="Times New Roman"/>
+                <a:ea typeface="Times New Roman"/>
+              </a:rPr>
+              <a:t>3 / 10</a:t>
             </a:r>
           </a:p>
         </p:txBody>
@@ -1181,7 +2596,7 @@
         <p:spPr>
           <a:xfrm>
             <a:off x="0" y="0"/>
-            <a:ext cx="164592" cy="6858000"/>
+            <a:ext cx="128016" cy="6858000"/>
           </a:xfrm>
           <a:prstGeom prst="rect">
             <a:avLst/>
@@ -1200,22 +2615,115 @@
       </p:sp>
       <p:sp>
         <p:nvSpPr>
-          <p:cNvPr id="4" name="placeholder"/>
-          <p:cNvSpPr/>
-          <p:nvPr/>
-        </p:nvSpPr>
-        <p:spPr>
-          <a:xfrm>
-            <a:off x="7863840" y="914400"/>
-            <a:ext cx="3840480" cy="4846320"/>
-          </a:xfrm>
-          <a:prstGeom prst="rect">
-            <a:avLst/>
-          </a:prstGeom>
-          <a:solidFill>
-            <a:srgbClr val="161B22"/>
-          </a:solidFill>
-          <a:ln w="25400">
+          <p:cNvPr id="4" name="headerband"/>
+          <p:cNvSpPr/>
+          <p:nvPr/>
+        </p:nvSpPr>
+        <p:spPr>
+          <a:xfrm>
+            <a:off x="128016" y="0"/>
+            <a:ext cx="12063984" cy="1417320"/>
+          </a:xfrm>
+          <a:prstGeom prst="rect">
+            <a:avLst/>
+          </a:prstGeom>
+          <a:solidFill>
+            <a:srgbClr val="11202E"/>
+          </a:solidFill>
+        </p:spPr>
+        <p:txBody>
+          <a:bodyPr wrap="square" anchor="ctr">
+            <a:normAutofit/>
+          </a:bodyPr>
+          <a:lstStyle/>
+          <a:p/>
+        </p:txBody>
+      </p:sp>
+      <p:sp>
+        <p:nvSpPr>
+          <p:cNvPr id="5" name="titleline"/>
+          <p:cNvSpPr/>
+          <p:nvPr/>
+        </p:nvSpPr>
+        <p:spPr>
+          <a:xfrm>
+            <a:off x="548640" y="1170432"/>
+            <a:ext cx="4754880" cy="41148"/>
+          </a:xfrm>
+          <a:prstGeom prst="rect">
+            <a:avLst/>
+          </a:prstGeom>
+          <a:solidFill>
+            <a:srgbClr val="E63946"/>
+          </a:solidFill>
+        </p:spPr>
+        <p:txBody>
+          <a:bodyPr wrap="square" anchor="ctr">
+            <a:normAutofit/>
+          </a:bodyPr>
+          <a:lstStyle/>
+          <a:p/>
+        </p:txBody>
+      </p:sp>
+      <p:sp>
+        <p:nvSpPr>
+          <p:cNvPr id="6" name="title"/>
+          <p:cNvSpPr txBox="1"/>
+          <p:nvPr/>
+        </p:nvSpPr>
+        <p:spPr>
+          <a:xfrm>
+            <a:off x="548640" y="274320"/>
+            <a:ext cx="10607040" cy="914400"/>
+          </a:xfrm>
+          <a:prstGeom prst="rect">
+            <a:avLst/>
+          </a:prstGeom>
+          <a:noFill/>
+        </p:spPr>
+        <p:txBody>
+          <a:bodyPr wrap="square" lIns="45720" rIns="45720" anchor="ctr">
+            <a:normAutofit/>
+          </a:bodyPr>
+          <a:lstStyle/>
+          <a:p>
+            <a:pPr algn="l">
+              <a:spcAft>
+                <a:spcPts val="0"/>
+              </a:spcAft>
+            </a:pPr>
+            <a:r>
+              <a:rPr lang="uz-UZ" sz="3200" b="1" dirty="0">
+                <a:solidFill>
+                  <a:srgbClr val="E63946"/>
+                </a:solidFill>
+                <a:latin typeface="Times New Roman"/>
+                <a:cs typeface="Times New Roman"/>
+                <a:ea typeface="Times New Roman"/>
+              </a:rPr>
+              <a:t>Joul-Lents qonuni amalda</a:t>
+            </a:r>
+          </a:p>
+        </p:txBody>
+      </p:sp>
+      <p:sp>
+        <p:nvSpPr>
+          <p:cNvPr id="7" name="imgframe"/>
+          <p:cNvSpPr/>
+          <p:nvPr/>
+        </p:nvSpPr>
+        <p:spPr>
+          <a:xfrm>
+            <a:off x="7754112" y="1719072"/>
+            <a:ext cx="4014216" cy="3831336"/>
+          </a:xfrm>
+          <a:prstGeom prst="rect">
+            <a:avLst/>
+          </a:prstGeom>
+          <a:solidFill>
+            <a:srgbClr val="1F2630"/>
+          </a:solidFill>
+          <a:ln w="28575">
             <a:solidFill>
               <a:srgbClr val="E63946"/>
             </a:solidFill>
@@ -1226,10 +2734,398 @@
             <a:normAutofit/>
           </a:bodyPr>
           <a:lstStyle/>
+          <a:p/>
+        </p:txBody>
+      </p:sp>
+      <p:sp>
+        <p:nvSpPr>
+          <p:cNvPr id="8" name="placeholder"/>
+          <p:cNvSpPr/>
+          <p:nvPr/>
+        </p:nvSpPr>
+        <p:spPr>
+          <a:xfrm>
+            <a:off x="7818120" y="1783080"/>
+            <a:ext cx="3886200" cy="3703320"/>
+          </a:xfrm>
+          <a:prstGeom prst="rect">
+            <a:avLst/>
+          </a:prstGeom>
+          <a:solidFill>
+            <a:srgbClr val="161B22"/>
+          </a:solidFill>
+        </p:spPr>
+        <p:txBody>
+          <a:bodyPr wrap="square" anchor="ctr">
+            <a:normAutofit/>
+          </a:bodyPr>
+          <a:lstStyle/>
+          <a:p/>
+        </p:txBody>
+      </p:sp>
+      <p:sp>
+        <p:nvSpPr>
+          <p:cNvPr id="9" name="chip0"/>
+          <p:cNvSpPr/>
+          <p:nvPr/>
+        </p:nvSpPr>
+        <p:spPr>
+          <a:xfrm>
+            <a:off x="9100566" y="2708910"/>
+            <a:ext cx="1321308" cy="1259128"/>
+          </a:xfrm>
+          <a:prstGeom prst="rect">
+            <a:avLst/>
+          </a:prstGeom>
+          <a:solidFill>
+            <a:srgbClr val="E63946"/>
+          </a:solidFill>
+        </p:spPr>
+        <p:txBody>
+          <a:bodyPr wrap="square" anchor="ctr">
+            <a:normAutofit/>
+          </a:bodyPr>
+          <a:lstStyle/>
+          <a:p/>
+        </p:txBody>
+      </p:sp>
+      <p:sp>
+        <p:nvSpPr>
+          <p:cNvPr id="10" name="chip1"/>
+          <p:cNvSpPr/>
+          <p:nvPr/>
+        </p:nvSpPr>
+        <p:spPr>
+          <a:xfrm>
+            <a:off x="9294876" y="2894076"/>
+            <a:ext cx="932688" cy="888796"/>
+          </a:xfrm>
+          <a:prstGeom prst="rect">
+            <a:avLst/>
+          </a:prstGeom>
+          <a:solidFill>
+            <a:srgbClr val="1F2630"/>
+          </a:solidFill>
+        </p:spPr>
+        <p:txBody>
+          <a:bodyPr wrap="square" anchor="ctr">
+            <a:normAutofit/>
+          </a:bodyPr>
+          <a:lstStyle/>
+          <a:p/>
+        </p:txBody>
+      </p:sp>
+      <p:sp>
+        <p:nvSpPr>
+          <p:cNvPr id="11" name="chip2"/>
+          <p:cNvSpPr/>
+          <p:nvPr/>
+        </p:nvSpPr>
+        <p:spPr>
+          <a:xfrm>
+            <a:off x="9489186" y="3079242"/>
+            <a:ext cx="544068" cy="518464"/>
+          </a:xfrm>
+          <a:prstGeom prst="rect">
+            <a:avLst/>
+          </a:prstGeom>
+          <a:solidFill>
+            <a:srgbClr val="E63946"/>
+          </a:solidFill>
+        </p:spPr>
+        <p:txBody>
+          <a:bodyPr wrap="square" anchor="ctr">
+            <a:normAutofit/>
+          </a:bodyPr>
+          <a:lstStyle/>
+          <a:p/>
+        </p:txBody>
+      </p:sp>
+      <p:sp>
+        <p:nvSpPr>
+          <p:cNvPr id="12" name="pinl0"/>
+          <p:cNvSpPr/>
+          <p:nvPr/>
+        </p:nvSpPr>
+        <p:spPr>
+          <a:xfrm>
+            <a:off x="8935974" y="3009290"/>
+            <a:ext cx="164592" cy="45720"/>
+          </a:xfrm>
+          <a:prstGeom prst="rect">
+            <a:avLst/>
+          </a:prstGeom>
+          <a:solidFill>
+            <a:srgbClr val="E63946"/>
+          </a:solidFill>
+        </p:spPr>
+        <p:txBody>
+          <a:bodyPr wrap="square" anchor="ctr">
+            <a:normAutofit/>
+          </a:bodyPr>
+          <a:lstStyle/>
+          <a:p/>
+        </p:txBody>
+      </p:sp>
+      <p:sp>
+        <p:nvSpPr>
+          <p:cNvPr id="13" name="pinr0"/>
+          <p:cNvSpPr/>
+          <p:nvPr/>
+        </p:nvSpPr>
+        <p:spPr>
+          <a:xfrm>
+            <a:off x="10421874" y="3009290"/>
+            <a:ext cx="164592" cy="45720"/>
+          </a:xfrm>
+          <a:prstGeom prst="rect">
+            <a:avLst/>
+          </a:prstGeom>
+          <a:solidFill>
+            <a:srgbClr val="E63946"/>
+          </a:solidFill>
+        </p:spPr>
+        <p:txBody>
+          <a:bodyPr wrap="square" anchor="ctr">
+            <a:normAutofit/>
+          </a:bodyPr>
+          <a:lstStyle/>
+          <a:p/>
+        </p:txBody>
+      </p:sp>
+      <p:sp>
+        <p:nvSpPr>
+          <p:cNvPr id="14" name="pinl1"/>
+          <p:cNvSpPr/>
+          <p:nvPr/>
+        </p:nvSpPr>
+        <p:spPr>
+          <a:xfrm>
+            <a:off x="8935974" y="3173882"/>
+            <a:ext cx="164592" cy="45720"/>
+          </a:xfrm>
+          <a:prstGeom prst="rect">
+            <a:avLst/>
+          </a:prstGeom>
+          <a:solidFill>
+            <a:srgbClr val="E63946"/>
+          </a:solidFill>
+        </p:spPr>
+        <p:txBody>
+          <a:bodyPr wrap="square" anchor="ctr">
+            <a:normAutofit/>
+          </a:bodyPr>
+          <a:lstStyle/>
+          <a:p/>
+        </p:txBody>
+      </p:sp>
+      <p:sp>
+        <p:nvSpPr>
+          <p:cNvPr id="15" name="pinr1"/>
+          <p:cNvSpPr/>
+          <p:nvPr/>
+        </p:nvSpPr>
+        <p:spPr>
+          <a:xfrm>
+            <a:off x="10421874" y="3173882"/>
+            <a:ext cx="164592" cy="45720"/>
+          </a:xfrm>
+          <a:prstGeom prst="rect">
+            <a:avLst/>
+          </a:prstGeom>
+          <a:solidFill>
+            <a:srgbClr val="E63946"/>
+          </a:solidFill>
+        </p:spPr>
+        <p:txBody>
+          <a:bodyPr wrap="square" anchor="ctr">
+            <a:normAutofit/>
+          </a:bodyPr>
+          <a:lstStyle/>
+          <a:p/>
+        </p:txBody>
+      </p:sp>
+      <p:sp>
+        <p:nvSpPr>
+          <p:cNvPr id="16" name="pinl2"/>
+          <p:cNvSpPr/>
+          <p:nvPr/>
+        </p:nvSpPr>
+        <p:spPr>
+          <a:xfrm>
+            <a:off x="8935974" y="3338474"/>
+            <a:ext cx="164592" cy="45720"/>
+          </a:xfrm>
+          <a:prstGeom prst="rect">
+            <a:avLst/>
+          </a:prstGeom>
+          <a:solidFill>
+            <a:srgbClr val="E63946"/>
+          </a:solidFill>
+        </p:spPr>
+        <p:txBody>
+          <a:bodyPr wrap="square" anchor="ctr">
+            <a:normAutofit/>
+          </a:bodyPr>
+          <a:lstStyle/>
+          <a:p/>
+        </p:txBody>
+      </p:sp>
+      <p:sp>
+        <p:nvSpPr>
+          <p:cNvPr id="17" name="pinr2"/>
+          <p:cNvSpPr/>
+          <p:nvPr/>
+        </p:nvSpPr>
+        <p:spPr>
+          <a:xfrm>
+            <a:off x="10421874" y="3338474"/>
+            <a:ext cx="164592" cy="45720"/>
+          </a:xfrm>
+          <a:prstGeom prst="rect">
+            <a:avLst/>
+          </a:prstGeom>
+          <a:solidFill>
+            <a:srgbClr val="E63946"/>
+          </a:solidFill>
+        </p:spPr>
+        <p:txBody>
+          <a:bodyPr wrap="square" anchor="ctr">
+            <a:normAutofit/>
+          </a:bodyPr>
+          <a:lstStyle/>
+          <a:p/>
+        </p:txBody>
+      </p:sp>
+      <p:sp>
+        <p:nvSpPr>
+          <p:cNvPr id="18" name="pinl3"/>
+          <p:cNvSpPr/>
+          <p:nvPr/>
+        </p:nvSpPr>
+        <p:spPr>
+          <a:xfrm>
+            <a:off x="8935974" y="3503066"/>
+            <a:ext cx="164592" cy="45720"/>
+          </a:xfrm>
+          <a:prstGeom prst="rect">
+            <a:avLst/>
+          </a:prstGeom>
+          <a:solidFill>
+            <a:srgbClr val="E63946"/>
+          </a:solidFill>
+        </p:spPr>
+        <p:txBody>
+          <a:bodyPr wrap="square" anchor="ctr">
+            <a:normAutofit/>
+          </a:bodyPr>
+          <a:lstStyle/>
+          <a:p/>
+        </p:txBody>
+      </p:sp>
+      <p:sp>
+        <p:nvSpPr>
+          <p:cNvPr id="19" name="pinr3"/>
+          <p:cNvSpPr/>
+          <p:nvPr/>
+        </p:nvSpPr>
+        <p:spPr>
+          <a:xfrm>
+            <a:off x="10421874" y="3503066"/>
+            <a:ext cx="164592" cy="45720"/>
+          </a:xfrm>
+          <a:prstGeom prst="rect">
+            <a:avLst/>
+          </a:prstGeom>
+          <a:solidFill>
+            <a:srgbClr val="E63946"/>
+          </a:solidFill>
+        </p:spPr>
+        <p:txBody>
+          <a:bodyPr wrap="square" anchor="ctr">
+            <a:normAutofit/>
+          </a:bodyPr>
+          <a:lstStyle/>
+          <a:p/>
+        </p:txBody>
+      </p:sp>
+      <p:sp>
+        <p:nvSpPr>
+          <p:cNvPr id="20" name="pinl4"/>
+          <p:cNvSpPr/>
+          <p:nvPr/>
+        </p:nvSpPr>
+        <p:spPr>
+          <a:xfrm>
+            <a:off x="8935974" y="3667658"/>
+            <a:ext cx="164592" cy="45720"/>
+          </a:xfrm>
+          <a:prstGeom prst="rect">
+            <a:avLst/>
+          </a:prstGeom>
+          <a:solidFill>
+            <a:srgbClr val="E63946"/>
+          </a:solidFill>
+        </p:spPr>
+        <p:txBody>
+          <a:bodyPr wrap="square" anchor="ctr">
+            <a:normAutofit/>
+          </a:bodyPr>
+          <a:lstStyle/>
+          <a:p/>
+        </p:txBody>
+      </p:sp>
+      <p:sp>
+        <p:nvSpPr>
+          <p:cNvPr id="21" name="pinr4"/>
+          <p:cNvSpPr/>
+          <p:nvPr/>
+        </p:nvSpPr>
+        <p:spPr>
+          <a:xfrm>
+            <a:off x="10421874" y="3667658"/>
+            <a:ext cx="164592" cy="45720"/>
+          </a:xfrm>
+          <a:prstGeom prst="rect">
+            <a:avLst/>
+          </a:prstGeom>
+          <a:solidFill>
+            <a:srgbClr val="E63946"/>
+          </a:solidFill>
+        </p:spPr>
+        <p:txBody>
+          <a:bodyPr wrap="square" anchor="ctr">
+            <a:normAutofit/>
+          </a:bodyPr>
+          <a:lstStyle/>
+          <a:p/>
+        </p:txBody>
+      </p:sp>
+      <p:sp>
+        <p:nvSpPr>
+          <p:cNvPr id="22" name="imglabel"/>
+          <p:cNvSpPr txBox="1"/>
+          <p:nvPr/>
+        </p:nvSpPr>
+        <p:spPr>
+          <a:xfrm>
+            <a:off x="7818120" y="4983480"/>
+            <a:ext cx="3886200" cy="457200"/>
+          </a:xfrm>
+          <a:prstGeom prst="rect">
+            <a:avLst/>
+          </a:prstGeom>
+          <a:noFill/>
+        </p:spPr>
+        <p:txBody>
+          <a:bodyPr wrap="square" lIns="45720" rIns="45720" anchor="ctr">
+            <a:normAutofit/>
+          </a:bodyPr>
+          <a:lstStyle/>
           <a:p>
             <a:pPr algn="ctr">
               <a:spcAft>
-                <a:spcPts val="400"/>
+                <a:spcPts val="0"/>
               </a:spcAft>
             </a:pPr>
             <a:r>
@@ -1248,14 +3144,14 @@
       </p:sp>
       <p:sp>
         <p:nvSpPr>
-          <p:cNvPr id="5" name="title"/>
+          <p:cNvPr id="23" name="body"/>
           <p:cNvSpPr txBox="1"/>
           <p:nvPr/>
         </p:nvSpPr>
         <p:spPr>
           <a:xfrm>
-            <a:off x="457200" y="457200"/>
-            <a:ext cx="7132320" cy="1463040"/>
+            <a:off x="548640" y="1783080"/>
+            <a:ext cx="6858000" cy="4023360"/>
           </a:xfrm>
           <a:prstGeom prst="rect">
             <a:avLst/>
@@ -1263,40 +3159,200 @@
           <a:noFill/>
         </p:spPr>
         <p:txBody>
-          <a:bodyPr wrap="square" anchor="t">
+          <a:bodyPr wrap="square" lIns="45720" rIns="45720" anchor="t">
+            <a:normAutofit/>
+          </a:bodyPr>
+          <a:lstStyle/>
+          <a:p>
+            <a:pPr algn="l">
+              <a:lnSpc>
+                <a:spcPct val="108"/>
+              </a:lnSpc>
+              <a:spcAft>
+                <a:spcPts val="600"/>
+              </a:spcAft>
+            </a:pPr>
+            <a:r>
+              <a:rPr lang="uz-UZ" sz="1800" dirty="0">
+                <a:solidFill>
+                  <a:srgbClr val="F0F6FC"/>
+                </a:solidFill>
+                <a:latin typeface="Times New Roman"/>
+                <a:cs typeface="Times New Roman"/>
+                <a:ea typeface="Times New Roman"/>
+              </a:rPr>
+              <a:t>Protsessordagi qizish bevosita fizikaning Joul-Lents qonuni bilan tushuntiriladi.</a:t>
+            </a:r>
+          </a:p>
+          <a:p>
+            <a:pPr algn="l">
+              <a:lnSpc>
+                <a:spcPct val="108"/>
+              </a:lnSpc>
+              <a:spcAft>
+                <a:spcPts val="600"/>
+              </a:spcAft>
+            </a:pPr>
+            <a:r>
+              <a:rPr lang="uz-UZ" sz="1800" b="1" dirty="0">
+                <a:solidFill>
+                  <a:srgbClr val="E63946"/>
+                </a:solidFill>
+                <a:latin typeface="Times New Roman"/>
+                <a:cs typeface="Times New Roman"/>
+                <a:ea typeface="Times New Roman"/>
+              </a:rPr>
+              <a:t>▪  </a:t>
+            </a:r>
+            <a:r>
+              <a:rPr lang="uz-UZ" sz="1800" dirty="0">
+                <a:solidFill>
+                  <a:srgbClr val="F0F6FC"/>
+                </a:solidFill>
+                <a:latin typeface="Times New Roman"/>
+                <a:cs typeface="Times New Roman"/>
+                <a:ea typeface="Times New Roman"/>
+              </a:rPr>
+              <a:t>Qarshilik va Issiqlik: Har qanday o'tkazgich elektr tokiga ma'lum bir qarshilik ko'rsatadi. Elektr toki bu qarshilikni yengib o'tayotganda atomlar bilan to'qnashadi va kinetik energiya (issiqlik) hosil qiladi.</a:t>
+            </a:r>
+          </a:p>
+          <a:p>
+            <a:pPr algn="l">
+              <a:lnSpc>
+                <a:spcPct val="108"/>
+              </a:lnSpc>
+              <a:spcAft>
+                <a:spcPts val="600"/>
+              </a:spcAft>
+            </a:pPr>
+            <a:r>
+              <a:rPr lang="uz-UZ" sz="1800" b="1" dirty="0">
+                <a:solidFill>
+                  <a:srgbClr val="E63946"/>
+                </a:solidFill>
+                <a:latin typeface="Times New Roman"/>
+                <a:cs typeface="Times New Roman"/>
+                <a:ea typeface="Times New Roman"/>
+              </a:rPr>
+              <a:t>▪  </a:t>
+            </a:r>
+            <a:r>
+              <a:rPr lang="uz-UZ" sz="1800" dirty="0">
+                <a:solidFill>
+                  <a:srgbClr val="F0F6FC"/>
+                </a:solidFill>
+                <a:latin typeface="Times New Roman"/>
+                <a:cs typeface="Times New Roman"/>
+                <a:ea typeface="Times New Roman"/>
+              </a:rPr>
+              <a:t>TDP (Thermal Design Power): Bu protsessorning maksimal yuklamada qancha issiqlik (Vatt hisobida) ajratib chiqarishini ko'rsatuvchi ko'rsatkichdir.</a:t>
+            </a:r>
+          </a:p>
+        </p:txBody>
+      </p:sp>
+      <p:sp>
+        <p:nvSpPr>
+          <p:cNvPr id="24" name="footerband"/>
+          <p:cNvSpPr/>
+          <p:nvPr/>
+        </p:nvSpPr>
+        <p:spPr>
+          <a:xfrm>
+            <a:off x="0" y="6473952"/>
+            <a:ext cx="12192000" cy="384048"/>
+          </a:xfrm>
+          <a:prstGeom prst="rect">
+            <a:avLst/>
+          </a:prstGeom>
+          <a:solidFill>
+            <a:srgbClr val="11202E"/>
+          </a:solidFill>
+        </p:spPr>
+        <p:txBody>
+          <a:bodyPr wrap="square" anchor="ctr">
+            <a:normAutofit/>
+          </a:bodyPr>
+          <a:lstStyle/>
+          <a:p/>
+        </p:txBody>
+      </p:sp>
+      <p:sp>
+        <p:nvSpPr>
+          <p:cNvPr id="25" name="footeraccent"/>
+          <p:cNvSpPr/>
+          <p:nvPr/>
+        </p:nvSpPr>
+        <p:spPr>
+          <a:xfrm>
+            <a:off x="0" y="6473952"/>
+            <a:ext cx="12192000" cy="27432"/>
+          </a:xfrm>
+          <a:prstGeom prst="rect">
+            <a:avLst/>
+          </a:prstGeom>
+          <a:solidFill>
+            <a:srgbClr val="E63946"/>
+          </a:solidFill>
+        </p:spPr>
+        <p:txBody>
+          <a:bodyPr wrap="square" anchor="ctr">
+            <a:normAutofit/>
+          </a:bodyPr>
+          <a:lstStyle/>
+          <a:p/>
+        </p:txBody>
+      </p:sp>
+      <p:sp>
+        <p:nvSpPr>
+          <p:cNvPr id="26" name="footerlabel"/>
+          <p:cNvSpPr txBox="1"/>
+          <p:nvPr/>
+        </p:nvSpPr>
+        <p:spPr>
+          <a:xfrm>
+            <a:off x="548640" y="6473952"/>
+            <a:ext cx="8229600" cy="384048"/>
+          </a:xfrm>
+          <a:prstGeom prst="rect">
+            <a:avLst/>
+          </a:prstGeom>
+          <a:noFill/>
+        </p:spPr>
+        <p:txBody>
+          <a:bodyPr wrap="square" lIns="45720" rIns="45720" anchor="ctr">
             <a:normAutofit/>
           </a:bodyPr>
           <a:lstStyle/>
           <a:p>
             <a:pPr algn="l">
               <a:spcAft>
-                <a:spcPts val="400"/>
+                <a:spcPts val="0"/>
               </a:spcAft>
             </a:pPr>
             <a:r>
-              <a:rPr lang="uz-UZ" sz="4000" b="1" dirty="0">
-                <a:solidFill>
-                  <a:srgbClr val="E63946"/>
-                </a:solidFill>
-                <a:latin typeface="Times New Roman"/>
-                <a:cs typeface="Times New Roman"/>
-                <a:ea typeface="Times New Roman"/>
-              </a:rPr>
-              <a:t>Joul-Lents qonuni amalda</a:t>
+              <a:rPr lang="uz-UZ" sz="1200" dirty="0">
+                <a:solidFill>
+                  <a:srgbClr val="9FB3C8"/>
+                </a:solidFill>
+                <a:latin typeface="Times New Roman"/>
+                <a:cs typeface="Times New Roman"/>
+                <a:ea typeface="Times New Roman"/>
+              </a:rPr>
+              <a:t>Kompyuter qizishi va sovutish fizikasi</a:t>
             </a:r>
           </a:p>
         </p:txBody>
       </p:sp>
       <p:sp>
         <p:nvSpPr>
-          <p:cNvPr id="6" name="body"/>
+          <p:cNvPr id="27" name="footernum"/>
           <p:cNvSpPr txBox="1"/>
           <p:nvPr/>
         </p:nvSpPr>
         <p:spPr>
           <a:xfrm>
-            <a:off x="457200" y="2103120"/>
-            <a:ext cx="7132320" cy="4297680"/>
+            <a:off x="10332720" y="6473952"/>
+            <a:ext cx="1371600" cy="384048"/>
           </a:xfrm>
           <a:prstGeom prst="rect">
             <a:avLst/>
@@ -1304,62 +3360,26 @@
           <a:noFill/>
         </p:spPr>
         <p:txBody>
-          <a:bodyPr wrap="square" anchor="t">
+          <a:bodyPr wrap="square" lIns="45720" rIns="45720" anchor="ctr">
             <a:normAutofit/>
           </a:bodyPr>
           <a:lstStyle/>
           <a:p>
-            <a:pPr algn="l">
+            <a:pPr algn="r">
               <a:spcAft>
-                <a:spcPts val="400"/>
+                <a:spcPts val="0"/>
               </a:spcAft>
             </a:pPr>
             <a:r>
-              <a:rPr lang="uz-UZ" sz="1800" dirty="0">
-                <a:solidFill>
-                  <a:srgbClr val="F0F6FC"/>
-                </a:solidFill>
-                <a:latin typeface="Times New Roman"/>
-                <a:cs typeface="Times New Roman"/>
-                <a:ea typeface="Times New Roman"/>
-              </a:rPr>
-              <a:t>Protsessordagi qizish bevosita fizikaning Joul-Lents qonuni bilan tushuntiriladi.</a:t>
-            </a:r>
-          </a:p>
-          <a:p>
-            <a:pPr algn="l">
-              <a:spcAft>
-                <a:spcPts val="400"/>
-              </a:spcAft>
-            </a:pPr>
-            <a:r>
-              <a:rPr lang="uz-UZ" sz="1800" dirty="0">
-                <a:solidFill>
-                  <a:srgbClr val="F0F6FC"/>
-                </a:solidFill>
-                <a:latin typeface="Times New Roman"/>
-                <a:cs typeface="Times New Roman"/>
-                <a:ea typeface="Times New Roman"/>
-              </a:rPr>
-              <a:t>- Qarshilik va Issiqlik: Har qanday o'tkazgich elektr tokiga ma'lum bir qarshilik ko'rsatadi. Elektr toki bu qarshilikni yengib o'tayotganda atomlar bilan to'qnashadi va kinetik energiya (issiqlik) hosil qiladi.</a:t>
-            </a:r>
-          </a:p>
-          <a:p>
-            <a:pPr algn="l">
-              <a:spcAft>
-                <a:spcPts val="400"/>
-              </a:spcAft>
-            </a:pPr>
-            <a:r>
-              <a:rPr lang="uz-UZ" sz="1800" dirty="0">
-                <a:solidFill>
-                  <a:srgbClr val="F0F6FC"/>
-                </a:solidFill>
-                <a:latin typeface="Times New Roman"/>
-                <a:cs typeface="Times New Roman"/>
-                <a:ea typeface="Times New Roman"/>
-              </a:rPr>
-              <a:t>- TDP (Thermal Design Power): Bu protsessorning maksimal yuklamada qancha issiqlik (Vatt hisobida) ajratib chiqarishini ko'rsatuvchi ko'rsatkichdir.</a:t>
+              <a:rPr lang="uz-UZ" sz="1200" b="1" dirty="0">
+                <a:solidFill>
+                  <a:srgbClr val="E63946"/>
+                </a:solidFill>
+                <a:latin typeface="Times New Roman"/>
+                <a:cs typeface="Times New Roman"/>
+                <a:ea typeface="Times New Roman"/>
+              </a:rPr>
+              <a:t>4 / 10</a:t>
             </a:r>
           </a:p>
         </p:txBody>
@@ -1424,7 +3444,7 @@
         <p:spPr>
           <a:xfrm>
             <a:off x="0" y="0"/>
-            <a:ext cx="164592" cy="6858000"/>
+            <a:ext cx="128016" cy="6858000"/>
           </a:xfrm>
           <a:prstGeom prst="rect">
             <a:avLst/>
@@ -1443,22 +3463,115 @@
       </p:sp>
       <p:sp>
         <p:nvSpPr>
-          <p:cNvPr id="4" name="placeholder"/>
-          <p:cNvSpPr/>
-          <p:nvPr/>
-        </p:nvSpPr>
-        <p:spPr>
-          <a:xfrm>
-            <a:off x="7863840" y="914400"/>
-            <a:ext cx="3840480" cy="4846320"/>
-          </a:xfrm>
-          <a:prstGeom prst="rect">
-            <a:avLst/>
-          </a:prstGeom>
-          <a:solidFill>
-            <a:srgbClr val="161B22"/>
-          </a:solidFill>
-          <a:ln w="25400">
+          <p:cNvPr id="4" name="headerband"/>
+          <p:cNvSpPr/>
+          <p:nvPr/>
+        </p:nvSpPr>
+        <p:spPr>
+          <a:xfrm>
+            <a:off x="128016" y="0"/>
+            <a:ext cx="12063984" cy="1417320"/>
+          </a:xfrm>
+          <a:prstGeom prst="rect">
+            <a:avLst/>
+          </a:prstGeom>
+          <a:solidFill>
+            <a:srgbClr val="11202E"/>
+          </a:solidFill>
+        </p:spPr>
+        <p:txBody>
+          <a:bodyPr wrap="square" anchor="ctr">
+            <a:normAutofit/>
+          </a:bodyPr>
+          <a:lstStyle/>
+          <a:p/>
+        </p:txBody>
+      </p:sp>
+      <p:sp>
+        <p:nvSpPr>
+          <p:cNvPr id="5" name="titleline"/>
+          <p:cNvSpPr/>
+          <p:nvPr/>
+        </p:nvSpPr>
+        <p:spPr>
+          <a:xfrm>
+            <a:off x="548640" y="1170432"/>
+            <a:ext cx="4754880" cy="41148"/>
+          </a:xfrm>
+          <a:prstGeom prst="rect">
+            <a:avLst/>
+          </a:prstGeom>
+          <a:solidFill>
+            <a:srgbClr val="00B4D8"/>
+          </a:solidFill>
+        </p:spPr>
+        <p:txBody>
+          <a:bodyPr wrap="square" anchor="ctr">
+            <a:normAutofit/>
+          </a:bodyPr>
+          <a:lstStyle/>
+          <a:p/>
+        </p:txBody>
+      </p:sp>
+      <p:sp>
+        <p:nvSpPr>
+          <p:cNvPr id="6" name="title"/>
+          <p:cNvSpPr txBox="1"/>
+          <p:nvPr/>
+        </p:nvSpPr>
+        <p:spPr>
+          <a:xfrm>
+            <a:off x="548640" y="274320"/>
+            <a:ext cx="10607040" cy="914400"/>
+          </a:xfrm>
+          <a:prstGeom prst="rect">
+            <a:avLst/>
+          </a:prstGeom>
+          <a:noFill/>
+        </p:spPr>
+        <p:txBody>
+          <a:bodyPr wrap="square" lIns="45720" rIns="45720" anchor="ctr">
+            <a:normAutofit/>
+          </a:bodyPr>
+          <a:lstStyle/>
+          <a:p>
+            <a:pPr algn="l">
+              <a:spcAft>
+                <a:spcPts val="0"/>
+              </a:spcAft>
+            </a:pPr>
+            <a:r>
+              <a:rPr lang="uz-UZ" sz="3200" b="1" dirty="0">
+                <a:solidFill>
+                  <a:srgbClr val="00B4D8"/>
+                </a:solidFill>
+                <a:latin typeface="Times New Roman"/>
+                <a:cs typeface="Times New Roman"/>
+                <a:ea typeface="Times New Roman"/>
+              </a:rPr>
+              <a:t>2. Issiqlikni uzoqlashtirish: Termopasta</a:t>
+            </a:r>
+          </a:p>
+        </p:txBody>
+      </p:sp>
+      <p:sp>
+        <p:nvSpPr>
+          <p:cNvPr id="7" name="imgframe"/>
+          <p:cNvSpPr/>
+          <p:nvPr/>
+        </p:nvSpPr>
+        <p:spPr>
+          <a:xfrm>
+            <a:off x="7754112" y="1719072"/>
+            <a:ext cx="4014216" cy="3831336"/>
+          </a:xfrm>
+          <a:prstGeom prst="rect">
+            <a:avLst/>
+          </a:prstGeom>
+          <a:solidFill>
+            <a:srgbClr val="1F2630"/>
+          </a:solidFill>
+          <a:ln w="28575">
             <a:solidFill>
               <a:srgbClr val="00B4D8"/>
             </a:solidFill>
@@ -1469,10 +3582,268 @@
             <a:normAutofit/>
           </a:bodyPr>
           <a:lstStyle/>
+          <a:p/>
+        </p:txBody>
+      </p:sp>
+      <p:sp>
+        <p:nvSpPr>
+          <p:cNvPr id="8" name="placeholder"/>
+          <p:cNvSpPr/>
+          <p:nvPr/>
+        </p:nvSpPr>
+        <p:spPr>
+          <a:xfrm>
+            <a:off x="7818120" y="1783080"/>
+            <a:ext cx="3886200" cy="3703320"/>
+          </a:xfrm>
+          <a:prstGeom prst="rect">
+            <a:avLst/>
+          </a:prstGeom>
+          <a:solidFill>
+            <a:srgbClr val="161B22"/>
+          </a:solidFill>
+        </p:spPr>
+        <p:txBody>
+          <a:bodyPr wrap="square" anchor="ctr">
+            <a:normAutofit/>
+          </a:bodyPr>
+          <a:lstStyle/>
+          <a:p/>
+        </p:txBody>
+      </p:sp>
+      <p:sp>
+        <p:nvSpPr>
+          <p:cNvPr id="9" name="fin0"/>
+          <p:cNvSpPr/>
+          <p:nvPr/>
+        </p:nvSpPr>
+        <p:spPr>
+          <a:xfrm>
+            <a:off x="8901684" y="2560777"/>
+            <a:ext cx="73152" cy="1555394"/>
+          </a:xfrm>
+          <a:prstGeom prst="rect">
+            <a:avLst/>
+          </a:prstGeom>
+          <a:solidFill>
+            <a:srgbClr val="00B4D8"/>
+          </a:solidFill>
+        </p:spPr>
+        <p:txBody>
+          <a:bodyPr wrap="square" anchor="ctr">
+            <a:normAutofit/>
+          </a:bodyPr>
+          <a:lstStyle/>
+          <a:p/>
+        </p:txBody>
+      </p:sp>
+      <p:sp>
+        <p:nvSpPr>
+          <p:cNvPr id="10" name="fin1"/>
+          <p:cNvSpPr/>
+          <p:nvPr/>
+        </p:nvSpPr>
+        <p:spPr>
+          <a:xfrm>
+            <a:off x="9176004" y="2560777"/>
+            <a:ext cx="73152" cy="1555394"/>
+          </a:xfrm>
+          <a:prstGeom prst="rect">
+            <a:avLst/>
+          </a:prstGeom>
+          <a:solidFill>
+            <a:srgbClr val="00B4D8"/>
+          </a:solidFill>
+        </p:spPr>
+        <p:txBody>
+          <a:bodyPr wrap="square" anchor="ctr">
+            <a:normAutofit/>
+          </a:bodyPr>
+          <a:lstStyle/>
+          <a:p/>
+        </p:txBody>
+      </p:sp>
+      <p:sp>
+        <p:nvSpPr>
+          <p:cNvPr id="11" name="fin2"/>
+          <p:cNvSpPr/>
+          <p:nvPr/>
+        </p:nvSpPr>
+        <p:spPr>
+          <a:xfrm>
+            <a:off x="9450324" y="2560777"/>
+            <a:ext cx="73152" cy="1555394"/>
+          </a:xfrm>
+          <a:prstGeom prst="rect">
+            <a:avLst/>
+          </a:prstGeom>
+          <a:solidFill>
+            <a:srgbClr val="00B4D8"/>
+          </a:solidFill>
+        </p:spPr>
+        <p:txBody>
+          <a:bodyPr wrap="square" anchor="ctr">
+            <a:normAutofit/>
+          </a:bodyPr>
+          <a:lstStyle/>
+          <a:p/>
+        </p:txBody>
+      </p:sp>
+      <p:sp>
+        <p:nvSpPr>
+          <p:cNvPr id="12" name="fin3"/>
+          <p:cNvSpPr/>
+          <p:nvPr/>
+        </p:nvSpPr>
+        <p:spPr>
+          <a:xfrm>
+            <a:off x="9724644" y="2560777"/>
+            <a:ext cx="73152" cy="1555394"/>
+          </a:xfrm>
+          <a:prstGeom prst="rect">
+            <a:avLst/>
+          </a:prstGeom>
+          <a:solidFill>
+            <a:srgbClr val="00B4D8"/>
+          </a:solidFill>
+        </p:spPr>
+        <p:txBody>
+          <a:bodyPr wrap="square" anchor="ctr">
+            <a:normAutofit/>
+          </a:bodyPr>
+          <a:lstStyle/>
+          <a:p/>
+        </p:txBody>
+      </p:sp>
+      <p:sp>
+        <p:nvSpPr>
+          <p:cNvPr id="13" name="fin4"/>
+          <p:cNvSpPr/>
+          <p:nvPr/>
+        </p:nvSpPr>
+        <p:spPr>
+          <a:xfrm>
+            <a:off x="9998964" y="2560777"/>
+            <a:ext cx="73152" cy="1555394"/>
+          </a:xfrm>
+          <a:prstGeom prst="rect">
+            <a:avLst/>
+          </a:prstGeom>
+          <a:solidFill>
+            <a:srgbClr val="00B4D8"/>
+          </a:solidFill>
+        </p:spPr>
+        <p:txBody>
+          <a:bodyPr wrap="square" anchor="ctr">
+            <a:normAutofit/>
+          </a:bodyPr>
+          <a:lstStyle/>
+          <a:p/>
+        </p:txBody>
+      </p:sp>
+      <p:sp>
+        <p:nvSpPr>
+          <p:cNvPr id="14" name="fin5"/>
+          <p:cNvSpPr/>
+          <p:nvPr/>
+        </p:nvSpPr>
+        <p:spPr>
+          <a:xfrm>
+            <a:off x="10273284" y="2560777"/>
+            <a:ext cx="73152" cy="1555394"/>
+          </a:xfrm>
+          <a:prstGeom prst="rect">
+            <a:avLst/>
+          </a:prstGeom>
+          <a:solidFill>
+            <a:srgbClr val="00B4D8"/>
+          </a:solidFill>
+        </p:spPr>
+        <p:txBody>
+          <a:bodyPr wrap="square" anchor="ctr">
+            <a:normAutofit/>
+          </a:bodyPr>
+          <a:lstStyle/>
+          <a:p/>
+        </p:txBody>
+      </p:sp>
+      <p:sp>
+        <p:nvSpPr>
+          <p:cNvPr id="15" name="fin6"/>
+          <p:cNvSpPr/>
+          <p:nvPr/>
+        </p:nvSpPr>
+        <p:spPr>
+          <a:xfrm>
+            <a:off x="10547604" y="2560777"/>
+            <a:ext cx="73152" cy="1555394"/>
+          </a:xfrm>
+          <a:prstGeom prst="rect">
+            <a:avLst/>
+          </a:prstGeom>
+          <a:solidFill>
+            <a:srgbClr val="00B4D8"/>
+          </a:solidFill>
+        </p:spPr>
+        <p:txBody>
+          <a:bodyPr wrap="square" anchor="ctr">
+            <a:normAutofit/>
+          </a:bodyPr>
+          <a:lstStyle/>
+          <a:p/>
+        </p:txBody>
+      </p:sp>
+      <p:sp>
+        <p:nvSpPr>
+          <p:cNvPr id="16" name="base"/>
+          <p:cNvSpPr/>
+          <p:nvPr/>
+        </p:nvSpPr>
+        <p:spPr>
+          <a:xfrm>
+            <a:off x="8700516" y="4116171"/>
+            <a:ext cx="2121408" cy="109728"/>
+          </a:xfrm>
+          <a:prstGeom prst="rect">
+            <a:avLst/>
+          </a:prstGeom>
+          <a:solidFill>
+            <a:srgbClr val="00B4D8"/>
+          </a:solidFill>
+        </p:spPr>
+        <p:txBody>
+          <a:bodyPr wrap="square" anchor="ctr">
+            <a:normAutofit/>
+          </a:bodyPr>
+          <a:lstStyle/>
+          <a:p/>
+        </p:txBody>
+      </p:sp>
+      <p:sp>
+        <p:nvSpPr>
+          <p:cNvPr id="17" name="imglabel"/>
+          <p:cNvSpPr txBox="1"/>
+          <p:nvPr/>
+        </p:nvSpPr>
+        <p:spPr>
+          <a:xfrm>
+            <a:off x="7818120" y="4983480"/>
+            <a:ext cx="3886200" cy="457200"/>
+          </a:xfrm>
+          <a:prstGeom prst="rect">
+            <a:avLst/>
+          </a:prstGeom>
+          <a:noFill/>
+        </p:spPr>
+        <p:txBody>
+          <a:bodyPr wrap="square" lIns="45720" rIns="45720" anchor="ctr">
+            <a:normAutofit/>
+          </a:bodyPr>
+          <a:lstStyle/>
           <a:p>
             <a:pPr algn="ctr">
               <a:spcAft>
-                <a:spcPts val="400"/>
+                <a:spcPts val="0"/>
               </a:spcAft>
             </a:pPr>
             <a:r>
@@ -1491,14 +3862,14 @@
       </p:sp>
       <p:sp>
         <p:nvSpPr>
-          <p:cNvPr id="5" name="title"/>
+          <p:cNvPr id="18" name="body"/>
           <p:cNvSpPr txBox="1"/>
           <p:nvPr/>
         </p:nvSpPr>
         <p:spPr>
           <a:xfrm>
-            <a:off x="457200" y="457200"/>
-            <a:ext cx="7132320" cy="1463040"/>
+            <a:off x="548640" y="1783080"/>
+            <a:ext cx="6858000" cy="4023360"/>
           </a:xfrm>
           <a:prstGeom prst="rect">
             <a:avLst/>
@@ -1506,40 +3877,200 @@
           <a:noFill/>
         </p:spPr>
         <p:txBody>
-          <a:bodyPr wrap="square" anchor="t">
+          <a:bodyPr wrap="square" lIns="45720" rIns="45720" anchor="t">
+            <a:normAutofit/>
+          </a:bodyPr>
+          <a:lstStyle/>
+          <a:p>
+            <a:pPr algn="l">
+              <a:lnSpc>
+                <a:spcPct val="108"/>
+              </a:lnSpc>
+              <a:spcAft>
+                <a:spcPts val="600"/>
+              </a:spcAft>
+            </a:pPr>
+            <a:r>
+              <a:rPr lang="uz-UZ" sz="1800" dirty="0">
+                <a:solidFill>
+                  <a:srgbClr val="F0F6FC"/>
+                </a:solidFill>
+                <a:latin typeface="Times New Roman"/>
+                <a:cs typeface="Times New Roman"/>
+                <a:ea typeface="Times New Roman"/>
+              </a:rPr>
+              <a:t>Protsessor yuzasida hosil bo'lgan kuchli issiqlikni tezda olib tashlash axborot tizimining barqaror ishlashi uchun juda muhim.</a:t>
+            </a:r>
+          </a:p>
+          <a:p>
+            <a:pPr algn="l">
+              <a:lnSpc>
+                <a:spcPct val="108"/>
+              </a:lnSpc>
+              <a:spcAft>
+                <a:spcPts val="600"/>
+              </a:spcAft>
+            </a:pPr>
+            <a:r>
+              <a:rPr lang="uz-UZ" sz="1800" b="1" dirty="0">
+                <a:solidFill>
+                  <a:srgbClr val="00B4D8"/>
+                </a:solidFill>
+                <a:latin typeface="Times New Roman"/>
+                <a:cs typeface="Times New Roman"/>
+                <a:ea typeface="Times New Roman"/>
+              </a:rPr>
+              <a:t>▪  </a:t>
+            </a:r>
+            <a:r>
+              <a:rPr lang="uz-UZ" sz="1800" dirty="0">
+                <a:solidFill>
+                  <a:srgbClr val="F0F6FC"/>
+                </a:solidFill>
+                <a:latin typeface="Times New Roman"/>
+                <a:cs typeface="Times New Roman"/>
+                <a:ea typeface="Times New Roman"/>
+              </a:rPr>
+              <a:t>Mikroskopik bo'shliqlar: Protsessor va uning ustiga qo'yiladigan radiator yuzasi ko'zga tekis ko'rinsa-da, mikroskop ostida g'adir-budur bo'ladi. Ular orasida issiqlikni yomon o'tkazuvchi havo qolib ketadi.</a:t>
+            </a:r>
+          </a:p>
+          <a:p>
+            <a:pPr algn="l">
+              <a:lnSpc>
+                <a:spcPct val="108"/>
+              </a:lnSpc>
+              <a:spcAft>
+                <a:spcPts val="600"/>
+              </a:spcAft>
+            </a:pPr>
+            <a:r>
+              <a:rPr lang="uz-UZ" sz="1800" b="1" dirty="0">
+                <a:solidFill>
+                  <a:srgbClr val="00B4D8"/>
+                </a:solidFill>
+                <a:latin typeface="Times New Roman"/>
+                <a:cs typeface="Times New Roman"/>
+                <a:ea typeface="Times New Roman"/>
+              </a:rPr>
+              <a:t>▪  </a:t>
+            </a:r>
+            <a:r>
+              <a:rPr lang="uz-UZ" sz="1800" dirty="0">
+                <a:solidFill>
+                  <a:srgbClr val="F0F6FC"/>
+                </a:solidFill>
+                <a:latin typeface="Times New Roman"/>
+                <a:cs typeface="Times New Roman"/>
+                <a:ea typeface="Times New Roman"/>
+              </a:rPr>
+              <a:t>Termopastaning vazifasi: Suyuq termopasta ana shu bo'shliqlarni to'ldiradi va issiqlikni protsessordan radiatorga maksimal darajada tez o'tkazib beradi.</a:t>
+            </a:r>
+          </a:p>
+        </p:txBody>
+      </p:sp>
+      <p:sp>
+        <p:nvSpPr>
+          <p:cNvPr id="19" name="footerband"/>
+          <p:cNvSpPr/>
+          <p:nvPr/>
+        </p:nvSpPr>
+        <p:spPr>
+          <a:xfrm>
+            <a:off x="0" y="6473952"/>
+            <a:ext cx="12192000" cy="384048"/>
+          </a:xfrm>
+          <a:prstGeom prst="rect">
+            <a:avLst/>
+          </a:prstGeom>
+          <a:solidFill>
+            <a:srgbClr val="11202E"/>
+          </a:solidFill>
+        </p:spPr>
+        <p:txBody>
+          <a:bodyPr wrap="square" anchor="ctr">
+            <a:normAutofit/>
+          </a:bodyPr>
+          <a:lstStyle/>
+          <a:p/>
+        </p:txBody>
+      </p:sp>
+      <p:sp>
+        <p:nvSpPr>
+          <p:cNvPr id="20" name="footeraccent"/>
+          <p:cNvSpPr/>
+          <p:nvPr/>
+        </p:nvSpPr>
+        <p:spPr>
+          <a:xfrm>
+            <a:off x="0" y="6473952"/>
+            <a:ext cx="12192000" cy="27432"/>
+          </a:xfrm>
+          <a:prstGeom prst="rect">
+            <a:avLst/>
+          </a:prstGeom>
+          <a:solidFill>
+            <a:srgbClr val="00B4D8"/>
+          </a:solidFill>
+        </p:spPr>
+        <p:txBody>
+          <a:bodyPr wrap="square" anchor="ctr">
+            <a:normAutofit/>
+          </a:bodyPr>
+          <a:lstStyle/>
+          <a:p/>
+        </p:txBody>
+      </p:sp>
+      <p:sp>
+        <p:nvSpPr>
+          <p:cNvPr id="21" name="footerlabel"/>
+          <p:cNvSpPr txBox="1"/>
+          <p:nvPr/>
+        </p:nvSpPr>
+        <p:spPr>
+          <a:xfrm>
+            <a:off x="548640" y="6473952"/>
+            <a:ext cx="8229600" cy="384048"/>
+          </a:xfrm>
+          <a:prstGeom prst="rect">
+            <a:avLst/>
+          </a:prstGeom>
+          <a:noFill/>
+        </p:spPr>
+        <p:txBody>
+          <a:bodyPr wrap="square" lIns="45720" rIns="45720" anchor="ctr">
             <a:normAutofit/>
           </a:bodyPr>
           <a:lstStyle/>
           <a:p>
             <a:pPr algn="l">
               <a:spcAft>
-                <a:spcPts val="400"/>
+                <a:spcPts val="0"/>
               </a:spcAft>
             </a:pPr>
             <a:r>
-              <a:rPr lang="uz-UZ" sz="4000" b="1" dirty="0">
-                <a:solidFill>
-                  <a:srgbClr val="00B4D8"/>
-                </a:solidFill>
-                <a:latin typeface="Times New Roman"/>
-                <a:cs typeface="Times New Roman"/>
-                <a:ea typeface="Times New Roman"/>
-              </a:rPr>
-              <a:t>2. Issiqlikni uzoqlashtirish: Termopasta</a:t>
+              <a:rPr lang="uz-UZ" sz="1200" dirty="0">
+                <a:solidFill>
+                  <a:srgbClr val="9FB3C8"/>
+                </a:solidFill>
+                <a:latin typeface="Times New Roman"/>
+                <a:cs typeface="Times New Roman"/>
+                <a:ea typeface="Times New Roman"/>
+              </a:rPr>
+              <a:t>Kompyuter qizishi va sovutish fizikasi</a:t>
             </a:r>
           </a:p>
         </p:txBody>
       </p:sp>
       <p:sp>
         <p:nvSpPr>
-          <p:cNvPr id="6" name="body"/>
+          <p:cNvPr id="22" name="footernum"/>
           <p:cNvSpPr txBox="1"/>
           <p:nvPr/>
         </p:nvSpPr>
         <p:spPr>
           <a:xfrm>
-            <a:off x="457200" y="2103120"/>
-            <a:ext cx="7132320" cy="4297680"/>
+            <a:off x="10332720" y="6473952"/>
+            <a:ext cx="1371600" cy="384048"/>
           </a:xfrm>
           <a:prstGeom prst="rect">
             <a:avLst/>
@@ -1547,62 +4078,26 @@
           <a:noFill/>
         </p:spPr>
         <p:txBody>
-          <a:bodyPr wrap="square" anchor="t">
+          <a:bodyPr wrap="square" lIns="45720" rIns="45720" anchor="ctr">
             <a:normAutofit/>
           </a:bodyPr>
           <a:lstStyle/>
           <a:p>
-            <a:pPr algn="l">
+            <a:pPr algn="r">
               <a:spcAft>
-                <a:spcPts val="400"/>
+                <a:spcPts val="0"/>
               </a:spcAft>
             </a:pPr>
             <a:r>
-              <a:rPr lang="uz-UZ" sz="1800" dirty="0">
-                <a:solidFill>
-                  <a:srgbClr val="F0F6FC"/>
-                </a:solidFill>
-                <a:latin typeface="Times New Roman"/>
-                <a:cs typeface="Times New Roman"/>
-                <a:ea typeface="Times New Roman"/>
-              </a:rPr>
-              <a:t>Protsessor yuzasida hosil bo'lgan kuchli issiqlikni tezda olib tashlash axborot tizimining barqaror ishlashi uchun juda muhim.</a:t>
-            </a:r>
-          </a:p>
-          <a:p>
-            <a:pPr algn="l">
-              <a:spcAft>
-                <a:spcPts val="400"/>
-              </a:spcAft>
-            </a:pPr>
-            <a:r>
-              <a:rPr lang="uz-UZ" sz="1800" dirty="0">
-                <a:solidFill>
-                  <a:srgbClr val="F0F6FC"/>
-                </a:solidFill>
-                <a:latin typeface="Times New Roman"/>
-                <a:cs typeface="Times New Roman"/>
-                <a:ea typeface="Times New Roman"/>
-              </a:rPr>
-              <a:t>- Mikroskopik bo'shliqlar: Protsessor va uning ustiga qo'yiladigan radiator yuzasi ko'zga tekis ko'rinsa-da, mikroskop ostida g'adir-budur bo'ladi. Ular orasida issiqlikni yomon o'tkazuvchi havo qolib ketadi.</a:t>
-            </a:r>
-          </a:p>
-          <a:p>
-            <a:pPr algn="l">
-              <a:spcAft>
-                <a:spcPts val="400"/>
-              </a:spcAft>
-            </a:pPr>
-            <a:r>
-              <a:rPr lang="uz-UZ" sz="1800" dirty="0">
-                <a:solidFill>
-                  <a:srgbClr val="F0F6FC"/>
-                </a:solidFill>
-                <a:latin typeface="Times New Roman"/>
-                <a:cs typeface="Times New Roman"/>
-                <a:ea typeface="Times New Roman"/>
-              </a:rPr>
-              <a:t>- Termopastaning vazifasi: Suyuq termopasta ana shu bo'shliqlarni to'ldiradi va issiqlikni protsessordan radiatorga maksimal darajada tez o'tkazib beradi.</a:t>
+              <a:rPr lang="uz-UZ" sz="1200" b="1" dirty="0">
+                <a:solidFill>
+                  <a:srgbClr val="00B4D8"/>
+                </a:solidFill>
+                <a:latin typeface="Times New Roman"/>
+                <a:cs typeface="Times New Roman"/>
+                <a:ea typeface="Times New Roman"/>
+              </a:rPr>
+              <a:t>5 / 10</a:t>
             </a:r>
           </a:p>
         </p:txBody>
@@ -1667,7 +4162,7 @@
         <p:spPr>
           <a:xfrm>
             <a:off x="0" y="0"/>
-            <a:ext cx="164592" cy="6858000"/>
+            <a:ext cx="128016" cy="6858000"/>
           </a:xfrm>
           <a:prstGeom prst="rect">
             <a:avLst/>
@@ -1686,22 +4181,115 @@
       </p:sp>
       <p:sp>
         <p:nvSpPr>
-          <p:cNvPr id="4" name="placeholder"/>
-          <p:cNvSpPr/>
-          <p:nvPr/>
-        </p:nvSpPr>
-        <p:spPr>
-          <a:xfrm>
-            <a:off x="7863840" y="914400"/>
-            <a:ext cx="3840480" cy="4846320"/>
-          </a:xfrm>
-          <a:prstGeom prst="rect">
-            <a:avLst/>
-          </a:prstGeom>
-          <a:solidFill>
-            <a:srgbClr val="161B22"/>
-          </a:solidFill>
-          <a:ln w="25400">
+          <p:cNvPr id="4" name="headerband"/>
+          <p:cNvSpPr/>
+          <p:nvPr/>
+        </p:nvSpPr>
+        <p:spPr>
+          <a:xfrm>
+            <a:off x="128016" y="0"/>
+            <a:ext cx="12063984" cy="1417320"/>
+          </a:xfrm>
+          <a:prstGeom prst="rect">
+            <a:avLst/>
+          </a:prstGeom>
+          <a:solidFill>
+            <a:srgbClr val="11202E"/>
+          </a:solidFill>
+        </p:spPr>
+        <p:txBody>
+          <a:bodyPr wrap="square" anchor="ctr">
+            <a:normAutofit/>
+          </a:bodyPr>
+          <a:lstStyle/>
+          <a:p/>
+        </p:txBody>
+      </p:sp>
+      <p:sp>
+        <p:nvSpPr>
+          <p:cNvPr id="5" name="titleline"/>
+          <p:cNvSpPr/>
+          <p:nvPr/>
+        </p:nvSpPr>
+        <p:spPr>
+          <a:xfrm>
+            <a:off x="548640" y="1170432"/>
+            <a:ext cx="4754880" cy="41148"/>
+          </a:xfrm>
+          <a:prstGeom prst="rect">
+            <a:avLst/>
+          </a:prstGeom>
+          <a:solidFill>
+            <a:srgbClr val="48CAE4"/>
+          </a:solidFill>
+        </p:spPr>
+        <p:txBody>
+          <a:bodyPr wrap="square" anchor="ctr">
+            <a:normAutofit/>
+          </a:bodyPr>
+          <a:lstStyle/>
+          <a:p/>
+        </p:txBody>
+      </p:sp>
+      <p:sp>
+        <p:nvSpPr>
+          <p:cNvPr id="6" name="title"/>
+          <p:cNvSpPr txBox="1"/>
+          <p:nvPr/>
+        </p:nvSpPr>
+        <p:spPr>
+          <a:xfrm>
+            <a:off x="548640" y="274320"/>
+            <a:ext cx="10607040" cy="914400"/>
+          </a:xfrm>
+          <a:prstGeom prst="rect">
+            <a:avLst/>
+          </a:prstGeom>
+          <a:noFill/>
+        </p:spPr>
+        <p:txBody>
+          <a:bodyPr wrap="square" lIns="45720" rIns="45720" anchor="ctr">
+            <a:normAutofit/>
+          </a:bodyPr>
+          <a:lstStyle/>
+          <a:p>
+            <a:pPr algn="l">
+              <a:spcAft>
+                <a:spcPts val="0"/>
+              </a:spcAft>
+            </a:pPr>
+            <a:r>
+              <a:rPr lang="uz-UZ" sz="3200" b="1" dirty="0">
+                <a:solidFill>
+                  <a:srgbClr val="48CAE4"/>
+                </a:solidFill>
+                <a:latin typeface="Times New Roman"/>
+                <a:cs typeface="Times New Roman"/>
+                <a:ea typeface="Times New Roman"/>
+              </a:rPr>
+              <a:t>Radiator (Heatsink) fizikasi</a:t>
+            </a:r>
+          </a:p>
+        </p:txBody>
+      </p:sp>
+      <p:sp>
+        <p:nvSpPr>
+          <p:cNvPr id="7" name="imgframe"/>
+          <p:cNvSpPr/>
+          <p:nvPr/>
+        </p:nvSpPr>
+        <p:spPr>
+          <a:xfrm>
+            <a:off x="7754112" y="1719072"/>
+            <a:ext cx="4014216" cy="3831336"/>
+          </a:xfrm>
+          <a:prstGeom prst="rect">
+            <a:avLst/>
+          </a:prstGeom>
+          <a:solidFill>
+            <a:srgbClr val="1F2630"/>
+          </a:solidFill>
+          <a:ln w="28575">
             <a:solidFill>
               <a:srgbClr val="48CAE4"/>
             </a:solidFill>
@@ -1712,10 +4300,268 @@
             <a:normAutofit/>
           </a:bodyPr>
           <a:lstStyle/>
+          <a:p/>
+        </p:txBody>
+      </p:sp>
+      <p:sp>
+        <p:nvSpPr>
+          <p:cNvPr id="8" name="placeholder"/>
+          <p:cNvSpPr/>
+          <p:nvPr/>
+        </p:nvSpPr>
+        <p:spPr>
+          <a:xfrm>
+            <a:off x="7818120" y="1783080"/>
+            <a:ext cx="3886200" cy="3703320"/>
+          </a:xfrm>
+          <a:prstGeom prst="rect">
+            <a:avLst/>
+          </a:prstGeom>
+          <a:solidFill>
+            <a:srgbClr val="161B22"/>
+          </a:solidFill>
+        </p:spPr>
+        <p:txBody>
+          <a:bodyPr wrap="square" anchor="ctr">
+            <a:normAutofit/>
+          </a:bodyPr>
+          <a:lstStyle/>
+          <a:p/>
+        </p:txBody>
+      </p:sp>
+      <p:sp>
+        <p:nvSpPr>
+          <p:cNvPr id="9" name="fin0"/>
+          <p:cNvSpPr/>
+          <p:nvPr/>
+        </p:nvSpPr>
+        <p:spPr>
+          <a:xfrm>
+            <a:off x="8901684" y="2560777"/>
+            <a:ext cx="73152" cy="1555394"/>
+          </a:xfrm>
+          <a:prstGeom prst="rect">
+            <a:avLst/>
+          </a:prstGeom>
+          <a:solidFill>
+            <a:srgbClr val="48CAE4"/>
+          </a:solidFill>
+        </p:spPr>
+        <p:txBody>
+          <a:bodyPr wrap="square" anchor="ctr">
+            <a:normAutofit/>
+          </a:bodyPr>
+          <a:lstStyle/>
+          <a:p/>
+        </p:txBody>
+      </p:sp>
+      <p:sp>
+        <p:nvSpPr>
+          <p:cNvPr id="10" name="fin1"/>
+          <p:cNvSpPr/>
+          <p:nvPr/>
+        </p:nvSpPr>
+        <p:spPr>
+          <a:xfrm>
+            <a:off x="9176004" y="2560777"/>
+            <a:ext cx="73152" cy="1555394"/>
+          </a:xfrm>
+          <a:prstGeom prst="rect">
+            <a:avLst/>
+          </a:prstGeom>
+          <a:solidFill>
+            <a:srgbClr val="48CAE4"/>
+          </a:solidFill>
+        </p:spPr>
+        <p:txBody>
+          <a:bodyPr wrap="square" anchor="ctr">
+            <a:normAutofit/>
+          </a:bodyPr>
+          <a:lstStyle/>
+          <a:p/>
+        </p:txBody>
+      </p:sp>
+      <p:sp>
+        <p:nvSpPr>
+          <p:cNvPr id="11" name="fin2"/>
+          <p:cNvSpPr/>
+          <p:nvPr/>
+        </p:nvSpPr>
+        <p:spPr>
+          <a:xfrm>
+            <a:off x="9450324" y="2560777"/>
+            <a:ext cx="73152" cy="1555394"/>
+          </a:xfrm>
+          <a:prstGeom prst="rect">
+            <a:avLst/>
+          </a:prstGeom>
+          <a:solidFill>
+            <a:srgbClr val="48CAE4"/>
+          </a:solidFill>
+        </p:spPr>
+        <p:txBody>
+          <a:bodyPr wrap="square" anchor="ctr">
+            <a:normAutofit/>
+          </a:bodyPr>
+          <a:lstStyle/>
+          <a:p/>
+        </p:txBody>
+      </p:sp>
+      <p:sp>
+        <p:nvSpPr>
+          <p:cNvPr id="12" name="fin3"/>
+          <p:cNvSpPr/>
+          <p:nvPr/>
+        </p:nvSpPr>
+        <p:spPr>
+          <a:xfrm>
+            <a:off x="9724644" y="2560777"/>
+            <a:ext cx="73152" cy="1555394"/>
+          </a:xfrm>
+          <a:prstGeom prst="rect">
+            <a:avLst/>
+          </a:prstGeom>
+          <a:solidFill>
+            <a:srgbClr val="48CAE4"/>
+          </a:solidFill>
+        </p:spPr>
+        <p:txBody>
+          <a:bodyPr wrap="square" anchor="ctr">
+            <a:normAutofit/>
+          </a:bodyPr>
+          <a:lstStyle/>
+          <a:p/>
+        </p:txBody>
+      </p:sp>
+      <p:sp>
+        <p:nvSpPr>
+          <p:cNvPr id="13" name="fin4"/>
+          <p:cNvSpPr/>
+          <p:nvPr/>
+        </p:nvSpPr>
+        <p:spPr>
+          <a:xfrm>
+            <a:off x="9998964" y="2560777"/>
+            <a:ext cx="73152" cy="1555394"/>
+          </a:xfrm>
+          <a:prstGeom prst="rect">
+            <a:avLst/>
+          </a:prstGeom>
+          <a:solidFill>
+            <a:srgbClr val="48CAE4"/>
+          </a:solidFill>
+        </p:spPr>
+        <p:txBody>
+          <a:bodyPr wrap="square" anchor="ctr">
+            <a:normAutofit/>
+          </a:bodyPr>
+          <a:lstStyle/>
+          <a:p/>
+        </p:txBody>
+      </p:sp>
+      <p:sp>
+        <p:nvSpPr>
+          <p:cNvPr id="14" name="fin5"/>
+          <p:cNvSpPr/>
+          <p:nvPr/>
+        </p:nvSpPr>
+        <p:spPr>
+          <a:xfrm>
+            <a:off x="10273284" y="2560777"/>
+            <a:ext cx="73152" cy="1555394"/>
+          </a:xfrm>
+          <a:prstGeom prst="rect">
+            <a:avLst/>
+          </a:prstGeom>
+          <a:solidFill>
+            <a:srgbClr val="48CAE4"/>
+          </a:solidFill>
+        </p:spPr>
+        <p:txBody>
+          <a:bodyPr wrap="square" anchor="ctr">
+            <a:normAutofit/>
+          </a:bodyPr>
+          <a:lstStyle/>
+          <a:p/>
+        </p:txBody>
+      </p:sp>
+      <p:sp>
+        <p:nvSpPr>
+          <p:cNvPr id="15" name="fin6"/>
+          <p:cNvSpPr/>
+          <p:nvPr/>
+        </p:nvSpPr>
+        <p:spPr>
+          <a:xfrm>
+            <a:off x="10547604" y="2560777"/>
+            <a:ext cx="73152" cy="1555394"/>
+          </a:xfrm>
+          <a:prstGeom prst="rect">
+            <a:avLst/>
+          </a:prstGeom>
+          <a:solidFill>
+            <a:srgbClr val="48CAE4"/>
+          </a:solidFill>
+        </p:spPr>
+        <p:txBody>
+          <a:bodyPr wrap="square" anchor="ctr">
+            <a:normAutofit/>
+          </a:bodyPr>
+          <a:lstStyle/>
+          <a:p/>
+        </p:txBody>
+      </p:sp>
+      <p:sp>
+        <p:nvSpPr>
+          <p:cNvPr id="16" name="base"/>
+          <p:cNvSpPr/>
+          <p:nvPr/>
+        </p:nvSpPr>
+        <p:spPr>
+          <a:xfrm>
+            <a:off x="8700516" y="4116171"/>
+            <a:ext cx="2121408" cy="109728"/>
+          </a:xfrm>
+          <a:prstGeom prst="rect">
+            <a:avLst/>
+          </a:prstGeom>
+          <a:solidFill>
+            <a:srgbClr val="48CAE4"/>
+          </a:solidFill>
+        </p:spPr>
+        <p:txBody>
+          <a:bodyPr wrap="square" anchor="ctr">
+            <a:normAutofit/>
+          </a:bodyPr>
+          <a:lstStyle/>
+          <a:p/>
+        </p:txBody>
+      </p:sp>
+      <p:sp>
+        <p:nvSpPr>
+          <p:cNvPr id="17" name="imglabel"/>
+          <p:cNvSpPr txBox="1"/>
+          <p:nvPr/>
+        </p:nvSpPr>
+        <p:spPr>
+          <a:xfrm>
+            <a:off x="7818120" y="4983480"/>
+            <a:ext cx="3886200" cy="457200"/>
+          </a:xfrm>
+          <a:prstGeom prst="rect">
+            <a:avLst/>
+          </a:prstGeom>
+          <a:noFill/>
+        </p:spPr>
+        <p:txBody>
+          <a:bodyPr wrap="square" lIns="45720" rIns="45720" anchor="ctr">
+            <a:normAutofit/>
+          </a:bodyPr>
+          <a:lstStyle/>
           <a:p>
             <a:pPr algn="ctr">
               <a:spcAft>
-                <a:spcPts val="400"/>
+                <a:spcPts val="0"/>
               </a:spcAft>
             </a:pPr>
             <a:r>
@@ -1734,14 +4580,14 @@
       </p:sp>
       <p:sp>
         <p:nvSpPr>
-          <p:cNvPr id="5" name="title"/>
+          <p:cNvPr id="18" name="body"/>
           <p:cNvSpPr txBox="1"/>
           <p:nvPr/>
         </p:nvSpPr>
         <p:spPr>
           <a:xfrm>
-            <a:off x="457200" y="457200"/>
-            <a:ext cx="7132320" cy="1463040"/>
+            <a:off x="548640" y="1783080"/>
+            <a:ext cx="6858000" cy="4023360"/>
           </a:xfrm>
           <a:prstGeom prst="rect">
             <a:avLst/>
@@ -1749,40 +4595,200 @@
           <a:noFill/>
         </p:spPr>
         <p:txBody>
-          <a:bodyPr wrap="square" anchor="t">
+          <a:bodyPr wrap="square" lIns="45720" rIns="45720" anchor="t">
+            <a:normAutofit/>
+          </a:bodyPr>
+          <a:lstStyle/>
+          <a:p>
+            <a:pPr algn="l">
+              <a:lnSpc>
+                <a:spcPct val="108"/>
+              </a:lnSpc>
+              <a:spcAft>
+                <a:spcPts val="600"/>
+              </a:spcAft>
+            </a:pPr>
+            <a:r>
+              <a:rPr lang="uz-UZ" sz="1800" dirty="0">
+                <a:solidFill>
+                  <a:srgbClr val="F0F6FC"/>
+                </a:solidFill>
+                <a:latin typeface="Times New Roman"/>
+                <a:cs typeface="Times New Roman"/>
+                <a:ea typeface="Times New Roman"/>
+              </a:rPr>
+              <a:t>Termopasta orqali o'tgan issiqlik mis yoki alyuminiydan yasalgan radiatorga yetib boradi.</a:t>
+            </a:r>
+          </a:p>
+          <a:p>
+            <a:pPr algn="l">
+              <a:lnSpc>
+                <a:spcPct val="108"/>
+              </a:lnSpc>
+              <a:spcAft>
+                <a:spcPts val="600"/>
+              </a:spcAft>
+            </a:pPr>
+            <a:r>
+              <a:rPr lang="uz-UZ" sz="1800" b="1" dirty="0">
+                <a:solidFill>
+                  <a:srgbClr val="48CAE4"/>
+                </a:solidFill>
+                <a:latin typeface="Times New Roman"/>
+                <a:cs typeface="Times New Roman"/>
+                <a:ea typeface="Times New Roman"/>
+              </a:rPr>
+              <a:t>▪  </a:t>
+            </a:r>
+            <a:r>
+              <a:rPr lang="uz-UZ" sz="1800" dirty="0">
+                <a:solidFill>
+                  <a:srgbClr val="F0F6FC"/>
+                </a:solidFill>
+                <a:latin typeface="Times New Roman"/>
+                <a:cs typeface="Times New Roman"/>
+                <a:ea typeface="Times New Roman"/>
+              </a:rPr>
+              <a:t>Yuzani kattalashtirish fizikasi: Radiator nima uchun ko'plab yupqa qanotchalardan (plastinalardan) iborat? Termodinamika qonunlariga ko'ra, jismning yuzasi qanchalik katta bo'lsa, u atrof-muhitga issiqlikni shunchalik tez tarqatadi.</a:t>
+            </a:r>
+          </a:p>
+          <a:p>
+            <a:pPr algn="l">
+              <a:lnSpc>
+                <a:spcPct val="108"/>
+              </a:lnSpc>
+              <a:spcAft>
+                <a:spcPts val="600"/>
+              </a:spcAft>
+            </a:pPr>
+            <a:r>
+              <a:rPr lang="uz-UZ" sz="1800" b="1" dirty="0">
+                <a:solidFill>
+                  <a:srgbClr val="48CAE4"/>
+                </a:solidFill>
+                <a:latin typeface="Times New Roman"/>
+                <a:cs typeface="Times New Roman"/>
+                <a:ea typeface="Times New Roman"/>
+              </a:rPr>
+              <a:t>▪  </a:t>
+            </a:r>
+            <a:r>
+              <a:rPr lang="uz-UZ" sz="1800" dirty="0">
+                <a:solidFill>
+                  <a:srgbClr val="F0F6FC"/>
+                </a:solidFill>
+                <a:latin typeface="Times New Roman"/>
+                <a:cs typeface="Times New Roman"/>
+                <a:ea typeface="Times New Roman"/>
+              </a:rPr>
+              <a:t>Mis va Alyuminiy: Mis issiqlikni tez qabul qiladi, alyuminiy esa uni havoga tez tarqatadi. Ko'p radiatorlar shu ikki metallning gibrididan yasaladi.</a:t>
+            </a:r>
+          </a:p>
+        </p:txBody>
+      </p:sp>
+      <p:sp>
+        <p:nvSpPr>
+          <p:cNvPr id="19" name="footerband"/>
+          <p:cNvSpPr/>
+          <p:nvPr/>
+        </p:nvSpPr>
+        <p:spPr>
+          <a:xfrm>
+            <a:off x="0" y="6473952"/>
+            <a:ext cx="12192000" cy="384048"/>
+          </a:xfrm>
+          <a:prstGeom prst="rect">
+            <a:avLst/>
+          </a:prstGeom>
+          <a:solidFill>
+            <a:srgbClr val="11202E"/>
+          </a:solidFill>
+        </p:spPr>
+        <p:txBody>
+          <a:bodyPr wrap="square" anchor="ctr">
+            <a:normAutofit/>
+          </a:bodyPr>
+          <a:lstStyle/>
+          <a:p/>
+        </p:txBody>
+      </p:sp>
+      <p:sp>
+        <p:nvSpPr>
+          <p:cNvPr id="20" name="footeraccent"/>
+          <p:cNvSpPr/>
+          <p:nvPr/>
+        </p:nvSpPr>
+        <p:spPr>
+          <a:xfrm>
+            <a:off x="0" y="6473952"/>
+            <a:ext cx="12192000" cy="27432"/>
+          </a:xfrm>
+          <a:prstGeom prst="rect">
+            <a:avLst/>
+          </a:prstGeom>
+          <a:solidFill>
+            <a:srgbClr val="48CAE4"/>
+          </a:solidFill>
+        </p:spPr>
+        <p:txBody>
+          <a:bodyPr wrap="square" anchor="ctr">
+            <a:normAutofit/>
+          </a:bodyPr>
+          <a:lstStyle/>
+          <a:p/>
+        </p:txBody>
+      </p:sp>
+      <p:sp>
+        <p:nvSpPr>
+          <p:cNvPr id="21" name="footerlabel"/>
+          <p:cNvSpPr txBox="1"/>
+          <p:nvPr/>
+        </p:nvSpPr>
+        <p:spPr>
+          <a:xfrm>
+            <a:off x="548640" y="6473952"/>
+            <a:ext cx="8229600" cy="384048"/>
+          </a:xfrm>
+          <a:prstGeom prst="rect">
+            <a:avLst/>
+          </a:prstGeom>
+          <a:noFill/>
+        </p:spPr>
+        <p:txBody>
+          <a:bodyPr wrap="square" lIns="45720" rIns="45720" anchor="ctr">
             <a:normAutofit/>
           </a:bodyPr>
           <a:lstStyle/>
           <a:p>
             <a:pPr algn="l">
               <a:spcAft>
-                <a:spcPts val="400"/>
+                <a:spcPts val="0"/>
               </a:spcAft>
             </a:pPr>
             <a:r>
-              <a:rPr lang="uz-UZ" sz="4000" b="1" dirty="0">
-                <a:solidFill>
-                  <a:srgbClr val="48CAE4"/>
-                </a:solidFill>
-                <a:latin typeface="Times New Roman"/>
-                <a:cs typeface="Times New Roman"/>
-                <a:ea typeface="Times New Roman"/>
-              </a:rPr>
-              <a:t>Radiator (Heatsink) fizikasi</a:t>
+              <a:rPr lang="uz-UZ" sz="1200" dirty="0">
+                <a:solidFill>
+                  <a:srgbClr val="9FB3C8"/>
+                </a:solidFill>
+                <a:latin typeface="Times New Roman"/>
+                <a:cs typeface="Times New Roman"/>
+                <a:ea typeface="Times New Roman"/>
+              </a:rPr>
+              <a:t>Kompyuter qizishi va sovutish fizikasi</a:t>
             </a:r>
           </a:p>
         </p:txBody>
       </p:sp>
       <p:sp>
         <p:nvSpPr>
-          <p:cNvPr id="6" name="body"/>
+          <p:cNvPr id="22" name="footernum"/>
           <p:cNvSpPr txBox="1"/>
           <p:nvPr/>
         </p:nvSpPr>
         <p:spPr>
           <a:xfrm>
-            <a:off x="457200" y="2103120"/>
-            <a:ext cx="7132320" cy="4297680"/>
+            <a:off x="10332720" y="6473952"/>
+            <a:ext cx="1371600" cy="384048"/>
           </a:xfrm>
           <a:prstGeom prst="rect">
             <a:avLst/>
@@ -1790,62 +4796,26 @@
           <a:noFill/>
         </p:spPr>
         <p:txBody>
-          <a:bodyPr wrap="square" anchor="t">
+          <a:bodyPr wrap="square" lIns="45720" rIns="45720" anchor="ctr">
             <a:normAutofit/>
           </a:bodyPr>
           <a:lstStyle/>
           <a:p>
-            <a:pPr algn="l">
+            <a:pPr algn="r">
               <a:spcAft>
-                <a:spcPts val="400"/>
+                <a:spcPts val="0"/>
               </a:spcAft>
             </a:pPr>
             <a:r>
-              <a:rPr lang="uz-UZ" sz="1800" dirty="0">
-                <a:solidFill>
-                  <a:srgbClr val="F0F6FC"/>
-                </a:solidFill>
-                <a:latin typeface="Times New Roman"/>
-                <a:cs typeface="Times New Roman"/>
-                <a:ea typeface="Times New Roman"/>
-              </a:rPr>
-              <a:t>Termopasta orqali o'tgan issiqlik mis yoki alyuminiydan yasalgan radiatorga yetib boradi.</a:t>
-            </a:r>
-          </a:p>
-          <a:p>
-            <a:pPr algn="l">
-              <a:spcAft>
-                <a:spcPts val="400"/>
-              </a:spcAft>
-            </a:pPr>
-            <a:r>
-              <a:rPr lang="uz-UZ" sz="1800" dirty="0">
-                <a:solidFill>
-                  <a:srgbClr val="F0F6FC"/>
-                </a:solidFill>
-                <a:latin typeface="Times New Roman"/>
-                <a:cs typeface="Times New Roman"/>
-                <a:ea typeface="Times New Roman"/>
-              </a:rPr>
-              <a:t>- Yuzani kattalashtirish fizikasi: Radiator nima uchun ko'plab yupqa qanotchalardan (plastinalardan) iborat? Termodinamika qonunlariga ko'ra, jismning yuzasi qanchalik katta bo'lsa, u atrof-muhitga issiqlikni shunchalik tez tarqatadi.</a:t>
-            </a:r>
-          </a:p>
-          <a:p>
-            <a:pPr algn="l">
-              <a:spcAft>
-                <a:spcPts val="400"/>
-              </a:spcAft>
-            </a:pPr>
-            <a:r>
-              <a:rPr lang="uz-UZ" sz="1800" dirty="0">
-                <a:solidFill>
-                  <a:srgbClr val="F0F6FC"/>
-                </a:solidFill>
-                <a:latin typeface="Times New Roman"/>
-                <a:cs typeface="Times New Roman"/>
-                <a:ea typeface="Times New Roman"/>
-              </a:rPr>
-              <a:t>- Mis va Alyuminiy: Mis issiqlikni tez qabul qiladi, alyuminiy esa uni havoga tez tarqatadi. Ko'p radiatorlar shu ikki metallning gibrididan yasaladi.</a:t>
+              <a:rPr lang="uz-UZ" sz="1200" b="1" dirty="0">
+                <a:solidFill>
+                  <a:srgbClr val="48CAE4"/>
+                </a:solidFill>
+                <a:latin typeface="Times New Roman"/>
+                <a:cs typeface="Times New Roman"/>
+                <a:ea typeface="Times New Roman"/>
+              </a:rPr>
+              <a:t>6 / 10</a:t>
             </a:r>
           </a:p>
         </p:txBody>
@@ -1910,7 +4880,7 @@
         <p:spPr>
           <a:xfrm>
             <a:off x="0" y="0"/>
-            <a:ext cx="164592" cy="6858000"/>
+            <a:ext cx="128016" cy="6858000"/>
           </a:xfrm>
           <a:prstGeom prst="rect">
             <a:avLst/>
@@ -1929,22 +4899,115 @@
       </p:sp>
       <p:sp>
         <p:nvSpPr>
-          <p:cNvPr id="4" name="placeholder"/>
-          <p:cNvSpPr/>
-          <p:nvPr/>
-        </p:nvSpPr>
-        <p:spPr>
-          <a:xfrm>
-            <a:off x="7863840" y="914400"/>
-            <a:ext cx="3840480" cy="4846320"/>
-          </a:xfrm>
-          <a:prstGeom prst="rect">
-            <a:avLst/>
-          </a:prstGeom>
-          <a:solidFill>
-            <a:srgbClr val="161B22"/>
-          </a:solidFill>
-          <a:ln w="25400">
+          <p:cNvPr id="4" name="headerband"/>
+          <p:cNvSpPr/>
+          <p:nvPr/>
+        </p:nvSpPr>
+        <p:spPr>
+          <a:xfrm>
+            <a:off x="128016" y="0"/>
+            <a:ext cx="12063984" cy="1417320"/>
+          </a:xfrm>
+          <a:prstGeom prst="rect">
+            <a:avLst/>
+          </a:prstGeom>
+          <a:solidFill>
+            <a:srgbClr val="11202E"/>
+          </a:solidFill>
+        </p:spPr>
+        <p:txBody>
+          <a:bodyPr wrap="square" anchor="ctr">
+            <a:normAutofit/>
+          </a:bodyPr>
+          <a:lstStyle/>
+          <a:p/>
+        </p:txBody>
+      </p:sp>
+      <p:sp>
+        <p:nvSpPr>
+          <p:cNvPr id="5" name="titleline"/>
+          <p:cNvSpPr/>
+          <p:nvPr/>
+        </p:nvSpPr>
+        <p:spPr>
+          <a:xfrm>
+            <a:off x="548640" y="1170432"/>
+            <a:ext cx="4754880" cy="41148"/>
+          </a:xfrm>
+          <a:prstGeom prst="rect">
+            <a:avLst/>
+          </a:prstGeom>
+          <a:solidFill>
+            <a:srgbClr val="00B4D8"/>
+          </a:solidFill>
+        </p:spPr>
+        <p:txBody>
+          <a:bodyPr wrap="square" anchor="ctr">
+            <a:normAutofit/>
+          </a:bodyPr>
+          <a:lstStyle/>
+          <a:p/>
+        </p:txBody>
+      </p:sp>
+      <p:sp>
+        <p:nvSpPr>
+          <p:cNvPr id="6" name="title"/>
+          <p:cNvSpPr txBox="1"/>
+          <p:nvPr/>
+        </p:nvSpPr>
+        <p:spPr>
+          <a:xfrm>
+            <a:off x="548640" y="274320"/>
+            <a:ext cx="10607040" cy="914400"/>
+          </a:xfrm>
+          <a:prstGeom prst="rect">
+            <a:avLst/>
+          </a:prstGeom>
+          <a:noFill/>
+        </p:spPr>
+        <p:txBody>
+          <a:bodyPr wrap="square" lIns="45720" rIns="45720" anchor="ctr">
+            <a:normAutofit/>
+          </a:bodyPr>
+          <a:lstStyle/>
+          <a:p>
+            <a:pPr algn="l">
+              <a:spcAft>
+                <a:spcPts val="0"/>
+              </a:spcAft>
+            </a:pPr>
+            <a:r>
+              <a:rPr lang="uz-UZ" sz="3200" b="1" dirty="0">
+                <a:solidFill>
+                  <a:srgbClr val="00B4D8"/>
+                </a:solidFill>
+                <a:latin typeface="Times New Roman"/>
+                <a:cs typeface="Times New Roman"/>
+                <a:ea typeface="Times New Roman"/>
+              </a:rPr>
+              <a:t>3. Konveksiya: Kuler (Ventilyator) qanday soviydi?</a:t>
+            </a:r>
+          </a:p>
+        </p:txBody>
+      </p:sp>
+      <p:sp>
+        <p:nvSpPr>
+          <p:cNvPr id="7" name="imgframe"/>
+          <p:cNvSpPr/>
+          <p:nvPr/>
+        </p:nvSpPr>
+        <p:spPr>
+          <a:xfrm>
+            <a:off x="7754112" y="1719072"/>
+            <a:ext cx="4014216" cy="3831336"/>
+          </a:xfrm>
+          <a:prstGeom prst="rect">
+            <a:avLst/>
+          </a:prstGeom>
+          <a:solidFill>
+            <a:srgbClr val="1F2630"/>
+          </a:solidFill>
+          <a:ln w="28575">
             <a:solidFill>
               <a:srgbClr val="00B4D8"/>
             </a:solidFill>
@@ -1955,10 +5018,268 @@
             <a:normAutofit/>
           </a:bodyPr>
           <a:lstStyle/>
+          <a:p/>
+        </p:txBody>
+      </p:sp>
+      <p:sp>
+        <p:nvSpPr>
+          <p:cNvPr id="8" name="placeholder"/>
+          <p:cNvSpPr/>
+          <p:nvPr/>
+        </p:nvSpPr>
+        <p:spPr>
+          <a:xfrm>
+            <a:off x="7818120" y="1783080"/>
+            <a:ext cx="3886200" cy="3703320"/>
+          </a:xfrm>
+          <a:prstGeom prst="rect">
+            <a:avLst/>
+          </a:prstGeom>
+          <a:solidFill>
+            <a:srgbClr val="161B22"/>
+          </a:solidFill>
+        </p:spPr>
+        <p:txBody>
+          <a:bodyPr wrap="square" anchor="ctr">
+            <a:normAutofit/>
+          </a:bodyPr>
+          <a:lstStyle/>
+          <a:p/>
+        </p:txBody>
+      </p:sp>
+      <p:sp>
+        <p:nvSpPr>
+          <p:cNvPr id="9" name="fin0"/>
+          <p:cNvSpPr/>
+          <p:nvPr/>
+        </p:nvSpPr>
+        <p:spPr>
+          <a:xfrm>
+            <a:off x="8901684" y="2560777"/>
+            <a:ext cx="73152" cy="1555394"/>
+          </a:xfrm>
+          <a:prstGeom prst="rect">
+            <a:avLst/>
+          </a:prstGeom>
+          <a:solidFill>
+            <a:srgbClr val="00B4D8"/>
+          </a:solidFill>
+        </p:spPr>
+        <p:txBody>
+          <a:bodyPr wrap="square" anchor="ctr">
+            <a:normAutofit/>
+          </a:bodyPr>
+          <a:lstStyle/>
+          <a:p/>
+        </p:txBody>
+      </p:sp>
+      <p:sp>
+        <p:nvSpPr>
+          <p:cNvPr id="10" name="fin1"/>
+          <p:cNvSpPr/>
+          <p:nvPr/>
+        </p:nvSpPr>
+        <p:spPr>
+          <a:xfrm>
+            <a:off x="9176004" y="2560777"/>
+            <a:ext cx="73152" cy="1555394"/>
+          </a:xfrm>
+          <a:prstGeom prst="rect">
+            <a:avLst/>
+          </a:prstGeom>
+          <a:solidFill>
+            <a:srgbClr val="00B4D8"/>
+          </a:solidFill>
+        </p:spPr>
+        <p:txBody>
+          <a:bodyPr wrap="square" anchor="ctr">
+            <a:normAutofit/>
+          </a:bodyPr>
+          <a:lstStyle/>
+          <a:p/>
+        </p:txBody>
+      </p:sp>
+      <p:sp>
+        <p:nvSpPr>
+          <p:cNvPr id="11" name="fin2"/>
+          <p:cNvSpPr/>
+          <p:nvPr/>
+        </p:nvSpPr>
+        <p:spPr>
+          <a:xfrm>
+            <a:off x="9450324" y="2560777"/>
+            <a:ext cx="73152" cy="1555394"/>
+          </a:xfrm>
+          <a:prstGeom prst="rect">
+            <a:avLst/>
+          </a:prstGeom>
+          <a:solidFill>
+            <a:srgbClr val="00B4D8"/>
+          </a:solidFill>
+        </p:spPr>
+        <p:txBody>
+          <a:bodyPr wrap="square" anchor="ctr">
+            <a:normAutofit/>
+          </a:bodyPr>
+          <a:lstStyle/>
+          <a:p/>
+        </p:txBody>
+      </p:sp>
+      <p:sp>
+        <p:nvSpPr>
+          <p:cNvPr id="12" name="fin3"/>
+          <p:cNvSpPr/>
+          <p:nvPr/>
+        </p:nvSpPr>
+        <p:spPr>
+          <a:xfrm>
+            <a:off x="9724644" y="2560777"/>
+            <a:ext cx="73152" cy="1555394"/>
+          </a:xfrm>
+          <a:prstGeom prst="rect">
+            <a:avLst/>
+          </a:prstGeom>
+          <a:solidFill>
+            <a:srgbClr val="00B4D8"/>
+          </a:solidFill>
+        </p:spPr>
+        <p:txBody>
+          <a:bodyPr wrap="square" anchor="ctr">
+            <a:normAutofit/>
+          </a:bodyPr>
+          <a:lstStyle/>
+          <a:p/>
+        </p:txBody>
+      </p:sp>
+      <p:sp>
+        <p:nvSpPr>
+          <p:cNvPr id="13" name="fin4"/>
+          <p:cNvSpPr/>
+          <p:nvPr/>
+        </p:nvSpPr>
+        <p:spPr>
+          <a:xfrm>
+            <a:off x="9998964" y="2560777"/>
+            <a:ext cx="73152" cy="1555394"/>
+          </a:xfrm>
+          <a:prstGeom prst="rect">
+            <a:avLst/>
+          </a:prstGeom>
+          <a:solidFill>
+            <a:srgbClr val="00B4D8"/>
+          </a:solidFill>
+        </p:spPr>
+        <p:txBody>
+          <a:bodyPr wrap="square" anchor="ctr">
+            <a:normAutofit/>
+          </a:bodyPr>
+          <a:lstStyle/>
+          <a:p/>
+        </p:txBody>
+      </p:sp>
+      <p:sp>
+        <p:nvSpPr>
+          <p:cNvPr id="14" name="fin5"/>
+          <p:cNvSpPr/>
+          <p:nvPr/>
+        </p:nvSpPr>
+        <p:spPr>
+          <a:xfrm>
+            <a:off x="10273284" y="2560777"/>
+            <a:ext cx="73152" cy="1555394"/>
+          </a:xfrm>
+          <a:prstGeom prst="rect">
+            <a:avLst/>
+          </a:prstGeom>
+          <a:solidFill>
+            <a:srgbClr val="00B4D8"/>
+          </a:solidFill>
+        </p:spPr>
+        <p:txBody>
+          <a:bodyPr wrap="square" anchor="ctr">
+            <a:normAutofit/>
+          </a:bodyPr>
+          <a:lstStyle/>
+          <a:p/>
+        </p:txBody>
+      </p:sp>
+      <p:sp>
+        <p:nvSpPr>
+          <p:cNvPr id="15" name="fin6"/>
+          <p:cNvSpPr/>
+          <p:nvPr/>
+        </p:nvSpPr>
+        <p:spPr>
+          <a:xfrm>
+            <a:off x="10547604" y="2560777"/>
+            <a:ext cx="73152" cy="1555394"/>
+          </a:xfrm>
+          <a:prstGeom prst="rect">
+            <a:avLst/>
+          </a:prstGeom>
+          <a:solidFill>
+            <a:srgbClr val="00B4D8"/>
+          </a:solidFill>
+        </p:spPr>
+        <p:txBody>
+          <a:bodyPr wrap="square" anchor="ctr">
+            <a:normAutofit/>
+          </a:bodyPr>
+          <a:lstStyle/>
+          <a:p/>
+        </p:txBody>
+      </p:sp>
+      <p:sp>
+        <p:nvSpPr>
+          <p:cNvPr id="16" name="base"/>
+          <p:cNvSpPr/>
+          <p:nvPr/>
+        </p:nvSpPr>
+        <p:spPr>
+          <a:xfrm>
+            <a:off x="8700516" y="4116171"/>
+            <a:ext cx="2121408" cy="109728"/>
+          </a:xfrm>
+          <a:prstGeom prst="rect">
+            <a:avLst/>
+          </a:prstGeom>
+          <a:solidFill>
+            <a:srgbClr val="00B4D8"/>
+          </a:solidFill>
+        </p:spPr>
+        <p:txBody>
+          <a:bodyPr wrap="square" anchor="ctr">
+            <a:normAutofit/>
+          </a:bodyPr>
+          <a:lstStyle/>
+          <a:p/>
+        </p:txBody>
+      </p:sp>
+      <p:sp>
+        <p:nvSpPr>
+          <p:cNvPr id="17" name="imglabel"/>
+          <p:cNvSpPr txBox="1"/>
+          <p:nvPr/>
+        </p:nvSpPr>
+        <p:spPr>
+          <a:xfrm>
+            <a:off x="7818120" y="4983480"/>
+            <a:ext cx="3886200" cy="457200"/>
+          </a:xfrm>
+          <a:prstGeom prst="rect">
+            <a:avLst/>
+          </a:prstGeom>
+          <a:noFill/>
+        </p:spPr>
+        <p:txBody>
+          <a:bodyPr wrap="square" lIns="45720" rIns="45720" anchor="ctr">
+            <a:normAutofit/>
+          </a:bodyPr>
+          <a:lstStyle/>
           <a:p>
             <a:pPr algn="ctr">
               <a:spcAft>
-                <a:spcPts val="400"/>
+                <a:spcPts val="0"/>
               </a:spcAft>
             </a:pPr>
             <a:r>
@@ -1977,14 +5298,14 @@
       </p:sp>
       <p:sp>
         <p:nvSpPr>
-          <p:cNvPr id="5" name="title"/>
+          <p:cNvPr id="18" name="body"/>
           <p:cNvSpPr txBox="1"/>
           <p:nvPr/>
         </p:nvSpPr>
         <p:spPr>
           <a:xfrm>
-            <a:off x="457200" y="457200"/>
-            <a:ext cx="7132320" cy="1463040"/>
+            <a:off x="548640" y="1783080"/>
+            <a:ext cx="6858000" cy="4023360"/>
           </a:xfrm>
           <a:prstGeom prst="rect">
             <a:avLst/>
@@ -1992,40 +5313,200 @@
           <a:noFill/>
         </p:spPr>
         <p:txBody>
-          <a:bodyPr wrap="square" anchor="t">
+          <a:bodyPr wrap="square" lIns="45720" rIns="45720" anchor="t">
+            <a:normAutofit/>
+          </a:bodyPr>
+          <a:lstStyle/>
+          <a:p>
+            <a:pPr algn="l">
+              <a:lnSpc>
+                <a:spcPct val="108"/>
+              </a:lnSpc>
+              <a:spcAft>
+                <a:spcPts val="600"/>
+              </a:spcAft>
+            </a:pPr>
+            <a:r>
+              <a:rPr lang="uz-UZ" sz="1800" dirty="0">
+                <a:solidFill>
+                  <a:srgbClr val="F0F6FC"/>
+                </a:solidFill>
+                <a:latin typeface="Times New Roman"/>
+                <a:cs typeface="Times New Roman"/>
+                <a:ea typeface="Times New Roman"/>
+              </a:rPr>
+              <a:t>Radiator o'ziga issiqlikni olgach, uning atrofidagi havo qiziydi. Agar bu havo yangilanmasa, sovutish to'xtaydi.</a:t>
+            </a:r>
+          </a:p>
+          <a:p>
+            <a:pPr algn="l">
+              <a:lnSpc>
+                <a:spcPct val="108"/>
+              </a:lnSpc>
+              <a:spcAft>
+                <a:spcPts val="600"/>
+              </a:spcAft>
+            </a:pPr>
+            <a:r>
+              <a:rPr lang="uz-UZ" sz="1800" b="1" dirty="0">
+                <a:solidFill>
+                  <a:srgbClr val="00B4D8"/>
+                </a:solidFill>
+                <a:latin typeface="Times New Roman"/>
+                <a:cs typeface="Times New Roman"/>
+                <a:ea typeface="Times New Roman"/>
+              </a:rPr>
+              <a:t>▪  </a:t>
+            </a:r>
+            <a:r>
+              <a:rPr lang="uz-UZ" sz="1800" dirty="0">
+                <a:solidFill>
+                  <a:srgbClr val="F0F6FC"/>
+                </a:solidFill>
+                <a:latin typeface="Times New Roman"/>
+                <a:cs typeface="Times New Roman"/>
+                <a:ea typeface="Times New Roman"/>
+              </a:rPr>
+              <a:t>Faol sovutish (Active Cooling): Kuler (ventilyator) radiator qanotchalari orasiga sovuq havoni kuch bilan purkaydi.</a:t>
+            </a:r>
+          </a:p>
+          <a:p>
+            <a:pPr algn="l">
+              <a:lnSpc>
+                <a:spcPct val="108"/>
+              </a:lnSpc>
+              <a:spcAft>
+                <a:spcPts val="600"/>
+              </a:spcAft>
+            </a:pPr>
+            <a:r>
+              <a:rPr lang="uz-UZ" sz="1800" b="1" dirty="0">
+                <a:solidFill>
+                  <a:srgbClr val="00B4D8"/>
+                </a:solidFill>
+                <a:latin typeface="Times New Roman"/>
+                <a:cs typeface="Times New Roman"/>
+                <a:ea typeface="Times New Roman"/>
+              </a:rPr>
+              <a:t>▪  </a:t>
+            </a:r>
+            <a:r>
+              <a:rPr lang="uz-UZ" sz="1800" dirty="0">
+                <a:solidFill>
+                  <a:srgbClr val="F0F6FC"/>
+                </a:solidFill>
+                <a:latin typeface="Times New Roman"/>
+                <a:cs typeface="Times New Roman"/>
+                <a:ea typeface="Times New Roman"/>
+              </a:rPr>
+              <a:t>Majburiy konveksiya: Fizikadagi konveksiya hodisasi tufayli sovuq havo molekulalari radiatordagi issiqlikni o'ziga olib, korpusdan tashqariga uchib chiqib ketadi.</a:t>
+            </a:r>
+          </a:p>
+        </p:txBody>
+      </p:sp>
+      <p:sp>
+        <p:nvSpPr>
+          <p:cNvPr id="19" name="footerband"/>
+          <p:cNvSpPr/>
+          <p:nvPr/>
+        </p:nvSpPr>
+        <p:spPr>
+          <a:xfrm>
+            <a:off x="0" y="6473952"/>
+            <a:ext cx="12192000" cy="384048"/>
+          </a:xfrm>
+          <a:prstGeom prst="rect">
+            <a:avLst/>
+          </a:prstGeom>
+          <a:solidFill>
+            <a:srgbClr val="11202E"/>
+          </a:solidFill>
+        </p:spPr>
+        <p:txBody>
+          <a:bodyPr wrap="square" anchor="ctr">
+            <a:normAutofit/>
+          </a:bodyPr>
+          <a:lstStyle/>
+          <a:p/>
+        </p:txBody>
+      </p:sp>
+      <p:sp>
+        <p:nvSpPr>
+          <p:cNvPr id="20" name="footeraccent"/>
+          <p:cNvSpPr/>
+          <p:nvPr/>
+        </p:nvSpPr>
+        <p:spPr>
+          <a:xfrm>
+            <a:off x="0" y="6473952"/>
+            <a:ext cx="12192000" cy="27432"/>
+          </a:xfrm>
+          <a:prstGeom prst="rect">
+            <a:avLst/>
+          </a:prstGeom>
+          <a:solidFill>
+            <a:srgbClr val="00B4D8"/>
+          </a:solidFill>
+        </p:spPr>
+        <p:txBody>
+          <a:bodyPr wrap="square" anchor="ctr">
+            <a:normAutofit/>
+          </a:bodyPr>
+          <a:lstStyle/>
+          <a:p/>
+        </p:txBody>
+      </p:sp>
+      <p:sp>
+        <p:nvSpPr>
+          <p:cNvPr id="21" name="footerlabel"/>
+          <p:cNvSpPr txBox="1"/>
+          <p:nvPr/>
+        </p:nvSpPr>
+        <p:spPr>
+          <a:xfrm>
+            <a:off x="548640" y="6473952"/>
+            <a:ext cx="8229600" cy="384048"/>
+          </a:xfrm>
+          <a:prstGeom prst="rect">
+            <a:avLst/>
+          </a:prstGeom>
+          <a:noFill/>
+        </p:spPr>
+        <p:txBody>
+          <a:bodyPr wrap="square" lIns="45720" rIns="45720" anchor="ctr">
             <a:normAutofit/>
           </a:bodyPr>
           <a:lstStyle/>
           <a:p>
             <a:pPr algn="l">
               <a:spcAft>
-                <a:spcPts val="400"/>
+                <a:spcPts val="0"/>
               </a:spcAft>
             </a:pPr>
             <a:r>
-              <a:rPr lang="uz-UZ" sz="4000" b="1" dirty="0">
-                <a:solidFill>
-                  <a:srgbClr val="00B4D8"/>
-                </a:solidFill>
-                <a:latin typeface="Times New Roman"/>
-                <a:cs typeface="Times New Roman"/>
-                <a:ea typeface="Times New Roman"/>
-              </a:rPr>
-              <a:t>3. Konveksiya: Kuler (Ventilyator) qanday soviydi?</a:t>
+              <a:rPr lang="uz-UZ" sz="1200" dirty="0">
+                <a:solidFill>
+                  <a:srgbClr val="9FB3C8"/>
+                </a:solidFill>
+                <a:latin typeface="Times New Roman"/>
+                <a:cs typeface="Times New Roman"/>
+                <a:ea typeface="Times New Roman"/>
+              </a:rPr>
+              <a:t>Kompyuter qizishi va sovutish fizikasi</a:t>
             </a:r>
           </a:p>
         </p:txBody>
       </p:sp>
       <p:sp>
         <p:nvSpPr>
-          <p:cNvPr id="6" name="body"/>
+          <p:cNvPr id="22" name="footernum"/>
           <p:cNvSpPr txBox="1"/>
           <p:nvPr/>
         </p:nvSpPr>
         <p:spPr>
           <a:xfrm>
-            <a:off x="457200" y="2103120"/>
-            <a:ext cx="7132320" cy="4297680"/>
+            <a:off x="10332720" y="6473952"/>
+            <a:ext cx="1371600" cy="384048"/>
           </a:xfrm>
           <a:prstGeom prst="rect">
             <a:avLst/>
@@ -2033,62 +5514,26 @@
           <a:noFill/>
         </p:spPr>
         <p:txBody>
-          <a:bodyPr wrap="square" anchor="t">
+          <a:bodyPr wrap="square" lIns="45720" rIns="45720" anchor="ctr">
             <a:normAutofit/>
           </a:bodyPr>
           <a:lstStyle/>
           <a:p>
-            <a:pPr algn="l">
+            <a:pPr algn="r">
               <a:spcAft>
-                <a:spcPts val="400"/>
+                <a:spcPts val="0"/>
               </a:spcAft>
             </a:pPr>
             <a:r>
-              <a:rPr lang="uz-UZ" sz="1800" dirty="0">
-                <a:solidFill>
-                  <a:srgbClr val="F0F6FC"/>
-                </a:solidFill>
-                <a:latin typeface="Times New Roman"/>
-                <a:cs typeface="Times New Roman"/>
-                <a:ea typeface="Times New Roman"/>
-              </a:rPr>
-              <a:t>Radiator o'ziga issiqlikni olgach, uning atrofidagi havo qiziydi. Agar bu havo yangilanmasa, sovutish to'xtaydi.</a:t>
-            </a:r>
-          </a:p>
-          <a:p>
-            <a:pPr algn="l">
-              <a:spcAft>
-                <a:spcPts val="400"/>
-              </a:spcAft>
-            </a:pPr>
-            <a:r>
-              <a:rPr lang="uz-UZ" sz="1800" dirty="0">
-                <a:solidFill>
-                  <a:srgbClr val="F0F6FC"/>
-                </a:solidFill>
-                <a:latin typeface="Times New Roman"/>
-                <a:cs typeface="Times New Roman"/>
-                <a:ea typeface="Times New Roman"/>
-              </a:rPr>
-              <a:t>- Faol sovutish (Active Cooling): Kuler (ventilyator) radiator qanotchalari orasiga sovuq havoni kuch bilan purkaydi.</a:t>
-            </a:r>
-          </a:p>
-          <a:p>
-            <a:pPr algn="l">
-              <a:spcAft>
-                <a:spcPts val="400"/>
-              </a:spcAft>
-            </a:pPr>
-            <a:r>
-              <a:rPr lang="uz-UZ" sz="1800" dirty="0">
-                <a:solidFill>
-                  <a:srgbClr val="F0F6FC"/>
-                </a:solidFill>
-                <a:latin typeface="Times New Roman"/>
-                <a:cs typeface="Times New Roman"/>
-                <a:ea typeface="Times New Roman"/>
-              </a:rPr>
-              <a:t>- Majburiy konveksiya: Fizikadagi konveksiya hodisasi tufayli sovuq havo molekulalari radiatordagi issiqlikni o'ziga olib, korpusdan tashqariga uchib chiqib ketadi.</a:t>
+              <a:rPr lang="uz-UZ" sz="1200" b="1" dirty="0">
+                <a:solidFill>
+                  <a:srgbClr val="00B4D8"/>
+                </a:solidFill>
+                <a:latin typeface="Times New Roman"/>
+                <a:cs typeface="Times New Roman"/>
+                <a:ea typeface="Times New Roman"/>
+              </a:rPr>
+              <a:t>7 / 10</a:t>
             </a:r>
           </a:p>
         </p:txBody>
@@ -2153,7 +5598,7 @@
         <p:spPr>
           <a:xfrm>
             <a:off x="0" y="0"/>
-            <a:ext cx="164592" cy="6858000"/>
+            <a:ext cx="128016" cy="6858000"/>
           </a:xfrm>
           <a:prstGeom prst="rect">
             <a:avLst/>
@@ -2172,22 +5617,115 @@
       </p:sp>
       <p:sp>
         <p:nvSpPr>
-          <p:cNvPr id="4" name="placeholder"/>
-          <p:cNvSpPr/>
-          <p:nvPr/>
-        </p:nvSpPr>
-        <p:spPr>
-          <a:xfrm>
-            <a:off x="7863840" y="914400"/>
-            <a:ext cx="3840480" cy="4846320"/>
-          </a:xfrm>
-          <a:prstGeom prst="rect">
-            <a:avLst/>
-          </a:prstGeom>
-          <a:solidFill>
-            <a:srgbClr val="161B22"/>
-          </a:solidFill>
-          <a:ln w="25400">
+          <p:cNvPr id="4" name="headerband"/>
+          <p:cNvSpPr/>
+          <p:nvPr/>
+        </p:nvSpPr>
+        <p:spPr>
+          <a:xfrm>
+            <a:off x="128016" y="0"/>
+            <a:ext cx="12063984" cy="1417320"/>
+          </a:xfrm>
+          <a:prstGeom prst="rect">
+            <a:avLst/>
+          </a:prstGeom>
+          <a:solidFill>
+            <a:srgbClr val="11202E"/>
+          </a:solidFill>
+        </p:spPr>
+        <p:txBody>
+          <a:bodyPr wrap="square" anchor="ctr">
+            <a:normAutofit/>
+          </a:bodyPr>
+          <a:lstStyle/>
+          <a:p/>
+        </p:txBody>
+      </p:sp>
+      <p:sp>
+        <p:nvSpPr>
+          <p:cNvPr id="5" name="titleline"/>
+          <p:cNvSpPr/>
+          <p:nvPr/>
+        </p:nvSpPr>
+        <p:spPr>
+          <a:xfrm>
+            <a:off x="548640" y="1170432"/>
+            <a:ext cx="4754880" cy="41148"/>
+          </a:xfrm>
+          <a:prstGeom prst="rect">
+            <a:avLst/>
+          </a:prstGeom>
+          <a:solidFill>
+            <a:srgbClr val="48CAE4"/>
+          </a:solidFill>
+        </p:spPr>
+        <p:txBody>
+          <a:bodyPr wrap="square" anchor="ctr">
+            <a:normAutofit/>
+          </a:bodyPr>
+          <a:lstStyle/>
+          <a:p/>
+        </p:txBody>
+      </p:sp>
+      <p:sp>
+        <p:nvSpPr>
+          <p:cNvPr id="6" name="title"/>
+          <p:cNvSpPr txBox="1"/>
+          <p:nvPr/>
+        </p:nvSpPr>
+        <p:spPr>
+          <a:xfrm>
+            <a:off x="548640" y="274320"/>
+            <a:ext cx="10607040" cy="914400"/>
+          </a:xfrm>
+          <a:prstGeom prst="rect">
+            <a:avLst/>
+          </a:prstGeom>
+          <a:noFill/>
+        </p:spPr>
+        <p:txBody>
+          <a:bodyPr wrap="square" lIns="45720" rIns="45720" anchor="ctr">
+            <a:normAutofit/>
+          </a:bodyPr>
+          <a:lstStyle/>
+          <a:p>
+            <a:pPr algn="l">
+              <a:spcAft>
+                <a:spcPts val="0"/>
+              </a:spcAft>
+            </a:pPr>
+            <a:r>
+              <a:rPr lang="uz-UZ" sz="3200" b="1" dirty="0">
+                <a:solidFill>
+                  <a:srgbClr val="48CAE4"/>
+                </a:solidFill>
+                <a:latin typeface="Times New Roman"/>
+                <a:cs typeface="Times New Roman"/>
+                <a:ea typeface="Times New Roman"/>
+              </a:rPr>
+              <a:t>Suvli sovutish (Liquid Cooling) texnologiyasi</a:t>
+            </a:r>
+          </a:p>
+        </p:txBody>
+      </p:sp>
+      <p:sp>
+        <p:nvSpPr>
+          <p:cNvPr id="7" name="imgframe"/>
+          <p:cNvSpPr/>
+          <p:nvPr/>
+        </p:nvSpPr>
+        <p:spPr>
+          <a:xfrm>
+            <a:off x="7754112" y="1719072"/>
+            <a:ext cx="4014216" cy="3831336"/>
+          </a:xfrm>
+          <a:prstGeom prst="rect">
+            <a:avLst/>
+          </a:prstGeom>
+          <a:solidFill>
+            <a:srgbClr val="1F2630"/>
+          </a:solidFill>
+          <a:ln w="28575">
             <a:solidFill>
               <a:srgbClr val="48CAE4"/>
             </a:solidFill>
@@ -2198,10 +5736,268 @@
             <a:normAutofit/>
           </a:bodyPr>
           <a:lstStyle/>
+          <a:p/>
+        </p:txBody>
+      </p:sp>
+      <p:sp>
+        <p:nvSpPr>
+          <p:cNvPr id="8" name="placeholder"/>
+          <p:cNvSpPr/>
+          <p:nvPr/>
+        </p:nvSpPr>
+        <p:spPr>
+          <a:xfrm>
+            <a:off x="7818120" y="1783080"/>
+            <a:ext cx="3886200" cy="3703320"/>
+          </a:xfrm>
+          <a:prstGeom prst="rect">
+            <a:avLst/>
+          </a:prstGeom>
+          <a:solidFill>
+            <a:srgbClr val="161B22"/>
+          </a:solidFill>
+        </p:spPr>
+        <p:txBody>
+          <a:bodyPr wrap="square" anchor="ctr">
+            <a:normAutofit/>
+          </a:bodyPr>
+          <a:lstStyle/>
+          <a:p/>
+        </p:txBody>
+      </p:sp>
+      <p:sp>
+        <p:nvSpPr>
+          <p:cNvPr id="9" name="fin0"/>
+          <p:cNvSpPr/>
+          <p:nvPr/>
+        </p:nvSpPr>
+        <p:spPr>
+          <a:xfrm>
+            <a:off x="8901684" y="2560777"/>
+            <a:ext cx="73152" cy="1555394"/>
+          </a:xfrm>
+          <a:prstGeom prst="rect">
+            <a:avLst/>
+          </a:prstGeom>
+          <a:solidFill>
+            <a:srgbClr val="48CAE4"/>
+          </a:solidFill>
+        </p:spPr>
+        <p:txBody>
+          <a:bodyPr wrap="square" anchor="ctr">
+            <a:normAutofit/>
+          </a:bodyPr>
+          <a:lstStyle/>
+          <a:p/>
+        </p:txBody>
+      </p:sp>
+      <p:sp>
+        <p:nvSpPr>
+          <p:cNvPr id="10" name="fin1"/>
+          <p:cNvSpPr/>
+          <p:nvPr/>
+        </p:nvSpPr>
+        <p:spPr>
+          <a:xfrm>
+            <a:off x="9176004" y="2560777"/>
+            <a:ext cx="73152" cy="1555394"/>
+          </a:xfrm>
+          <a:prstGeom prst="rect">
+            <a:avLst/>
+          </a:prstGeom>
+          <a:solidFill>
+            <a:srgbClr val="48CAE4"/>
+          </a:solidFill>
+        </p:spPr>
+        <p:txBody>
+          <a:bodyPr wrap="square" anchor="ctr">
+            <a:normAutofit/>
+          </a:bodyPr>
+          <a:lstStyle/>
+          <a:p/>
+        </p:txBody>
+      </p:sp>
+      <p:sp>
+        <p:nvSpPr>
+          <p:cNvPr id="11" name="fin2"/>
+          <p:cNvSpPr/>
+          <p:nvPr/>
+        </p:nvSpPr>
+        <p:spPr>
+          <a:xfrm>
+            <a:off x="9450324" y="2560777"/>
+            <a:ext cx="73152" cy="1555394"/>
+          </a:xfrm>
+          <a:prstGeom prst="rect">
+            <a:avLst/>
+          </a:prstGeom>
+          <a:solidFill>
+            <a:srgbClr val="48CAE4"/>
+          </a:solidFill>
+        </p:spPr>
+        <p:txBody>
+          <a:bodyPr wrap="square" anchor="ctr">
+            <a:normAutofit/>
+          </a:bodyPr>
+          <a:lstStyle/>
+          <a:p/>
+        </p:txBody>
+      </p:sp>
+      <p:sp>
+        <p:nvSpPr>
+          <p:cNvPr id="12" name="fin3"/>
+          <p:cNvSpPr/>
+          <p:nvPr/>
+        </p:nvSpPr>
+        <p:spPr>
+          <a:xfrm>
+            <a:off x="9724644" y="2560777"/>
+            <a:ext cx="73152" cy="1555394"/>
+          </a:xfrm>
+          <a:prstGeom prst="rect">
+            <a:avLst/>
+          </a:prstGeom>
+          <a:solidFill>
+            <a:srgbClr val="48CAE4"/>
+          </a:solidFill>
+        </p:spPr>
+        <p:txBody>
+          <a:bodyPr wrap="square" anchor="ctr">
+            <a:normAutofit/>
+          </a:bodyPr>
+          <a:lstStyle/>
+          <a:p/>
+        </p:txBody>
+      </p:sp>
+      <p:sp>
+        <p:nvSpPr>
+          <p:cNvPr id="13" name="fin4"/>
+          <p:cNvSpPr/>
+          <p:nvPr/>
+        </p:nvSpPr>
+        <p:spPr>
+          <a:xfrm>
+            <a:off x="9998964" y="2560777"/>
+            <a:ext cx="73152" cy="1555394"/>
+          </a:xfrm>
+          <a:prstGeom prst="rect">
+            <a:avLst/>
+          </a:prstGeom>
+          <a:solidFill>
+            <a:srgbClr val="48CAE4"/>
+          </a:solidFill>
+        </p:spPr>
+        <p:txBody>
+          <a:bodyPr wrap="square" anchor="ctr">
+            <a:normAutofit/>
+          </a:bodyPr>
+          <a:lstStyle/>
+          <a:p/>
+        </p:txBody>
+      </p:sp>
+      <p:sp>
+        <p:nvSpPr>
+          <p:cNvPr id="14" name="fin5"/>
+          <p:cNvSpPr/>
+          <p:nvPr/>
+        </p:nvSpPr>
+        <p:spPr>
+          <a:xfrm>
+            <a:off x="10273284" y="2560777"/>
+            <a:ext cx="73152" cy="1555394"/>
+          </a:xfrm>
+          <a:prstGeom prst="rect">
+            <a:avLst/>
+          </a:prstGeom>
+          <a:solidFill>
+            <a:srgbClr val="48CAE4"/>
+          </a:solidFill>
+        </p:spPr>
+        <p:txBody>
+          <a:bodyPr wrap="square" anchor="ctr">
+            <a:normAutofit/>
+          </a:bodyPr>
+          <a:lstStyle/>
+          <a:p/>
+        </p:txBody>
+      </p:sp>
+      <p:sp>
+        <p:nvSpPr>
+          <p:cNvPr id="15" name="fin6"/>
+          <p:cNvSpPr/>
+          <p:nvPr/>
+        </p:nvSpPr>
+        <p:spPr>
+          <a:xfrm>
+            <a:off x="10547604" y="2560777"/>
+            <a:ext cx="73152" cy="1555394"/>
+          </a:xfrm>
+          <a:prstGeom prst="rect">
+            <a:avLst/>
+          </a:prstGeom>
+          <a:solidFill>
+            <a:srgbClr val="48CAE4"/>
+          </a:solidFill>
+        </p:spPr>
+        <p:txBody>
+          <a:bodyPr wrap="square" anchor="ctr">
+            <a:normAutofit/>
+          </a:bodyPr>
+          <a:lstStyle/>
+          <a:p/>
+        </p:txBody>
+      </p:sp>
+      <p:sp>
+        <p:nvSpPr>
+          <p:cNvPr id="16" name="base"/>
+          <p:cNvSpPr/>
+          <p:nvPr/>
+        </p:nvSpPr>
+        <p:spPr>
+          <a:xfrm>
+            <a:off x="8700516" y="4116171"/>
+            <a:ext cx="2121408" cy="109728"/>
+          </a:xfrm>
+          <a:prstGeom prst="rect">
+            <a:avLst/>
+          </a:prstGeom>
+          <a:solidFill>
+            <a:srgbClr val="48CAE4"/>
+          </a:solidFill>
+        </p:spPr>
+        <p:txBody>
+          <a:bodyPr wrap="square" anchor="ctr">
+            <a:normAutofit/>
+          </a:bodyPr>
+          <a:lstStyle/>
+          <a:p/>
+        </p:txBody>
+      </p:sp>
+      <p:sp>
+        <p:nvSpPr>
+          <p:cNvPr id="17" name="imglabel"/>
+          <p:cNvSpPr txBox="1"/>
+          <p:nvPr/>
+        </p:nvSpPr>
+        <p:spPr>
+          <a:xfrm>
+            <a:off x="7818120" y="4983480"/>
+            <a:ext cx="3886200" cy="457200"/>
+          </a:xfrm>
+          <a:prstGeom prst="rect">
+            <a:avLst/>
+          </a:prstGeom>
+          <a:noFill/>
+        </p:spPr>
+        <p:txBody>
+          <a:bodyPr wrap="square" lIns="45720" rIns="45720" anchor="ctr">
+            <a:normAutofit/>
+          </a:bodyPr>
+          <a:lstStyle/>
           <a:p>
             <a:pPr algn="ctr">
               <a:spcAft>
-                <a:spcPts val="400"/>
+                <a:spcPts val="0"/>
               </a:spcAft>
             </a:pPr>
             <a:r>
@@ -2220,14 +6016,14 @@
       </p:sp>
       <p:sp>
         <p:nvSpPr>
-          <p:cNvPr id="5" name="title"/>
+          <p:cNvPr id="18" name="body"/>
           <p:cNvSpPr txBox="1"/>
           <p:nvPr/>
         </p:nvSpPr>
         <p:spPr>
           <a:xfrm>
-            <a:off x="457200" y="457200"/>
-            <a:ext cx="7132320" cy="1463040"/>
+            <a:off x="548640" y="1783080"/>
+            <a:ext cx="6858000" cy="4023360"/>
           </a:xfrm>
           <a:prstGeom prst="rect">
             <a:avLst/>
@@ -2235,40 +6031,200 @@
           <a:noFill/>
         </p:spPr>
         <p:txBody>
-          <a:bodyPr wrap="square" anchor="t">
+          <a:bodyPr wrap="square" lIns="45720" rIns="45720" anchor="t">
+            <a:normAutofit/>
+          </a:bodyPr>
+          <a:lstStyle/>
+          <a:p>
+            <a:pPr algn="l">
+              <a:lnSpc>
+                <a:spcPct val="108"/>
+              </a:lnSpc>
+              <a:spcAft>
+                <a:spcPts val="600"/>
+              </a:spcAft>
+            </a:pPr>
+            <a:r>
+              <a:rPr lang="uz-UZ" sz="1800" dirty="0">
+                <a:solidFill>
+                  <a:srgbClr val="F0F6FC"/>
+                </a:solidFill>
+                <a:latin typeface="Times New Roman"/>
+                <a:cs typeface="Times New Roman"/>
+                <a:ea typeface="Times New Roman"/>
+              </a:rPr>
+              <a:t>Juda kuchli protsessorlar (masalan, Data markazlar yoki o'yin kompyuterlari) uchun oddiy havo yetarli bo'lmaydi.</a:t>
+            </a:r>
+          </a:p>
+          <a:p>
+            <a:pPr algn="l">
+              <a:lnSpc>
+                <a:spcPct val="108"/>
+              </a:lnSpc>
+              <a:spcAft>
+                <a:spcPts val="600"/>
+              </a:spcAft>
+            </a:pPr>
+            <a:r>
+              <a:rPr lang="uz-UZ" sz="1800" b="1" dirty="0">
+                <a:solidFill>
+                  <a:srgbClr val="48CAE4"/>
+                </a:solidFill>
+                <a:latin typeface="Times New Roman"/>
+                <a:cs typeface="Times New Roman"/>
+                <a:ea typeface="Times New Roman"/>
+              </a:rPr>
+              <a:t>▪  </a:t>
+            </a:r>
+            <a:r>
+              <a:rPr lang="uz-UZ" sz="1800" dirty="0">
+                <a:solidFill>
+                  <a:srgbClr val="F0F6FC"/>
+                </a:solidFill>
+                <a:latin typeface="Times New Roman"/>
+                <a:cs typeface="Times New Roman"/>
+                <a:ea typeface="Times New Roman"/>
+              </a:rPr>
+              <a:t>Suvning issiqlik sig'imi: Fizikaga ko'ra, suvning issiqlik sig'imi havoga qaraganda ancha yuqori. Ya'ni suv o'ziga ko'proq issiqlikni yuta oladi.</a:t>
+            </a:r>
+          </a:p>
+          <a:p>
+            <a:pPr algn="l">
+              <a:lnSpc>
+                <a:spcPct val="108"/>
+              </a:lnSpc>
+              <a:spcAft>
+                <a:spcPts val="600"/>
+              </a:spcAft>
+            </a:pPr>
+            <a:r>
+              <a:rPr lang="uz-UZ" sz="1800" b="1" dirty="0">
+                <a:solidFill>
+                  <a:srgbClr val="48CAE4"/>
+                </a:solidFill>
+                <a:latin typeface="Times New Roman"/>
+                <a:cs typeface="Times New Roman"/>
+                <a:ea typeface="Times New Roman"/>
+              </a:rPr>
+              <a:t>▪  </a:t>
+            </a:r>
+            <a:r>
+              <a:rPr lang="uz-UZ" sz="1800" dirty="0">
+                <a:solidFill>
+                  <a:srgbClr val="F0F6FC"/>
+                </a:solidFill>
+                <a:latin typeface="Times New Roman"/>
+                <a:cs typeface="Times New Roman"/>
+                <a:ea typeface="Times New Roman"/>
+              </a:rPr>
+              <a:t>Suyuqlik aylanmasi: Maxsus nasos yordamida suyuqlik protsessor ustidagi blokdan o'tib, issiqlikni yutadi va katta radiatorga olib borib, ventilyatorlar yordamida soviydi.</a:t>
+            </a:r>
+          </a:p>
+        </p:txBody>
+      </p:sp>
+      <p:sp>
+        <p:nvSpPr>
+          <p:cNvPr id="19" name="footerband"/>
+          <p:cNvSpPr/>
+          <p:nvPr/>
+        </p:nvSpPr>
+        <p:spPr>
+          <a:xfrm>
+            <a:off x="0" y="6473952"/>
+            <a:ext cx="12192000" cy="384048"/>
+          </a:xfrm>
+          <a:prstGeom prst="rect">
+            <a:avLst/>
+          </a:prstGeom>
+          <a:solidFill>
+            <a:srgbClr val="11202E"/>
+          </a:solidFill>
+        </p:spPr>
+        <p:txBody>
+          <a:bodyPr wrap="square" anchor="ctr">
+            <a:normAutofit/>
+          </a:bodyPr>
+          <a:lstStyle/>
+          <a:p/>
+        </p:txBody>
+      </p:sp>
+      <p:sp>
+        <p:nvSpPr>
+          <p:cNvPr id="20" name="footeraccent"/>
+          <p:cNvSpPr/>
+          <p:nvPr/>
+        </p:nvSpPr>
+        <p:spPr>
+          <a:xfrm>
+            <a:off x="0" y="6473952"/>
+            <a:ext cx="12192000" cy="27432"/>
+          </a:xfrm>
+          <a:prstGeom prst="rect">
+            <a:avLst/>
+          </a:prstGeom>
+          <a:solidFill>
+            <a:srgbClr val="48CAE4"/>
+          </a:solidFill>
+        </p:spPr>
+        <p:txBody>
+          <a:bodyPr wrap="square" anchor="ctr">
+            <a:normAutofit/>
+          </a:bodyPr>
+          <a:lstStyle/>
+          <a:p/>
+        </p:txBody>
+      </p:sp>
+      <p:sp>
+        <p:nvSpPr>
+          <p:cNvPr id="21" name="footerlabel"/>
+          <p:cNvSpPr txBox="1"/>
+          <p:nvPr/>
+        </p:nvSpPr>
+        <p:spPr>
+          <a:xfrm>
+            <a:off x="548640" y="6473952"/>
+            <a:ext cx="8229600" cy="384048"/>
+          </a:xfrm>
+          <a:prstGeom prst="rect">
+            <a:avLst/>
+          </a:prstGeom>
+          <a:noFill/>
+        </p:spPr>
+        <p:txBody>
+          <a:bodyPr wrap="square" lIns="45720" rIns="45720" anchor="ctr">
             <a:normAutofit/>
           </a:bodyPr>
           <a:lstStyle/>
           <a:p>
             <a:pPr algn="l">
               <a:spcAft>
-                <a:spcPts val="400"/>
+                <a:spcPts val="0"/>
               </a:spcAft>
             </a:pPr>
             <a:r>
-              <a:rPr lang="uz-UZ" sz="4000" b="1" dirty="0">
-                <a:solidFill>
-                  <a:srgbClr val="48CAE4"/>
-                </a:solidFill>
-                <a:latin typeface="Times New Roman"/>
-                <a:cs typeface="Times New Roman"/>
-                <a:ea typeface="Times New Roman"/>
-              </a:rPr>
-              <a:t>Suvli sovutish (Liquid Cooling) texnologiyasi</a:t>
+              <a:rPr lang="uz-UZ" sz="1200" dirty="0">
+                <a:solidFill>
+                  <a:srgbClr val="9FB3C8"/>
+                </a:solidFill>
+                <a:latin typeface="Times New Roman"/>
+                <a:cs typeface="Times New Roman"/>
+                <a:ea typeface="Times New Roman"/>
+              </a:rPr>
+              <a:t>Kompyuter qizishi va sovutish fizikasi</a:t>
             </a:r>
           </a:p>
         </p:txBody>
       </p:sp>
       <p:sp>
         <p:nvSpPr>
-          <p:cNvPr id="6" name="body"/>
+          <p:cNvPr id="22" name="footernum"/>
           <p:cNvSpPr txBox="1"/>
           <p:nvPr/>
         </p:nvSpPr>
         <p:spPr>
           <a:xfrm>
-            <a:off x="457200" y="2103120"/>
-            <a:ext cx="7132320" cy="4297680"/>
+            <a:off x="10332720" y="6473952"/>
+            <a:ext cx="1371600" cy="384048"/>
           </a:xfrm>
           <a:prstGeom prst="rect">
             <a:avLst/>
@@ -2276,62 +6232,26 @@
           <a:noFill/>
         </p:spPr>
         <p:txBody>
-          <a:bodyPr wrap="square" anchor="t">
+          <a:bodyPr wrap="square" lIns="45720" rIns="45720" anchor="ctr">
             <a:normAutofit/>
           </a:bodyPr>
           <a:lstStyle/>
           <a:p>
-            <a:pPr algn="l">
+            <a:pPr algn="r">
               <a:spcAft>
-                <a:spcPts val="400"/>
+                <a:spcPts val="0"/>
               </a:spcAft>
             </a:pPr>
             <a:r>
-              <a:rPr lang="uz-UZ" sz="1800" dirty="0">
-                <a:solidFill>
-                  <a:srgbClr val="F0F6FC"/>
-                </a:solidFill>
-                <a:latin typeface="Times New Roman"/>
-                <a:cs typeface="Times New Roman"/>
-                <a:ea typeface="Times New Roman"/>
-              </a:rPr>
-              <a:t>Juda kuchli protsessorlar (masalan, Data markazlar yoki o'yin kompyuterlari) uchun oddiy havo yetarli bo'lmaydi.</a:t>
-            </a:r>
-          </a:p>
-          <a:p>
-            <a:pPr algn="l">
-              <a:spcAft>
-                <a:spcPts val="400"/>
-              </a:spcAft>
-            </a:pPr>
-            <a:r>
-              <a:rPr lang="uz-UZ" sz="1800" dirty="0">
-                <a:solidFill>
-                  <a:srgbClr val="F0F6FC"/>
-                </a:solidFill>
-                <a:latin typeface="Times New Roman"/>
-                <a:cs typeface="Times New Roman"/>
-                <a:ea typeface="Times New Roman"/>
-              </a:rPr>
-              <a:t>- Suvning issiqlik sig'imi: Fizikaga ko'ra, suvning issiqlik sig'imi havoga qaraganda ancha yuqori. Ya'ni suv o'ziga ko'proq issiqlikni yuta oladi.</a:t>
-            </a:r>
-          </a:p>
-          <a:p>
-            <a:pPr algn="l">
-              <a:spcAft>
-                <a:spcPts val="400"/>
-              </a:spcAft>
-            </a:pPr>
-            <a:r>
-              <a:rPr lang="uz-UZ" sz="1800" dirty="0">
-                <a:solidFill>
-                  <a:srgbClr val="F0F6FC"/>
-                </a:solidFill>
-                <a:latin typeface="Times New Roman"/>
-                <a:cs typeface="Times New Roman"/>
-                <a:ea typeface="Times New Roman"/>
-              </a:rPr>
-              <a:t>- Suyuqlik aylanmasi: Maxsus nasos yordamida suyuqlik protsessor ustidagi blokdan o'tib, issiqlikni yutadi va katta radiatorga olib borib, ventilyatorlar yordamida soviydi.</a:t>
+              <a:rPr lang="uz-UZ" sz="1200" b="1" dirty="0">
+                <a:solidFill>
+                  <a:srgbClr val="48CAE4"/>
+                </a:solidFill>
+                <a:latin typeface="Times New Roman"/>
+                <a:cs typeface="Times New Roman"/>
+                <a:ea typeface="Times New Roman"/>
+              </a:rPr>
+              <a:t>8 / 10</a:t>
             </a:r>
           </a:p>
         </p:txBody>
@@ -2396,7 +6316,7 @@
         <p:spPr>
           <a:xfrm>
             <a:off x="0" y="0"/>
-            <a:ext cx="164592" cy="6858000"/>
+            <a:ext cx="128016" cy="6858000"/>
           </a:xfrm>
           <a:prstGeom prst="rect">
             <a:avLst/>
@@ -2415,22 +6335,115 @@
       </p:sp>
       <p:sp>
         <p:nvSpPr>
-          <p:cNvPr id="4" name="placeholder"/>
-          <p:cNvSpPr/>
-          <p:nvPr/>
-        </p:nvSpPr>
-        <p:spPr>
-          <a:xfrm>
-            <a:off x="7863840" y="914400"/>
-            <a:ext cx="3840480" cy="4846320"/>
-          </a:xfrm>
-          <a:prstGeom prst="rect">
-            <a:avLst/>
-          </a:prstGeom>
-          <a:solidFill>
-            <a:srgbClr val="161B22"/>
-          </a:solidFill>
-          <a:ln w="25400">
+          <p:cNvPr id="4" name="headerband"/>
+          <p:cNvSpPr/>
+          <p:nvPr/>
+        </p:nvSpPr>
+        <p:spPr>
+          <a:xfrm>
+            <a:off x="128016" y="0"/>
+            <a:ext cx="12063984" cy="1417320"/>
+          </a:xfrm>
+          <a:prstGeom prst="rect">
+            <a:avLst/>
+          </a:prstGeom>
+          <a:solidFill>
+            <a:srgbClr val="11202E"/>
+          </a:solidFill>
+        </p:spPr>
+        <p:txBody>
+          <a:bodyPr wrap="square" anchor="ctr">
+            <a:normAutofit/>
+          </a:bodyPr>
+          <a:lstStyle/>
+          <a:p/>
+        </p:txBody>
+      </p:sp>
+      <p:sp>
+        <p:nvSpPr>
+          <p:cNvPr id="5" name="titleline"/>
+          <p:cNvSpPr/>
+          <p:nvPr/>
+        </p:nvSpPr>
+        <p:spPr>
+          <a:xfrm>
+            <a:off x="548640" y="1170432"/>
+            <a:ext cx="4754880" cy="41148"/>
+          </a:xfrm>
+          <a:prstGeom prst="rect">
+            <a:avLst/>
+          </a:prstGeom>
+          <a:solidFill>
+            <a:srgbClr val="00B4D8"/>
+          </a:solidFill>
+        </p:spPr>
+        <p:txBody>
+          <a:bodyPr wrap="square" anchor="ctr">
+            <a:normAutofit/>
+          </a:bodyPr>
+          <a:lstStyle/>
+          <a:p/>
+        </p:txBody>
+      </p:sp>
+      <p:sp>
+        <p:nvSpPr>
+          <p:cNvPr id="6" name="title"/>
+          <p:cNvSpPr txBox="1"/>
+          <p:nvPr/>
+        </p:nvSpPr>
+        <p:spPr>
+          <a:xfrm>
+            <a:off x="548640" y="274320"/>
+            <a:ext cx="10607040" cy="914400"/>
+          </a:xfrm>
+          <a:prstGeom prst="rect">
+            <a:avLst/>
+          </a:prstGeom>
+          <a:noFill/>
+        </p:spPr>
+        <p:txBody>
+          <a:bodyPr wrap="square" lIns="45720" rIns="45720" anchor="ctr">
+            <a:normAutofit/>
+          </a:bodyPr>
+          <a:lstStyle/>
+          <a:p>
+            <a:pPr algn="l">
+              <a:spcAft>
+                <a:spcPts val="0"/>
+              </a:spcAft>
+            </a:pPr>
+            <a:r>
+              <a:rPr lang="uz-UZ" sz="3200" b="1" dirty="0">
+                <a:solidFill>
+                  <a:srgbClr val="00B4D8"/>
+                </a:solidFill>
+                <a:latin typeface="Times New Roman"/>
+                <a:cs typeface="Times New Roman"/>
+                <a:ea typeface="Times New Roman"/>
+              </a:rPr>
+              <a:t>Xulosa</a:t>
+            </a:r>
+          </a:p>
+        </p:txBody>
+      </p:sp>
+      <p:sp>
+        <p:nvSpPr>
+          <p:cNvPr id="7" name="imgframe"/>
+          <p:cNvSpPr/>
+          <p:nvPr/>
+        </p:nvSpPr>
+        <p:spPr>
+          <a:xfrm>
+            <a:off x="7754112" y="1719072"/>
+            <a:ext cx="4014216" cy="3831336"/>
+          </a:xfrm>
+          <a:prstGeom prst="rect">
+            <a:avLst/>
+          </a:prstGeom>
+          <a:solidFill>
+            <a:srgbClr val="1F2630"/>
+          </a:solidFill>
+          <a:ln w="28575">
             <a:solidFill>
               <a:srgbClr val="00B4D8"/>
             </a:solidFill>
@@ -2441,10 +6454,398 @@
             <a:normAutofit/>
           </a:bodyPr>
           <a:lstStyle/>
+          <a:p/>
+        </p:txBody>
+      </p:sp>
+      <p:sp>
+        <p:nvSpPr>
+          <p:cNvPr id="8" name="placeholder"/>
+          <p:cNvSpPr/>
+          <p:nvPr/>
+        </p:nvSpPr>
+        <p:spPr>
+          <a:xfrm>
+            <a:off x="7818120" y="1783080"/>
+            <a:ext cx="3886200" cy="3703320"/>
+          </a:xfrm>
+          <a:prstGeom prst="rect">
+            <a:avLst/>
+          </a:prstGeom>
+          <a:solidFill>
+            <a:srgbClr val="161B22"/>
+          </a:solidFill>
+        </p:spPr>
+        <p:txBody>
+          <a:bodyPr wrap="square" anchor="ctr">
+            <a:normAutofit/>
+          </a:bodyPr>
+          <a:lstStyle/>
+          <a:p/>
+        </p:txBody>
+      </p:sp>
+      <p:sp>
+        <p:nvSpPr>
+          <p:cNvPr id="9" name="chip0"/>
+          <p:cNvSpPr/>
+          <p:nvPr/>
+        </p:nvSpPr>
+        <p:spPr>
+          <a:xfrm>
+            <a:off x="9100566" y="2708910"/>
+            <a:ext cx="1321308" cy="1259128"/>
+          </a:xfrm>
+          <a:prstGeom prst="rect">
+            <a:avLst/>
+          </a:prstGeom>
+          <a:solidFill>
+            <a:srgbClr val="00B4D8"/>
+          </a:solidFill>
+        </p:spPr>
+        <p:txBody>
+          <a:bodyPr wrap="square" anchor="ctr">
+            <a:normAutofit/>
+          </a:bodyPr>
+          <a:lstStyle/>
+          <a:p/>
+        </p:txBody>
+      </p:sp>
+      <p:sp>
+        <p:nvSpPr>
+          <p:cNvPr id="10" name="chip1"/>
+          <p:cNvSpPr/>
+          <p:nvPr/>
+        </p:nvSpPr>
+        <p:spPr>
+          <a:xfrm>
+            <a:off x="9294876" y="2894076"/>
+            <a:ext cx="932688" cy="888796"/>
+          </a:xfrm>
+          <a:prstGeom prst="rect">
+            <a:avLst/>
+          </a:prstGeom>
+          <a:solidFill>
+            <a:srgbClr val="1F2630"/>
+          </a:solidFill>
+        </p:spPr>
+        <p:txBody>
+          <a:bodyPr wrap="square" anchor="ctr">
+            <a:normAutofit/>
+          </a:bodyPr>
+          <a:lstStyle/>
+          <a:p/>
+        </p:txBody>
+      </p:sp>
+      <p:sp>
+        <p:nvSpPr>
+          <p:cNvPr id="11" name="chip2"/>
+          <p:cNvSpPr/>
+          <p:nvPr/>
+        </p:nvSpPr>
+        <p:spPr>
+          <a:xfrm>
+            <a:off x="9489186" y="3079242"/>
+            <a:ext cx="544068" cy="518464"/>
+          </a:xfrm>
+          <a:prstGeom prst="rect">
+            <a:avLst/>
+          </a:prstGeom>
+          <a:solidFill>
+            <a:srgbClr val="00B4D8"/>
+          </a:solidFill>
+        </p:spPr>
+        <p:txBody>
+          <a:bodyPr wrap="square" anchor="ctr">
+            <a:normAutofit/>
+          </a:bodyPr>
+          <a:lstStyle/>
+          <a:p/>
+        </p:txBody>
+      </p:sp>
+      <p:sp>
+        <p:nvSpPr>
+          <p:cNvPr id="12" name="pinl0"/>
+          <p:cNvSpPr/>
+          <p:nvPr/>
+        </p:nvSpPr>
+        <p:spPr>
+          <a:xfrm>
+            <a:off x="8935974" y="3009290"/>
+            <a:ext cx="164592" cy="45720"/>
+          </a:xfrm>
+          <a:prstGeom prst="rect">
+            <a:avLst/>
+          </a:prstGeom>
+          <a:solidFill>
+            <a:srgbClr val="00B4D8"/>
+          </a:solidFill>
+        </p:spPr>
+        <p:txBody>
+          <a:bodyPr wrap="square" anchor="ctr">
+            <a:normAutofit/>
+          </a:bodyPr>
+          <a:lstStyle/>
+          <a:p/>
+        </p:txBody>
+      </p:sp>
+      <p:sp>
+        <p:nvSpPr>
+          <p:cNvPr id="13" name="pinr0"/>
+          <p:cNvSpPr/>
+          <p:nvPr/>
+        </p:nvSpPr>
+        <p:spPr>
+          <a:xfrm>
+            <a:off x="10421874" y="3009290"/>
+            <a:ext cx="164592" cy="45720"/>
+          </a:xfrm>
+          <a:prstGeom prst="rect">
+            <a:avLst/>
+          </a:prstGeom>
+          <a:solidFill>
+            <a:srgbClr val="00B4D8"/>
+          </a:solidFill>
+        </p:spPr>
+        <p:txBody>
+          <a:bodyPr wrap="square" anchor="ctr">
+            <a:normAutofit/>
+          </a:bodyPr>
+          <a:lstStyle/>
+          <a:p/>
+        </p:txBody>
+      </p:sp>
+      <p:sp>
+        <p:nvSpPr>
+          <p:cNvPr id="14" name="pinl1"/>
+          <p:cNvSpPr/>
+          <p:nvPr/>
+        </p:nvSpPr>
+        <p:spPr>
+          <a:xfrm>
+            <a:off x="8935974" y="3173882"/>
+            <a:ext cx="164592" cy="45720"/>
+          </a:xfrm>
+          <a:prstGeom prst="rect">
+            <a:avLst/>
+          </a:prstGeom>
+          <a:solidFill>
+            <a:srgbClr val="00B4D8"/>
+          </a:solidFill>
+        </p:spPr>
+        <p:txBody>
+          <a:bodyPr wrap="square" anchor="ctr">
+            <a:normAutofit/>
+          </a:bodyPr>
+          <a:lstStyle/>
+          <a:p/>
+        </p:txBody>
+      </p:sp>
+      <p:sp>
+        <p:nvSpPr>
+          <p:cNvPr id="15" name="pinr1"/>
+          <p:cNvSpPr/>
+          <p:nvPr/>
+        </p:nvSpPr>
+        <p:spPr>
+          <a:xfrm>
+            <a:off x="10421874" y="3173882"/>
+            <a:ext cx="164592" cy="45720"/>
+          </a:xfrm>
+          <a:prstGeom prst="rect">
+            <a:avLst/>
+          </a:prstGeom>
+          <a:solidFill>
+            <a:srgbClr val="00B4D8"/>
+          </a:solidFill>
+        </p:spPr>
+        <p:txBody>
+          <a:bodyPr wrap="square" anchor="ctr">
+            <a:normAutofit/>
+          </a:bodyPr>
+          <a:lstStyle/>
+          <a:p/>
+        </p:txBody>
+      </p:sp>
+      <p:sp>
+        <p:nvSpPr>
+          <p:cNvPr id="16" name="pinl2"/>
+          <p:cNvSpPr/>
+          <p:nvPr/>
+        </p:nvSpPr>
+        <p:spPr>
+          <a:xfrm>
+            <a:off x="8935974" y="3338474"/>
+            <a:ext cx="164592" cy="45720"/>
+          </a:xfrm>
+          <a:prstGeom prst="rect">
+            <a:avLst/>
+          </a:prstGeom>
+          <a:solidFill>
+            <a:srgbClr val="00B4D8"/>
+          </a:solidFill>
+        </p:spPr>
+        <p:txBody>
+          <a:bodyPr wrap="square" anchor="ctr">
+            <a:normAutofit/>
+          </a:bodyPr>
+          <a:lstStyle/>
+          <a:p/>
+        </p:txBody>
+      </p:sp>
+      <p:sp>
+        <p:nvSpPr>
+          <p:cNvPr id="17" name="pinr2"/>
+          <p:cNvSpPr/>
+          <p:nvPr/>
+        </p:nvSpPr>
+        <p:spPr>
+          <a:xfrm>
+            <a:off x="10421874" y="3338474"/>
+            <a:ext cx="164592" cy="45720"/>
+          </a:xfrm>
+          <a:prstGeom prst="rect">
+            <a:avLst/>
+          </a:prstGeom>
+          <a:solidFill>
+            <a:srgbClr val="00B4D8"/>
+          </a:solidFill>
+        </p:spPr>
+        <p:txBody>
+          <a:bodyPr wrap="square" anchor="ctr">
+            <a:normAutofit/>
+          </a:bodyPr>
+          <a:lstStyle/>
+          <a:p/>
+        </p:txBody>
+      </p:sp>
+      <p:sp>
+        <p:nvSpPr>
+          <p:cNvPr id="18" name="pinl3"/>
+          <p:cNvSpPr/>
+          <p:nvPr/>
+        </p:nvSpPr>
+        <p:spPr>
+          <a:xfrm>
+            <a:off x="8935974" y="3503066"/>
+            <a:ext cx="164592" cy="45720"/>
+          </a:xfrm>
+          <a:prstGeom prst="rect">
+            <a:avLst/>
+          </a:prstGeom>
+          <a:solidFill>
+            <a:srgbClr val="00B4D8"/>
+          </a:solidFill>
+        </p:spPr>
+        <p:txBody>
+          <a:bodyPr wrap="square" anchor="ctr">
+            <a:normAutofit/>
+          </a:bodyPr>
+          <a:lstStyle/>
+          <a:p/>
+        </p:txBody>
+      </p:sp>
+      <p:sp>
+        <p:nvSpPr>
+          <p:cNvPr id="19" name="pinr3"/>
+          <p:cNvSpPr/>
+          <p:nvPr/>
+        </p:nvSpPr>
+        <p:spPr>
+          <a:xfrm>
+            <a:off x="10421874" y="3503066"/>
+            <a:ext cx="164592" cy="45720"/>
+          </a:xfrm>
+          <a:prstGeom prst="rect">
+            <a:avLst/>
+          </a:prstGeom>
+          <a:solidFill>
+            <a:srgbClr val="00B4D8"/>
+          </a:solidFill>
+        </p:spPr>
+        <p:txBody>
+          <a:bodyPr wrap="square" anchor="ctr">
+            <a:normAutofit/>
+          </a:bodyPr>
+          <a:lstStyle/>
+          <a:p/>
+        </p:txBody>
+      </p:sp>
+      <p:sp>
+        <p:nvSpPr>
+          <p:cNvPr id="20" name="pinl4"/>
+          <p:cNvSpPr/>
+          <p:nvPr/>
+        </p:nvSpPr>
+        <p:spPr>
+          <a:xfrm>
+            <a:off x="8935974" y="3667658"/>
+            <a:ext cx="164592" cy="45720"/>
+          </a:xfrm>
+          <a:prstGeom prst="rect">
+            <a:avLst/>
+          </a:prstGeom>
+          <a:solidFill>
+            <a:srgbClr val="00B4D8"/>
+          </a:solidFill>
+        </p:spPr>
+        <p:txBody>
+          <a:bodyPr wrap="square" anchor="ctr">
+            <a:normAutofit/>
+          </a:bodyPr>
+          <a:lstStyle/>
+          <a:p/>
+        </p:txBody>
+      </p:sp>
+      <p:sp>
+        <p:nvSpPr>
+          <p:cNvPr id="21" name="pinr4"/>
+          <p:cNvSpPr/>
+          <p:nvPr/>
+        </p:nvSpPr>
+        <p:spPr>
+          <a:xfrm>
+            <a:off x="10421874" y="3667658"/>
+            <a:ext cx="164592" cy="45720"/>
+          </a:xfrm>
+          <a:prstGeom prst="rect">
+            <a:avLst/>
+          </a:prstGeom>
+          <a:solidFill>
+            <a:srgbClr val="00B4D8"/>
+          </a:solidFill>
+        </p:spPr>
+        <p:txBody>
+          <a:bodyPr wrap="square" anchor="ctr">
+            <a:normAutofit/>
+          </a:bodyPr>
+          <a:lstStyle/>
+          <a:p/>
+        </p:txBody>
+      </p:sp>
+      <p:sp>
+        <p:nvSpPr>
+          <p:cNvPr id="22" name="imglabel"/>
+          <p:cNvSpPr txBox="1"/>
+          <p:nvPr/>
+        </p:nvSpPr>
+        <p:spPr>
+          <a:xfrm>
+            <a:off x="7818120" y="4983480"/>
+            <a:ext cx="3886200" cy="457200"/>
+          </a:xfrm>
+          <a:prstGeom prst="rect">
+            <a:avLst/>
+          </a:prstGeom>
+          <a:noFill/>
+        </p:spPr>
+        <p:txBody>
+          <a:bodyPr wrap="square" lIns="45720" rIns="45720" anchor="ctr">
+            <a:normAutofit/>
+          </a:bodyPr>
+          <a:lstStyle/>
           <a:p>
             <a:pPr algn="ctr">
               <a:spcAft>
-                <a:spcPts val="400"/>
+                <a:spcPts val="0"/>
               </a:spcAft>
             </a:pPr>
             <a:r>
@@ -2463,14 +6864,14 @@
       </p:sp>
       <p:sp>
         <p:nvSpPr>
-          <p:cNvPr id="5" name="title"/>
+          <p:cNvPr id="23" name="body"/>
           <p:cNvSpPr txBox="1"/>
           <p:nvPr/>
         </p:nvSpPr>
         <p:spPr>
           <a:xfrm>
-            <a:off x="457200" y="457200"/>
-            <a:ext cx="7132320" cy="1463040"/>
+            <a:off x="548640" y="1783080"/>
+            <a:ext cx="6858000" cy="4023360"/>
           </a:xfrm>
           <a:prstGeom prst="rect">
             <a:avLst/>
@@ -2478,40 +6879,157 @@
           <a:noFill/>
         </p:spPr>
         <p:txBody>
-          <a:bodyPr wrap="square" anchor="t">
+          <a:bodyPr wrap="square" lIns="45720" rIns="45720" anchor="t">
+            <a:normAutofit/>
+          </a:bodyPr>
+          <a:lstStyle/>
+          <a:p>
+            <a:pPr algn="l">
+              <a:lnSpc>
+                <a:spcPct val="108"/>
+              </a:lnSpc>
+              <a:spcAft>
+                <a:spcPts val="600"/>
+              </a:spcAft>
+            </a:pPr>
+            <a:r>
+              <a:rPr lang="uz-UZ" sz="1800" dirty="0">
+                <a:solidFill>
+                  <a:srgbClr val="F0F6FC"/>
+                </a:solidFill>
+                <a:latin typeface="Times New Roman"/>
+                <a:cs typeface="Times New Roman"/>
+                <a:ea typeface="Times New Roman"/>
+              </a:rPr>
+              <a:t>Xulosa qilib aytganda, kompyuterning ishlashi to'liq elektr toki va termodinamika qonunlariga bog'liq. Axborot qanchalik tez qayta ishlansa, shuncha ko'p elektr issiqlikka aylanadi.</a:t>
+            </a:r>
+          </a:p>
+          <a:p>
+            <a:pPr algn="l">
+              <a:lnSpc>
+                <a:spcPct val="108"/>
+              </a:lnSpc>
+              <a:spcAft>
+                <a:spcPts val="600"/>
+              </a:spcAft>
+            </a:pPr>
+            <a:r>
+              <a:rPr lang="uz-UZ" sz="1800" dirty="0">
+                <a:solidFill>
+                  <a:srgbClr val="F0F6FC"/>
+                </a:solidFill>
+                <a:latin typeface="Times New Roman"/>
+                <a:cs typeface="Times New Roman"/>
+                <a:ea typeface="Times New Roman"/>
+              </a:rPr>
+              <a:t>Samarali sovutish tizimlari (kulerlar, radiatorlar va termopasta) nafaqat kompyuterning qotib qolmasligini, balki uning ehtiyot qismlari yonib ketmasdan uzoq yillar barqaror ishlashini kafolatlovchi asosiy injenerlik yechimidir.</a:t>
+            </a:r>
+          </a:p>
+        </p:txBody>
+      </p:sp>
+      <p:sp>
+        <p:nvSpPr>
+          <p:cNvPr id="24" name="footerband"/>
+          <p:cNvSpPr/>
+          <p:nvPr/>
+        </p:nvSpPr>
+        <p:spPr>
+          <a:xfrm>
+            <a:off x="0" y="6473952"/>
+            <a:ext cx="12192000" cy="384048"/>
+          </a:xfrm>
+          <a:prstGeom prst="rect">
+            <a:avLst/>
+          </a:prstGeom>
+          <a:solidFill>
+            <a:srgbClr val="11202E"/>
+          </a:solidFill>
+        </p:spPr>
+        <p:txBody>
+          <a:bodyPr wrap="square" anchor="ctr">
+            <a:normAutofit/>
+          </a:bodyPr>
+          <a:lstStyle/>
+          <a:p/>
+        </p:txBody>
+      </p:sp>
+      <p:sp>
+        <p:nvSpPr>
+          <p:cNvPr id="25" name="footeraccent"/>
+          <p:cNvSpPr/>
+          <p:nvPr/>
+        </p:nvSpPr>
+        <p:spPr>
+          <a:xfrm>
+            <a:off x="0" y="6473952"/>
+            <a:ext cx="12192000" cy="27432"/>
+          </a:xfrm>
+          <a:prstGeom prst="rect">
+            <a:avLst/>
+          </a:prstGeom>
+          <a:solidFill>
+            <a:srgbClr val="00B4D8"/>
+          </a:solidFill>
+        </p:spPr>
+        <p:txBody>
+          <a:bodyPr wrap="square" anchor="ctr">
+            <a:normAutofit/>
+          </a:bodyPr>
+          <a:lstStyle/>
+          <a:p/>
+        </p:txBody>
+      </p:sp>
+      <p:sp>
+        <p:nvSpPr>
+          <p:cNvPr id="26" name="footerlabel"/>
+          <p:cNvSpPr txBox="1"/>
+          <p:nvPr/>
+        </p:nvSpPr>
+        <p:spPr>
+          <a:xfrm>
+            <a:off x="548640" y="6473952"/>
+            <a:ext cx="8229600" cy="384048"/>
+          </a:xfrm>
+          <a:prstGeom prst="rect">
+            <a:avLst/>
+          </a:prstGeom>
+          <a:noFill/>
+        </p:spPr>
+        <p:txBody>
+          <a:bodyPr wrap="square" lIns="45720" rIns="45720" anchor="ctr">
             <a:normAutofit/>
           </a:bodyPr>
           <a:lstStyle/>
           <a:p>
             <a:pPr algn="l">
               <a:spcAft>
-                <a:spcPts val="400"/>
+                <a:spcPts val="0"/>
               </a:spcAft>
             </a:pPr>
             <a:r>
-              <a:rPr lang="uz-UZ" sz="4000" b="1" dirty="0">
-                <a:solidFill>
-                  <a:srgbClr val="00B4D8"/>
-                </a:solidFill>
-                <a:latin typeface="Times New Roman"/>
-                <a:cs typeface="Times New Roman"/>
-                <a:ea typeface="Times New Roman"/>
-              </a:rPr>
-              <a:t>Xulosa</a:t>
+              <a:rPr lang="uz-UZ" sz="1200" dirty="0">
+                <a:solidFill>
+                  <a:srgbClr val="9FB3C8"/>
+                </a:solidFill>
+                <a:latin typeface="Times New Roman"/>
+                <a:cs typeface="Times New Roman"/>
+                <a:ea typeface="Times New Roman"/>
+              </a:rPr>
+              <a:t>Kompyuter qizishi va sovutish fizikasi</a:t>
             </a:r>
           </a:p>
         </p:txBody>
       </p:sp>
       <p:sp>
         <p:nvSpPr>
-          <p:cNvPr id="6" name="body"/>
+          <p:cNvPr id="27" name="footernum"/>
           <p:cNvSpPr txBox="1"/>
           <p:nvPr/>
         </p:nvSpPr>
         <p:spPr>
           <a:xfrm>
-            <a:off x="457200" y="2103120"/>
-            <a:ext cx="7132320" cy="4297680"/>
+            <a:off x="10332720" y="6473952"/>
+            <a:ext cx="1371600" cy="384048"/>
           </a:xfrm>
           <a:prstGeom prst="rect">
             <a:avLst/>
@@ -2519,44 +7037,26 @@
           <a:noFill/>
         </p:spPr>
         <p:txBody>
-          <a:bodyPr wrap="square" anchor="t">
+          <a:bodyPr wrap="square" lIns="45720" rIns="45720" anchor="ctr">
             <a:normAutofit/>
           </a:bodyPr>
           <a:lstStyle/>
           <a:p>
-            <a:pPr algn="l">
+            <a:pPr algn="r">
               <a:spcAft>
-                <a:spcPts val="400"/>
+                <a:spcPts val="0"/>
               </a:spcAft>
             </a:pPr>
             <a:r>
-              <a:rPr lang="uz-UZ" sz="1800" dirty="0">
-                <a:solidFill>
-                  <a:srgbClr val="F0F6FC"/>
-                </a:solidFill>
-                <a:latin typeface="Times New Roman"/>
-                <a:cs typeface="Times New Roman"/>
-                <a:ea typeface="Times New Roman"/>
-              </a:rPr>
-              <a:t>Xulosa qilib aytganda, kompyuterning ishlashi to'liq elektr toki va termodinamika qonunlariga bog'liq. Axborot qanchalik tez qayta ishlansa, shuncha ko'p elektr issiqlikka aylanadi.</a:t>
-            </a:r>
-          </a:p>
-          <a:p>
-            <a:pPr algn="l">
-              <a:spcAft>
-                <a:spcPts val="400"/>
-              </a:spcAft>
-            </a:pPr>
-            <a:r>
-              <a:rPr lang="uz-UZ" sz="1800" dirty="0">
-                <a:solidFill>
-                  <a:srgbClr val="F0F6FC"/>
-                </a:solidFill>
-                <a:latin typeface="Times New Roman"/>
-                <a:cs typeface="Times New Roman"/>
-                <a:ea typeface="Times New Roman"/>
-              </a:rPr>
-              <a:t>Samarali sovutish tizimlari (kulerlar, radiatorlar va termopasta) nafaqat kompyuterning qotib qolmasligini, balki uning ehtiyot qismlari yonib ketmasdan uzoq yillar barqaror ishlashini kafolatlovchi asosiy injenerlik yechimidir.</a:t>
+              <a:rPr lang="uz-UZ" sz="1200" b="1" dirty="0">
+                <a:solidFill>
+                  <a:srgbClr val="00B4D8"/>
+                </a:solidFill>
+                <a:latin typeface="Times New Roman"/>
+                <a:cs typeface="Times New Roman"/>
+                <a:ea typeface="Times New Roman"/>
+              </a:rPr>
+              <a:t>9 / 10</a:t>
             </a:r>
           </a:p>
         </p:txBody>
